--- a/output/wordlabs-form-3day.pptx
+++ b/output/wordlabs-form-3day.pptx
@@ -5622,7 +5622,7 @@
                 <a:ea typeface="Trebuchet MS" pitchFamily="34" charset="-122"/>
                 <a:cs typeface="Trebuchet MS" pitchFamily="34" charset="-120"/>
               </a:rPr>
-              <a:t>1</a:t>
+              <a:t>0</a:t>
             </a:r>
             <a:pPr algn="ctr" indent="0" marL="0">
               <a:buNone/>
@@ -6040,7 +6040,7 @@
                 <a:ea typeface="Calibri" pitchFamily="34" charset="-122"/>
                 <a:cs typeface="Calibri" pitchFamily="34" charset="-120"/>
               </a:rPr>
-              <a:t>The dancers moved into a beautiful </a:t>
+              <a:t>The students were asked to </a:t>
             </a:r>
             <a:pPr algn="l" indent="0" marL="0">
               <a:buNone/>
@@ -6057,7 +6057,7 @@
                 <a:ea typeface="Calibri" pitchFamily="34" charset="-122"/>
                 <a:cs typeface="Calibri" pitchFamily="34" charset="-120"/>
               </a:rPr>
-              <a:t>formation</a:t>
+              <a:t>perform</a:t>
             </a:r>
             <a:pPr algn="l" indent="0" marL="0">
               <a:buNone/>
@@ -6071,7 +6071,7 @@
                 <a:ea typeface="Calibri" pitchFamily="34" charset="-122"/>
                 <a:cs typeface="Calibri" pitchFamily="34" charset="-120"/>
               </a:rPr>
-              <a:t>, and their </a:t>
+              <a:t> their best work and </a:t>
             </a:r>
             <a:pPr algn="l" indent="0" marL="0">
               <a:buNone/>
@@ -6088,7 +6088,7 @@
                 <a:ea typeface="Calibri" pitchFamily="34" charset="-122"/>
                 <a:cs typeface="Calibri" pitchFamily="34" charset="-120"/>
               </a:rPr>
-              <a:t>formal</a:t>
+              <a:t>conform</a:t>
             </a:r>
             <a:pPr algn="l" indent="0" marL="0">
               <a:buNone/>
@@ -6102,7 +6102,7 @@
                 <a:ea typeface="Calibri" pitchFamily="34" charset="-122"/>
                 <a:cs typeface="Calibri" pitchFamily="34" charset="-120"/>
               </a:rPr>
-              <a:t> costumes sparkled under the lights.</a:t>
+              <a:t> to the rules of the competition.</a:t>
             </a:r>
             <a:endParaRPr lang="en-US" sz="1800" dirty="0"/>
           </a:p>
@@ -6257,7 +6257,7 @@
                 <a:ea typeface="Trebuchet MS" pitchFamily="34" charset="-122"/>
                 <a:cs typeface="Trebuchet MS" pitchFamily="34" charset="-120"/>
               </a:rPr>
-              <a:t>formation</a:t>
+              <a:t>perform</a:t>
             </a:r>
             <a:endParaRPr lang="en-US" sz="1400" dirty="0"/>
           </a:p>
@@ -6385,7 +6385,7 @@
                 <a:ea typeface="Trebuchet MS" pitchFamily="34" charset="-122"/>
                 <a:cs typeface="Trebuchet MS" pitchFamily="34" charset="-120"/>
               </a:rPr>
-              <a:t>formal</a:t>
+              <a:t>conform</a:t>
             </a:r>
             <a:endParaRPr lang="en-US" sz="1400" dirty="0"/>
           </a:p>
@@ -6855,7 +6855,7 @@
                 <a:ea typeface="Trebuchet MS" pitchFamily="34" charset="-122"/>
                 <a:cs typeface="Trebuchet MS" pitchFamily="34" charset="-120"/>
               </a:rPr>
-              <a:t>formation</a:t>
+              <a:t>perform</a:t>
             </a:r>
             <a:endParaRPr lang="en-US" sz="2800" dirty="0"/>
           </a:p>
@@ -7682,7 +7682,7 @@
                 <a:ea typeface="Trebuchet MS" pitchFamily="34" charset="-122"/>
                 <a:cs typeface="Trebuchet MS" pitchFamily="34" charset="-120"/>
               </a:rPr>
-              <a:t>formation</a:t>
+              <a:t>perform</a:t>
             </a:r>
             <a:endParaRPr lang="en-US" sz="2800" dirty="0"/>
           </a:p>
@@ -7771,11 +7771,11 @@
             </a:avLst>
           </a:prstGeom>
           <a:solidFill>
-            <a:srgbClr val="CCFBF1"/>
+            <a:srgbClr val="DDD6FE"/>
           </a:solidFill>
           <a:ln w="19050">
             <a:solidFill>
-              <a:srgbClr val="0D9488"/>
+              <a:srgbClr val="7C3AED"/>
             </a:solidFill>
             <a:prstDash val="solid"/>
           </a:ln>
@@ -7815,13 +7815,13 @@
             <a:r>
               <a:rPr lang="en-US" sz="1300" b="1" dirty="0">
                 <a:solidFill>
-                  <a:srgbClr val="0F766E"/>
+                  <a:srgbClr val="4C1D95"/>
                 </a:solidFill>
                 <a:latin typeface="Trebuchet MS" pitchFamily="34" charset="0"/>
                 <a:ea typeface="Trebuchet MS" pitchFamily="34" charset="-122"/>
                 <a:cs typeface="Trebuchet MS" pitchFamily="34" charset="-120"/>
               </a:rPr>
-              <a:t>form</a:t>
+              <a:t>per</a:t>
             </a:r>
             <a:endParaRPr lang="en-US" sz="1300" dirty="0"/>
           </a:p>
@@ -7860,7 +7860,7 @@
                 <a:ea typeface="Calibri" pitchFamily="34" charset="-122"/>
                 <a:cs typeface="Calibri" pitchFamily="34" charset="-120"/>
               </a:rPr>
-              <a:t>shape or structure</a:t>
+              <a:t>through, thoroughly</a:t>
             </a:r>
             <a:endParaRPr lang="en-US" sz="850" dirty="0"/>
           </a:p>
@@ -7883,11 +7883,11 @@
             </a:avLst>
           </a:prstGeom>
           <a:solidFill>
-            <a:srgbClr val="FCE7F3"/>
+            <a:srgbClr val="CCFBF1"/>
           </a:solidFill>
           <a:ln w="19050">
             <a:solidFill>
-              <a:srgbClr val="DB2777"/>
+              <a:srgbClr val="0D9488"/>
             </a:solidFill>
             <a:prstDash val="solid"/>
           </a:ln>
@@ -7927,13 +7927,13 @@
             <a:r>
               <a:rPr lang="en-US" sz="1300" b="1" dirty="0">
                 <a:solidFill>
-                  <a:srgbClr val="9D174D"/>
+                  <a:srgbClr val="0F766E"/>
                 </a:solidFill>
                 <a:latin typeface="Trebuchet MS" pitchFamily="34" charset="0"/>
                 <a:ea typeface="Trebuchet MS" pitchFamily="34" charset="-122"/>
                 <a:cs typeface="Trebuchet MS" pitchFamily="34" charset="-120"/>
               </a:rPr>
-              <a:t>ation</a:t>
+              <a:t>form</a:t>
             </a:r>
             <a:endParaRPr lang="en-US" sz="1300" dirty="0"/>
           </a:p>
@@ -7972,7 +7972,7 @@
                 <a:ea typeface="Calibri" pitchFamily="34" charset="-122"/>
                 <a:cs typeface="Calibri" pitchFamily="34" charset="-120"/>
               </a:rPr>
-              <a:t>act or result of</a:t>
+              <a:t>shape, arrange</a:t>
             </a:r>
             <a:endParaRPr lang="en-US" sz="850" dirty="0"/>
           </a:p>
@@ -8667,7 +8667,7 @@
                 <a:ea typeface="Trebuchet MS" pitchFamily="34" charset="-122"/>
                 <a:cs typeface="Trebuchet MS" pitchFamily="34" charset="-120"/>
               </a:rPr>
-              <a:t>formation</a:t>
+              <a:t>perform</a:t>
             </a:r>
             <a:endParaRPr lang="en-US" sz="2800" dirty="0"/>
           </a:p>
@@ -8756,11 +8756,11 @@
             </a:avLst>
           </a:prstGeom>
           <a:solidFill>
-            <a:srgbClr val="CCFBF1"/>
+            <a:srgbClr val="DDD6FE"/>
           </a:solidFill>
           <a:ln w="19050">
             <a:solidFill>
-              <a:srgbClr val="0D9488"/>
+              <a:srgbClr val="7C3AED"/>
             </a:solidFill>
             <a:prstDash val="solid"/>
           </a:ln>
@@ -8800,13 +8800,13 @@
             <a:r>
               <a:rPr lang="en-US" sz="1300" b="1" dirty="0">
                 <a:solidFill>
-                  <a:srgbClr val="0F766E"/>
+                  <a:srgbClr val="4C1D95"/>
                 </a:solidFill>
                 <a:latin typeface="Trebuchet MS" pitchFamily="34" charset="0"/>
                 <a:ea typeface="Trebuchet MS" pitchFamily="34" charset="-122"/>
                 <a:cs typeface="Trebuchet MS" pitchFamily="34" charset="-120"/>
               </a:rPr>
-              <a:t>form</a:t>
+              <a:t>per</a:t>
             </a:r>
             <a:endParaRPr lang="en-US" sz="1300" dirty="0"/>
           </a:p>
@@ -8845,7 +8845,7 @@
                 <a:ea typeface="Calibri" pitchFamily="34" charset="-122"/>
                 <a:cs typeface="Calibri" pitchFamily="34" charset="-120"/>
               </a:rPr>
-              <a:t>shape or structure</a:t>
+              <a:t>through, thoroughly</a:t>
             </a:r>
             <a:endParaRPr lang="en-US" sz="850" dirty="0"/>
           </a:p>
@@ -8868,11 +8868,11 @@
             </a:avLst>
           </a:prstGeom>
           <a:solidFill>
-            <a:srgbClr val="FCE7F3"/>
+            <a:srgbClr val="CCFBF1"/>
           </a:solidFill>
           <a:ln w="19050">
             <a:solidFill>
-              <a:srgbClr val="DB2777"/>
+              <a:srgbClr val="0D9488"/>
             </a:solidFill>
             <a:prstDash val="solid"/>
           </a:ln>
@@ -8912,13 +8912,13 @@
             <a:r>
               <a:rPr lang="en-US" sz="1300" b="1" dirty="0">
                 <a:solidFill>
-                  <a:srgbClr val="9D174D"/>
+                  <a:srgbClr val="0F766E"/>
                 </a:solidFill>
                 <a:latin typeface="Trebuchet MS" pitchFamily="34" charset="0"/>
                 <a:ea typeface="Trebuchet MS" pitchFamily="34" charset="-122"/>
                 <a:cs typeface="Trebuchet MS" pitchFamily="34" charset="-120"/>
               </a:rPr>
-              <a:t>ation</a:t>
+              <a:t>form</a:t>
             </a:r>
             <a:endParaRPr lang="en-US" sz="1300" dirty="0"/>
           </a:p>
@@ -8957,7 +8957,7 @@
                 <a:ea typeface="Calibri" pitchFamily="34" charset="-122"/>
                 <a:cs typeface="Calibri" pitchFamily="34" charset="-120"/>
               </a:rPr>
-              <a:t>act or result of</a:t>
+              <a:t>shape, arrange</a:t>
             </a:r>
             <a:endParaRPr lang="en-US" sz="850" dirty="0"/>
           </a:p>
@@ -9064,7 +9064,7 @@
         </p:nvSpPr>
         <p:spPr>
           <a:xfrm>
-            <a:off x="2313432" y="3364992"/>
+            <a:off x="2999232" y="3364992"/>
             <a:ext cx="1645920" cy="475488"/>
           </a:xfrm>
           <a:prstGeom prst="rect">
@@ -9091,7 +9091,7 @@
         </p:nvSpPr>
         <p:spPr>
           <a:xfrm>
-            <a:off x="2313432" y="3364992"/>
+            <a:off x="2999232" y="3364992"/>
             <a:ext cx="1645920" cy="475488"/>
           </a:xfrm>
           <a:prstGeom prst="rect">
@@ -9116,7 +9116,7 @@
                 <a:ea typeface="Trebuchet MS" pitchFamily="34" charset="-122"/>
                 <a:cs typeface="Trebuchet MS" pitchFamily="34" charset="-120"/>
               </a:rPr>
-              <a:t>for</a:t>
+              <a:t>per</a:t>
             </a:r>
             <a:endParaRPr lang="en-US" sz="1400" dirty="0"/>
           </a:p>
@@ -9130,8 +9130,8 @@
         </p:nvSpPr>
         <p:spPr>
           <a:xfrm>
-            <a:off x="3959352" y="3364992"/>
-            <a:ext cx="411480" cy="475488"/>
+            <a:off x="4645152" y="3364992"/>
+            <a:ext cx="1097280" cy="475488"/>
           </a:xfrm>
           <a:prstGeom prst="rect">
             <a:avLst/>
@@ -9169,7 +9169,7 @@
         </p:nvSpPr>
         <p:spPr>
           <a:xfrm>
-            <a:off x="4370832" y="3364992"/>
+            <a:off x="5742432" y="3364992"/>
             <a:ext cx="1645920" cy="475488"/>
           </a:xfrm>
           <a:prstGeom prst="rect">
@@ -9196,7 +9196,7 @@
         </p:nvSpPr>
         <p:spPr>
           <a:xfrm>
-            <a:off x="4370832" y="3364992"/>
+            <a:off x="5742432" y="3364992"/>
             <a:ext cx="1645920" cy="475488"/>
           </a:xfrm>
           <a:prstGeom prst="rect">
@@ -9221,7 +9221,7 @@
                 <a:ea typeface="Trebuchet MS" pitchFamily="34" charset="-122"/>
                 <a:cs typeface="Trebuchet MS" pitchFamily="34" charset="-120"/>
               </a:rPr>
-              <a:t>ma</a:t>
+              <a:t>form</a:t>
             </a:r>
             <a:endParaRPr lang="en-US" sz="1400" dirty="0"/>
           </a:p>
@@ -9229,14 +9229,41 @@
       </p:sp>
       <p:sp>
         <p:nvSpPr>
-          <p:cNvPr id="30" name="Text 28"/>
-          <p:cNvSpPr/>
-          <p:nvPr/>
-        </p:nvSpPr>
-        <p:spPr>
-          <a:xfrm>
-            <a:off x="6016752" y="3364992"/>
-            <a:ext cx="411480" cy="475488"/>
+          <p:cNvPr id="30" name="Shape 28"/>
+          <p:cNvSpPr/>
+          <p:nvPr/>
+        </p:nvSpPr>
+        <p:spPr>
+          <a:xfrm>
+            <a:off x="365760" y="4096512"/>
+            <a:ext cx="1371600" cy="804672"/>
+          </a:xfrm>
+          <a:prstGeom prst="rect">
+            <a:avLst>
+              <a:gd name="adj" fmla="val 6818"/>
+            </a:avLst>
+          </a:prstGeom>
+          <a:solidFill>
+            <a:srgbClr val="E2E8F0"/>
+          </a:solidFill>
+          <a:ln w="12700">
+            <a:solidFill>
+              <a:srgbClr val="E2E8F0"/>
+            </a:solidFill>
+            <a:prstDash val="solid"/>
+          </a:ln>
+        </p:spPr>
+      </p:sp>
+      <p:sp>
+        <p:nvSpPr>
+          <p:cNvPr id="31" name="Text 29"/>
+          <p:cNvSpPr/>
+          <p:nvPr/>
+        </p:nvSpPr>
+        <p:spPr>
+          <a:xfrm>
+            <a:off x="365760" y="4096512"/>
+            <a:ext cx="1371600" cy="804672"/>
           </a:xfrm>
           <a:prstGeom prst="rect">
             <a:avLst/>
@@ -9252,96 +9279,30 @@
               <a:buNone/>
             </a:pPr>
             <a:r>
-              <a:rPr lang="en-US" sz="1600" b="1" dirty="0">
-                <a:solidFill>
-                  <a:srgbClr val="0D9488"/>
+              <a:rPr lang="en-US" sz="1100" b="1" dirty="0">
+                <a:solidFill>
+                  <a:srgbClr val="475569"/>
                 </a:solidFill>
                 <a:latin typeface="Trebuchet MS" pitchFamily="34" charset="0"/>
                 <a:ea typeface="Trebuchet MS" pitchFamily="34" charset="-122"/>
                 <a:cs typeface="Trebuchet MS" pitchFamily="34" charset="-120"/>
               </a:rPr>
-              <a:t>·</a:t>
-            </a:r>
-            <a:endParaRPr lang="en-US" sz="1600" dirty="0"/>
-          </a:p>
-        </p:txBody>
-      </p:sp>
-      <p:sp>
-        <p:nvSpPr>
-          <p:cNvPr id="31" name="Shape 29"/>
-          <p:cNvSpPr/>
-          <p:nvPr/>
-        </p:nvSpPr>
-        <p:spPr>
-          <a:xfrm>
-            <a:off x="6428232" y="3364992"/>
-            <a:ext cx="1645920" cy="475488"/>
-          </a:xfrm>
-          <a:prstGeom prst="rect">
-            <a:avLst>
-              <a:gd name="adj" fmla="val 9615"/>
-            </a:avLst>
-          </a:prstGeom>
-          <a:solidFill>
-            <a:srgbClr val="FFFFFF"/>
-          </a:solidFill>
-          <a:ln w="12700">
-            <a:solidFill>
-              <a:srgbClr val="0D9488"/>
-            </a:solidFill>
-            <a:prstDash val="solid"/>
-          </a:ln>
-        </p:spPr>
-      </p:sp>
-      <p:sp>
-        <p:nvSpPr>
-          <p:cNvPr id="32" name="Text 30"/>
-          <p:cNvSpPr/>
-          <p:nvPr/>
-        </p:nvSpPr>
-        <p:spPr>
-          <a:xfrm>
-            <a:off x="6428232" y="3364992"/>
-            <a:ext cx="1645920" cy="475488"/>
-          </a:xfrm>
-          <a:prstGeom prst="rect">
-            <a:avLst/>
-          </a:prstGeom>
-          <a:noFill/>
-          <a:ln/>
-        </p:spPr>
-        <p:txBody>
-          <a:bodyPr wrap="square" lIns="0" tIns="0" rIns="0" bIns="0" rtlCol="0" anchor="ctr"/>
-          <a:lstStyle/>
-          <a:p>
-            <a:pPr algn="ctr" indent="0" marL="0">
-              <a:buNone/>
-            </a:pPr>
-            <a:r>
-              <a:rPr lang="en-US" sz="1400" b="1" dirty="0">
-                <a:solidFill>
-                  <a:srgbClr val="0D9488"/>
-                </a:solidFill>
-                <a:latin typeface="Trebuchet MS" pitchFamily="34" charset="0"/>
-                <a:ea typeface="Trebuchet MS" pitchFamily="34" charset="-122"/>
-                <a:cs typeface="Trebuchet MS" pitchFamily="34" charset="-120"/>
-              </a:rPr>
-              <a:t>tion</a:t>
-            </a:r>
-            <a:endParaRPr lang="en-US" sz="1400" dirty="0"/>
-          </a:p>
-        </p:txBody>
-      </p:sp>
-      <p:sp>
-        <p:nvSpPr>
-          <p:cNvPr id="33" name="Shape 31"/>
-          <p:cNvSpPr/>
-          <p:nvPr/>
-        </p:nvSpPr>
-        <p:spPr>
-          <a:xfrm>
-            <a:off x="365760" y="4096512"/>
-            <a:ext cx="1371600" cy="804672"/>
+              <a:t>Phonemes</a:t>
+            </a:r>
+            <a:endParaRPr lang="en-US" sz="1100" dirty="0"/>
+          </a:p>
+        </p:txBody>
+      </p:sp>
+      <p:sp>
+        <p:nvSpPr>
+          <p:cNvPr id="32" name="Shape 30"/>
+          <p:cNvSpPr/>
+          <p:nvPr/>
+        </p:nvSpPr>
+        <p:spPr>
+          <a:xfrm>
+            <a:off x="1874520" y="4096512"/>
+            <a:ext cx="6903720" cy="804672"/>
           </a:xfrm>
           <a:prstGeom prst="rect">
             <a:avLst>
@@ -9349,85 +9310,19 @@
             </a:avLst>
           </a:prstGeom>
           <a:solidFill>
-            <a:srgbClr val="E2E8F0"/>
+            <a:srgbClr val="F8FAFC"/>
           </a:solidFill>
           <a:ln w="12700">
             <a:solidFill>
               <a:srgbClr val="E2E8F0"/>
             </a:solidFill>
-            <a:prstDash val="solid"/>
-          </a:ln>
-        </p:spPr>
-      </p:sp>
-      <p:sp>
-        <p:nvSpPr>
-          <p:cNvPr id="34" name="Text 32"/>
-          <p:cNvSpPr/>
-          <p:nvPr/>
-        </p:nvSpPr>
-        <p:spPr>
-          <a:xfrm>
-            <a:off x="365760" y="4096512"/>
-            <a:ext cx="1371600" cy="804672"/>
-          </a:xfrm>
-          <a:prstGeom prst="rect">
-            <a:avLst/>
-          </a:prstGeom>
-          <a:noFill/>
-          <a:ln/>
-        </p:spPr>
-        <p:txBody>
-          <a:bodyPr wrap="square" lIns="0" tIns="0" rIns="0" bIns="0" rtlCol="0" anchor="ctr"/>
-          <a:lstStyle/>
-          <a:p>
-            <a:pPr algn="ctr" indent="0" marL="0">
-              <a:buNone/>
-            </a:pPr>
-            <a:r>
-              <a:rPr lang="en-US" sz="1100" b="1" dirty="0">
-                <a:solidFill>
-                  <a:srgbClr val="475569"/>
-                </a:solidFill>
-                <a:latin typeface="Trebuchet MS" pitchFamily="34" charset="0"/>
-                <a:ea typeface="Trebuchet MS" pitchFamily="34" charset="-122"/>
-                <a:cs typeface="Trebuchet MS" pitchFamily="34" charset="-120"/>
-              </a:rPr>
-              <a:t>Phonemes</a:t>
-            </a:r>
-            <a:endParaRPr lang="en-US" sz="1100" dirty="0"/>
-          </a:p>
-        </p:txBody>
-      </p:sp>
-      <p:sp>
-        <p:nvSpPr>
-          <p:cNvPr id="35" name="Shape 33"/>
-          <p:cNvSpPr/>
-          <p:nvPr/>
-        </p:nvSpPr>
-        <p:spPr>
-          <a:xfrm>
-            <a:off x="1874520" y="4096512"/>
-            <a:ext cx="6903720" cy="804672"/>
-          </a:xfrm>
-          <a:prstGeom prst="rect">
-            <a:avLst>
-              <a:gd name="adj" fmla="val 6818"/>
-            </a:avLst>
-          </a:prstGeom>
-          <a:solidFill>
-            <a:srgbClr val="F8FAFC"/>
-          </a:solidFill>
-          <a:ln w="12700">
-            <a:solidFill>
-              <a:srgbClr val="E2E8F0"/>
-            </a:solidFill>
             <a:prstDash val="dash"/>
           </a:ln>
         </p:spPr>
       </p:sp>
       <p:sp>
         <p:nvSpPr>
-          <p:cNvPr id="36" name="Text 34"/>
+          <p:cNvPr id="33" name="Text 31"/>
           <p:cNvSpPr/>
           <p:nvPr/>
         </p:nvSpPr>
@@ -9889,7 +9784,7 @@
                 <a:ea typeface="Trebuchet MS" pitchFamily="34" charset="-122"/>
                 <a:cs typeface="Trebuchet MS" pitchFamily="34" charset="-120"/>
               </a:rPr>
-              <a:t>formation</a:t>
+              <a:t>perform</a:t>
             </a:r>
             <a:endParaRPr lang="en-US" sz="2800" dirty="0"/>
           </a:p>
@@ -9978,11 +9873,11 @@
             </a:avLst>
           </a:prstGeom>
           <a:solidFill>
-            <a:srgbClr val="CCFBF1"/>
+            <a:srgbClr val="DDD6FE"/>
           </a:solidFill>
           <a:ln w="19050">
             <a:solidFill>
-              <a:srgbClr val="0D9488"/>
+              <a:srgbClr val="7C3AED"/>
             </a:solidFill>
             <a:prstDash val="solid"/>
           </a:ln>
@@ -10022,13 +9917,13 @@
             <a:r>
               <a:rPr lang="en-US" sz="1300" b="1" dirty="0">
                 <a:solidFill>
-                  <a:srgbClr val="0F766E"/>
+                  <a:srgbClr val="4C1D95"/>
                 </a:solidFill>
                 <a:latin typeface="Trebuchet MS" pitchFamily="34" charset="0"/>
                 <a:ea typeface="Trebuchet MS" pitchFamily="34" charset="-122"/>
                 <a:cs typeface="Trebuchet MS" pitchFamily="34" charset="-120"/>
               </a:rPr>
-              <a:t>form</a:t>
+              <a:t>per</a:t>
             </a:r>
             <a:endParaRPr lang="en-US" sz="1300" dirty="0"/>
           </a:p>
@@ -10067,7 +9962,7 @@
                 <a:ea typeface="Calibri" pitchFamily="34" charset="-122"/>
                 <a:cs typeface="Calibri" pitchFamily="34" charset="-120"/>
               </a:rPr>
-              <a:t>shape or structure</a:t>
+              <a:t>through, thoroughly</a:t>
             </a:r>
             <a:endParaRPr lang="en-US" sz="850" dirty="0"/>
           </a:p>
@@ -10090,11 +9985,11 @@
             </a:avLst>
           </a:prstGeom>
           <a:solidFill>
-            <a:srgbClr val="FCE7F3"/>
+            <a:srgbClr val="CCFBF1"/>
           </a:solidFill>
           <a:ln w="19050">
             <a:solidFill>
-              <a:srgbClr val="DB2777"/>
+              <a:srgbClr val="0D9488"/>
             </a:solidFill>
             <a:prstDash val="solid"/>
           </a:ln>
@@ -10134,13 +10029,13 @@
             <a:r>
               <a:rPr lang="en-US" sz="1300" b="1" dirty="0">
                 <a:solidFill>
-                  <a:srgbClr val="9D174D"/>
+                  <a:srgbClr val="0F766E"/>
                 </a:solidFill>
                 <a:latin typeface="Trebuchet MS" pitchFamily="34" charset="0"/>
                 <a:ea typeface="Trebuchet MS" pitchFamily="34" charset="-122"/>
                 <a:cs typeface="Trebuchet MS" pitchFamily="34" charset="-120"/>
               </a:rPr>
-              <a:t>ation</a:t>
+              <a:t>form</a:t>
             </a:r>
             <a:endParaRPr lang="en-US" sz="1300" dirty="0"/>
           </a:p>
@@ -10179,7 +10074,7 @@
                 <a:ea typeface="Calibri" pitchFamily="34" charset="-122"/>
                 <a:cs typeface="Calibri" pitchFamily="34" charset="-120"/>
               </a:rPr>
-              <a:t>act or result of</a:t>
+              <a:t>shape, arrange</a:t>
             </a:r>
             <a:endParaRPr lang="en-US" sz="850" dirty="0"/>
           </a:p>
@@ -10286,7 +10181,7 @@
         </p:nvSpPr>
         <p:spPr>
           <a:xfrm>
-            <a:off x="2313432" y="3364992"/>
+            <a:off x="2999232" y="3364992"/>
             <a:ext cx="1645920" cy="475488"/>
           </a:xfrm>
           <a:prstGeom prst="rect">
@@ -10313,7 +10208,7 @@
         </p:nvSpPr>
         <p:spPr>
           <a:xfrm>
-            <a:off x="2313432" y="3364992"/>
+            <a:off x="2999232" y="3364992"/>
             <a:ext cx="1645920" cy="475488"/>
           </a:xfrm>
           <a:prstGeom prst="rect">
@@ -10338,7 +10233,7 @@
                 <a:ea typeface="Trebuchet MS" pitchFamily="34" charset="-122"/>
                 <a:cs typeface="Trebuchet MS" pitchFamily="34" charset="-120"/>
               </a:rPr>
-              <a:t>for</a:t>
+              <a:t>per</a:t>
             </a:r>
             <a:endParaRPr lang="en-US" sz="1400" dirty="0"/>
           </a:p>
@@ -10352,8 +10247,8 @@
         </p:nvSpPr>
         <p:spPr>
           <a:xfrm>
-            <a:off x="3959352" y="3364992"/>
-            <a:ext cx="411480" cy="475488"/>
+            <a:off x="4645152" y="3364992"/>
+            <a:ext cx="1097280" cy="475488"/>
           </a:xfrm>
           <a:prstGeom prst="rect">
             <a:avLst/>
@@ -10391,7 +10286,7 @@
         </p:nvSpPr>
         <p:spPr>
           <a:xfrm>
-            <a:off x="4370832" y="3364992"/>
+            <a:off x="5742432" y="3364992"/>
             <a:ext cx="1645920" cy="475488"/>
           </a:xfrm>
           <a:prstGeom prst="rect">
@@ -10418,7 +10313,7 @@
         </p:nvSpPr>
         <p:spPr>
           <a:xfrm>
-            <a:off x="4370832" y="3364992"/>
+            <a:off x="5742432" y="3364992"/>
             <a:ext cx="1645920" cy="475488"/>
           </a:xfrm>
           <a:prstGeom prst="rect">
@@ -10443,7 +10338,7 @@
                 <a:ea typeface="Trebuchet MS" pitchFamily="34" charset="-122"/>
                 <a:cs typeface="Trebuchet MS" pitchFamily="34" charset="-120"/>
               </a:rPr>
-              <a:t>ma</a:t>
+              <a:t>form</a:t>
             </a:r>
             <a:endParaRPr lang="en-US" sz="1400" dirty="0"/>
           </a:p>
@@ -10451,14 +10346,41 @@
       </p:sp>
       <p:sp>
         <p:nvSpPr>
-          <p:cNvPr id="30" name="Text 28"/>
-          <p:cNvSpPr/>
-          <p:nvPr/>
-        </p:nvSpPr>
-        <p:spPr>
-          <a:xfrm>
-            <a:off x="6016752" y="3364992"/>
-            <a:ext cx="411480" cy="475488"/>
+          <p:cNvPr id="30" name="Shape 28"/>
+          <p:cNvSpPr/>
+          <p:nvPr/>
+        </p:nvSpPr>
+        <p:spPr>
+          <a:xfrm>
+            <a:off x="365760" y="4096512"/>
+            <a:ext cx="1371600" cy="804672"/>
+          </a:xfrm>
+          <a:prstGeom prst="rect">
+            <a:avLst>
+              <a:gd name="adj" fmla="val 6818"/>
+            </a:avLst>
+          </a:prstGeom>
+          <a:solidFill>
+            <a:srgbClr val="E2E8F0"/>
+          </a:solidFill>
+          <a:ln w="12700">
+            <a:solidFill>
+              <a:srgbClr val="E2E8F0"/>
+            </a:solidFill>
+            <a:prstDash val="solid"/>
+          </a:ln>
+        </p:spPr>
+      </p:sp>
+      <p:sp>
+        <p:nvSpPr>
+          <p:cNvPr id="31" name="Text 29"/>
+          <p:cNvSpPr/>
+          <p:nvPr/>
+        </p:nvSpPr>
+        <p:spPr>
+          <a:xfrm>
+            <a:off x="365760" y="4096512"/>
+            <a:ext cx="1371600" cy="804672"/>
           </a:xfrm>
           <a:prstGeom prst="rect">
             <a:avLst/>
@@ -10474,57 +10396,84 @@
               <a:buNone/>
             </a:pPr>
             <a:r>
-              <a:rPr lang="en-US" sz="1600" b="1" dirty="0">
-                <a:solidFill>
-                  <a:srgbClr val="0D9488"/>
+              <a:rPr lang="en-US" sz="1100" b="1" dirty="0">
+                <a:solidFill>
+                  <a:srgbClr val="475569"/>
                 </a:solidFill>
                 <a:latin typeface="Trebuchet MS" pitchFamily="34" charset="0"/>
                 <a:ea typeface="Trebuchet MS" pitchFamily="34" charset="-122"/>
                 <a:cs typeface="Trebuchet MS" pitchFamily="34" charset="-120"/>
               </a:rPr>
-              <a:t>·</a:t>
-            </a:r>
-            <a:endParaRPr lang="en-US" sz="1600" dirty="0"/>
-          </a:p>
-        </p:txBody>
-      </p:sp>
-      <p:sp>
-        <p:nvSpPr>
-          <p:cNvPr id="31" name="Shape 29"/>
-          <p:cNvSpPr/>
-          <p:nvPr/>
-        </p:nvSpPr>
-        <p:spPr>
-          <a:xfrm>
-            <a:off x="6428232" y="3364992"/>
-            <a:ext cx="1645920" cy="475488"/>
+              <a:t>Phonemes</a:t>
+            </a:r>
+            <a:endParaRPr lang="en-US" sz="1100" dirty="0"/>
+          </a:p>
+        </p:txBody>
+      </p:sp>
+      <p:sp>
+        <p:nvSpPr>
+          <p:cNvPr id="32" name="Shape 30"/>
+          <p:cNvSpPr/>
+          <p:nvPr/>
+        </p:nvSpPr>
+        <p:spPr>
+          <a:xfrm>
+            <a:off x="1874520" y="4096512"/>
+            <a:ext cx="6903720" cy="658368"/>
           </a:xfrm>
           <a:prstGeom prst="rect">
             <a:avLst>
-              <a:gd name="adj" fmla="val 9615"/>
+              <a:gd name="adj" fmla="val 8333"/>
             </a:avLst>
           </a:prstGeom>
           <a:solidFill>
+            <a:srgbClr val="FCE7F3"/>
+          </a:solidFill>
+          <a:ln w="12700">
+            <a:solidFill>
+              <a:srgbClr val="DB2777"/>
+            </a:solidFill>
+            <a:prstDash val="solid"/>
+          </a:ln>
+        </p:spPr>
+      </p:sp>
+      <p:sp>
+        <p:nvSpPr>
+          <p:cNvPr id="33" name="Shape 31"/>
+          <p:cNvSpPr/>
+          <p:nvPr/>
+        </p:nvSpPr>
+        <p:spPr>
+          <a:xfrm>
+            <a:off x="2427732" y="4169664"/>
+            <a:ext cx="685800" cy="475488"/>
+          </a:xfrm>
+          <a:prstGeom prst="rect">
+            <a:avLst>
+              <a:gd name="adj" fmla="val 7692"/>
+            </a:avLst>
+          </a:prstGeom>
+          <a:solidFill>
             <a:srgbClr val="FFFFFF"/>
           </a:solidFill>
           <a:ln w="12700">
             <a:solidFill>
-              <a:srgbClr val="0D9488"/>
-            </a:solidFill>
-            <a:prstDash val="solid"/>
-          </a:ln>
-        </p:spPr>
-      </p:sp>
-      <p:sp>
-        <p:nvSpPr>
-          <p:cNvPr id="32" name="Text 30"/>
-          <p:cNvSpPr/>
-          <p:nvPr/>
-        </p:nvSpPr>
-        <p:spPr>
-          <a:xfrm>
-            <a:off x="6428232" y="3364992"/>
-            <a:ext cx="1645920" cy="475488"/>
+              <a:srgbClr val="DB2777"/>
+            </a:solidFill>
+            <a:prstDash val="solid"/>
+          </a:ln>
+        </p:spPr>
+      </p:sp>
+      <p:sp>
+        <p:nvSpPr>
+          <p:cNvPr id="34" name="Text 32"/>
+          <p:cNvSpPr/>
+          <p:nvPr/>
+        </p:nvSpPr>
+        <p:spPr>
+          <a:xfrm>
+            <a:off x="2427732" y="4169664"/>
+            <a:ext cx="685800" cy="475488"/>
           </a:xfrm>
           <a:prstGeom prst="rect">
             <a:avLst/>
@@ -10540,57 +10489,57 @@
               <a:buNone/>
             </a:pPr>
             <a:r>
-              <a:rPr lang="en-US" sz="1400" b="1" dirty="0">
-                <a:solidFill>
-                  <a:srgbClr val="0D9488"/>
+              <a:rPr lang="en-US" sz="900" b="1" dirty="0">
+                <a:solidFill>
+                  <a:srgbClr val="9D174D"/>
                 </a:solidFill>
                 <a:latin typeface="Trebuchet MS" pitchFamily="34" charset="0"/>
                 <a:ea typeface="Trebuchet MS" pitchFamily="34" charset="-122"/>
                 <a:cs typeface="Trebuchet MS" pitchFamily="34" charset="-120"/>
               </a:rPr>
-              <a:t>tion</a:t>
-            </a:r>
-            <a:endParaRPr lang="en-US" sz="1400" dirty="0"/>
-          </a:p>
-        </p:txBody>
-      </p:sp>
-      <p:sp>
-        <p:nvSpPr>
-          <p:cNvPr id="33" name="Shape 31"/>
-          <p:cNvSpPr/>
-          <p:nvPr/>
-        </p:nvSpPr>
-        <p:spPr>
-          <a:xfrm>
-            <a:off x="365760" y="4096512"/>
-            <a:ext cx="1371600" cy="804672"/>
+              <a:t>p</a:t>
+            </a:r>
+            <a:endParaRPr lang="en-US" sz="900" dirty="0"/>
+          </a:p>
+        </p:txBody>
+      </p:sp>
+      <p:sp>
+        <p:nvSpPr>
+          <p:cNvPr id="35" name="Shape 33"/>
+          <p:cNvSpPr/>
+          <p:nvPr/>
+        </p:nvSpPr>
+        <p:spPr>
+          <a:xfrm>
+            <a:off x="3639312" y="4169664"/>
+            <a:ext cx="685800" cy="475488"/>
           </a:xfrm>
           <a:prstGeom prst="rect">
             <a:avLst>
-              <a:gd name="adj" fmla="val 6818"/>
+              <a:gd name="adj" fmla="val 7692"/>
             </a:avLst>
           </a:prstGeom>
           <a:solidFill>
-            <a:srgbClr val="E2E8F0"/>
-          </a:solidFill>
-          <a:ln w="12700">
-            <a:solidFill>
-              <a:srgbClr val="E2E8F0"/>
-            </a:solidFill>
-            <a:prstDash val="solid"/>
-          </a:ln>
-        </p:spPr>
-      </p:sp>
-      <p:sp>
-        <p:nvSpPr>
-          <p:cNvPr id="34" name="Text 32"/>
-          <p:cNvSpPr/>
-          <p:nvPr/>
-        </p:nvSpPr>
-        <p:spPr>
-          <a:xfrm>
-            <a:off x="365760" y="4096512"/>
-            <a:ext cx="1371600" cy="804672"/>
+            <a:srgbClr val="FFFFFF"/>
+          </a:solidFill>
+          <a:ln w="12700">
+            <a:solidFill>
+              <a:srgbClr val="DB2777"/>
+            </a:solidFill>
+            <a:prstDash val="solid"/>
+          </a:ln>
+        </p:spPr>
+      </p:sp>
+      <p:sp>
+        <p:nvSpPr>
+          <p:cNvPr id="36" name="Text 34"/>
+          <p:cNvSpPr/>
+          <p:nvPr/>
+        </p:nvSpPr>
+        <p:spPr>
+          <a:xfrm>
+            <a:off x="3639312" y="4169664"/>
+            <a:ext cx="685800" cy="475488"/>
           </a:xfrm>
           <a:prstGeom prst="rect">
             <a:avLst/>
@@ -10606,38 +10555,38 @@
               <a:buNone/>
             </a:pPr>
             <a:r>
-              <a:rPr lang="en-US" sz="1100" b="1" dirty="0">
-                <a:solidFill>
-                  <a:srgbClr val="475569"/>
+              <a:rPr lang="en-US" sz="900" b="1" dirty="0">
+                <a:solidFill>
+                  <a:srgbClr val="9D174D"/>
                 </a:solidFill>
                 <a:latin typeface="Trebuchet MS" pitchFamily="34" charset="0"/>
                 <a:ea typeface="Trebuchet MS" pitchFamily="34" charset="-122"/>
                 <a:cs typeface="Trebuchet MS" pitchFamily="34" charset="-120"/>
               </a:rPr>
-              <a:t>Phonemes</a:t>
-            </a:r>
-            <a:endParaRPr lang="en-US" sz="1100" dirty="0"/>
-          </a:p>
-        </p:txBody>
-      </p:sp>
-      <p:sp>
-        <p:nvSpPr>
-          <p:cNvPr id="35" name="Shape 33"/>
-          <p:cNvSpPr/>
-          <p:nvPr/>
-        </p:nvSpPr>
-        <p:spPr>
-          <a:xfrm>
-            <a:off x="1874520" y="4096512"/>
-            <a:ext cx="6903720" cy="804672"/>
+              <a:t>er</a:t>
+            </a:r>
+            <a:endParaRPr lang="en-US" sz="900" dirty="0"/>
+          </a:p>
+        </p:txBody>
+      </p:sp>
+      <p:sp>
+        <p:nvSpPr>
+          <p:cNvPr id="37" name="Shape 35"/>
+          <p:cNvSpPr/>
+          <p:nvPr/>
+        </p:nvSpPr>
+        <p:spPr>
+          <a:xfrm>
+            <a:off x="4850892" y="4169664"/>
+            <a:ext cx="685800" cy="475488"/>
           </a:xfrm>
           <a:prstGeom prst="rect">
             <a:avLst>
-              <a:gd name="adj" fmla="val 6818"/>
+              <a:gd name="adj" fmla="val 7692"/>
             </a:avLst>
           </a:prstGeom>
           <a:solidFill>
-            <a:srgbClr val="FCE7F3"/>
+            <a:srgbClr val="FFFFFF"/>
           </a:solidFill>
           <a:ln w="12700">
             <a:solidFill>
@@ -10649,41 +10598,14 @@
       </p:sp>
       <p:sp>
         <p:nvSpPr>
-          <p:cNvPr id="36" name="Shape 34"/>
-          <p:cNvSpPr/>
-          <p:nvPr/>
-        </p:nvSpPr>
-        <p:spPr>
-          <a:xfrm>
-            <a:off x="2124837" y="4169664"/>
-            <a:ext cx="685800" cy="384048"/>
-          </a:xfrm>
-          <a:prstGeom prst="rect">
-            <a:avLst>
-              <a:gd name="adj" fmla="val 9524"/>
-            </a:avLst>
-          </a:prstGeom>
-          <a:solidFill>
-            <a:srgbClr val="FFFFFF"/>
-          </a:solidFill>
-          <a:ln w="12700">
-            <a:solidFill>
-              <a:srgbClr val="DB2777"/>
-            </a:solidFill>
-            <a:prstDash val="solid"/>
-          </a:ln>
-        </p:spPr>
-      </p:sp>
-      <p:sp>
-        <p:nvSpPr>
-          <p:cNvPr id="37" name="Text 35"/>
-          <p:cNvSpPr/>
-          <p:nvPr/>
-        </p:nvSpPr>
-        <p:spPr>
-          <a:xfrm>
-            <a:off x="2124837" y="4169664"/>
-            <a:ext cx="685800" cy="384048"/>
+          <p:cNvPr id="38" name="Text 36"/>
+          <p:cNvSpPr/>
+          <p:nvPr/>
+        </p:nvSpPr>
+        <p:spPr>
+          <a:xfrm>
+            <a:off x="4850892" y="4169664"/>
+            <a:ext cx="685800" cy="475488"/>
           </a:xfrm>
           <a:prstGeom prst="rect">
             <a:avLst/>
@@ -10715,18 +10637,18 @@
       </p:sp>
       <p:sp>
         <p:nvSpPr>
-          <p:cNvPr id="38" name="Shape 36"/>
-          <p:cNvSpPr/>
-          <p:nvPr/>
-        </p:nvSpPr>
-        <p:spPr>
-          <a:xfrm>
-            <a:off x="3033522" y="4169664"/>
-            <a:ext cx="685800" cy="384048"/>
+          <p:cNvPr id="39" name="Shape 37"/>
+          <p:cNvSpPr/>
+          <p:nvPr/>
+        </p:nvSpPr>
+        <p:spPr>
+          <a:xfrm>
+            <a:off x="6062472" y="4169664"/>
+            <a:ext cx="685800" cy="475488"/>
           </a:xfrm>
           <a:prstGeom prst="rect">
             <a:avLst>
-              <a:gd name="adj" fmla="val 9524"/>
+              <a:gd name="adj" fmla="val 7692"/>
             </a:avLst>
           </a:prstGeom>
           <a:solidFill>
@@ -10742,14 +10664,14 @@
       </p:sp>
       <p:sp>
         <p:nvSpPr>
-          <p:cNvPr id="39" name="Text 37"/>
-          <p:cNvSpPr/>
-          <p:nvPr/>
-        </p:nvSpPr>
-        <p:spPr>
-          <a:xfrm>
-            <a:off x="3033522" y="4169664"/>
-            <a:ext cx="685800" cy="384048"/>
+          <p:cNvPr id="40" name="Text 38"/>
+          <p:cNvSpPr/>
+          <p:nvPr/>
+        </p:nvSpPr>
+        <p:spPr>
+          <a:xfrm>
+            <a:off x="6062472" y="4169664"/>
+            <a:ext cx="685800" cy="475488"/>
           </a:xfrm>
           <a:prstGeom prst="rect">
             <a:avLst/>
@@ -10781,18 +10703,18 @@
       </p:sp>
       <p:sp>
         <p:nvSpPr>
-          <p:cNvPr id="40" name="Shape 38"/>
-          <p:cNvSpPr/>
-          <p:nvPr/>
-        </p:nvSpPr>
-        <p:spPr>
-          <a:xfrm>
-            <a:off x="3942207" y="4169664"/>
-            <a:ext cx="685800" cy="384048"/>
+          <p:cNvPr id="41" name="Shape 39"/>
+          <p:cNvSpPr/>
+          <p:nvPr/>
+        </p:nvSpPr>
+        <p:spPr>
+          <a:xfrm>
+            <a:off x="7274052" y="4169664"/>
+            <a:ext cx="685800" cy="475488"/>
           </a:xfrm>
           <a:prstGeom prst="rect">
             <a:avLst>
-              <a:gd name="adj" fmla="val 9524"/>
+              <a:gd name="adj" fmla="val 7692"/>
             </a:avLst>
           </a:prstGeom>
           <a:solidFill>
@@ -10808,14 +10730,14 @@
       </p:sp>
       <p:sp>
         <p:nvSpPr>
-          <p:cNvPr id="41" name="Text 39"/>
-          <p:cNvSpPr/>
-          <p:nvPr/>
-        </p:nvSpPr>
-        <p:spPr>
-          <a:xfrm>
-            <a:off x="3942207" y="4169664"/>
-            <a:ext cx="685800" cy="384048"/>
+          <p:cNvPr id="42" name="Text 40"/>
+          <p:cNvSpPr/>
+          <p:nvPr/>
+        </p:nvSpPr>
+        <p:spPr>
+          <a:xfrm>
+            <a:off x="7274052" y="4169664"/>
+            <a:ext cx="685800" cy="475488"/>
           </a:xfrm>
           <a:prstGeom prst="rect">
             <a:avLst/>
@@ -10840,309 +10762,6 @@
                 <a:cs typeface="Trebuchet MS" pitchFamily="34" charset="-120"/>
               </a:rPr>
               <a:t>m</a:t>
-            </a:r>
-            <a:endParaRPr lang="en-US" sz="900" dirty="0"/>
-          </a:p>
-        </p:txBody>
-      </p:sp>
-      <p:sp>
-        <p:nvSpPr>
-          <p:cNvPr id="42" name="Shape 40"/>
-          <p:cNvSpPr/>
-          <p:nvPr/>
-        </p:nvSpPr>
-        <p:spPr>
-          <a:xfrm>
-            <a:off x="4850892" y="4169664"/>
-            <a:ext cx="685800" cy="384048"/>
-          </a:xfrm>
-          <a:prstGeom prst="rect">
-            <a:avLst>
-              <a:gd name="adj" fmla="val 9524"/>
-            </a:avLst>
-          </a:prstGeom>
-          <a:solidFill>
-            <a:srgbClr val="FFFFFF"/>
-          </a:solidFill>
-          <a:ln w="12700">
-            <a:solidFill>
-              <a:srgbClr val="DB2777"/>
-            </a:solidFill>
-            <a:prstDash val="solid"/>
-          </a:ln>
-        </p:spPr>
-      </p:sp>
-      <p:sp>
-        <p:nvSpPr>
-          <p:cNvPr id="43" name="Text 41"/>
-          <p:cNvSpPr/>
-          <p:nvPr/>
-        </p:nvSpPr>
-        <p:spPr>
-          <a:xfrm>
-            <a:off x="4850892" y="4169664"/>
-            <a:ext cx="685800" cy="384048"/>
-          </a:xfrm>
-          <a:prstGeom prst="rect">
-            <a:avLst/>
-          </a:prstGeom>
-          <a:noFill/>
-          <a:ln/>
-        </p:spPr>
-        <p:txBody>
-          <a:bodyPr wrap="square" lIns="0" tIns="0" rIns="0" bIns="0" rtlCol="0" anchor="ctr"/>
-          <a:lstStyle/>
-          <a:p>
-            <a:pPr algn="ctr" indent="0" marL="0">
-              <a:buNone/>
-            </a:pPr>
-            <a:r>
-              <a:rPr lang="en-US" sz="900" b="1" dirty="0">
-                <a:solidFill>
-                  <a:srgbClr val="9D174D"/>
-                </a:solidFill>
-                <a:latin typeface="Trebuchet MS" pitchFamily="34" charset="0"/>
-                <a:ea typeface="Trebuchet MS" pitchFamily="34" charset="-122"/>
-                <a:cs typeface="Trebuchet MS" pitchFamily="34" charset="-120"/>
-              </a:rPr>
-              <a:t>a</a:t>
-            </a:r>
-            <a:endParaRPr lang="en-US" sz="900" dirty="0"/>
-          </a:p>
-        </p:txBody>
-      </p:sp>
-      <p:sp>
-        <p:nvSpPr>
-          <p:cNvPr id="44" name="Shape 42"/>
-          <p:cNvSpPr/>
-          <p:nvPr/>
-        </p:nvSpPr>
-        <p:spPr>
-          <a:xfrm>
-            <a:off x="5759577" y="4169664"/>
-            <a:ext cx="685800" cy="384048"/>
-          </a:xfrm>
-          <a:prstGeom prst="rect">
-            <a:avLst>
-              <a:gd name="adj" fmla="val 9524"/>
-            </a:avLst>
-          </a:prstGeom>
-          <a:solidFill>
-            <a:srgbClr val="FFFFFF"/>
-          </a:solidFill>
-          <a:ln w="12700">
-            <a:solidFill>
-              <a:srgbClr val="DB2777"/>
-            </a:solidFill>
-            <a:prstDash val="solid"/>
-          </a:ln>
-        </p:spPr>
-      </p:sp>
-      <p:sp>
-        <p:nvSpPr>
-          <p:cNvPr id="45" name="Text 43"/>
-          <p:cNvSpPr/>
-          <p:nvPr/>
-        </p:nvSpPr>
-        <p:spPr>
-          <a:xfrm>
-            <a:off x="5759577" y="4169664"/>
-            <a:ext cx="685800" cy="384048"/>
-          </a:xfrm>
-          <a:prstGeom prst="rect">
-            <a:avLst/>
-          </a:prstGeom>
-          <a:noFill/>
-          <a:ln/>
-        </p:spPr>
-        <p:txBody>
-          <a:bodyPr wrap="square" lIns="0" tIns="0" rIns="0" bIns="0" rtlCol="0" anchor="ctr"/>
-          <a:lstStyle/>
-          <a:p>
-            <a:pPr algn="ctr" indent="0" marL="0">
-              <a:buNone/>
-            </a:pPr>
-            <a:r>
-              <a:rPr lang="en-US" sz="900" b="1" dirty="0">
-                <a:solidFill>
-                  <a:srgbClr val="9D174D"/>
-                </a:solidFill>
-                <a:latin typeface="Trebuchet MS" pitchFamily="34" charset="0"/>
-                <a:ea typeface="Trebuchet MS" pitchFamily="34" charset="-122"/>
-                <a:cs typeface="Trebuchet MS" pitchFamily="34" charset="-120"/>
-              </a:rPr>
-              <a:t>t</a:t>
-            </a:r>
-            <a:endParaRPr lang="en-US" sz="900" dirty="0"/>
-          </a:p>
-        </p:txBody>
-      </p:sp>
-      <p:sp>
-        <p:nvSpPr>
-          <p:cNvPr id="46" name="Text 44"/>
-          <p:cNvSpPr/>
-          <p:nvPr/>
-        </p:nvSpPr>
-        <p:spPr>
-          <a:xfrm>
-            <a:off x="5759577" y="4572000"/>
-            <a:ext cx="685800" cy="219456"/>
-          </a:xfrm>
-          <a:prstGeom prst="rect">
-            <a:avLst/>
-          </a:prstGeom>
-          <a:noFill/>
-          <a:ln/>
-        </p:spPr>
-        <p:txBody>
-          <a:bodyPr wrap="square" lIns="0" tIns="0" rIns="0" bIns="0" rtlCol="0" anchor="t"/>
-          <a:lstStyle/>
-          <a:p>
-            <a:pPr algn="ctr" indent="0" marL="0">
-              <a:buNone/>
-            </a:pPr>
-            <a:r>
-              <a:rPr lang="en-US" sz="750" i="1" dirty="0">
-                <a:solidFill>
-                  <a:srgbClr val="94A3B8"/>
-                </a:solidFill>
-                <a:latin typeface="Calibri" pitchFamily="34" charset="0"/>
-                <a:ea typeface="Calibri" pitchFamily="34" charset="-122"/>
-                <a:cs typeface="Calibri" pitchFamily="34" charset="-120"/>
-              </a:rPr>
-              <a:t>/sh/</a:t>
-            </a:r>
-            <a:endParaRPr lang="en-US" sz="750" dirty="0"/>
-          </a:p>
-        </p:txBody>
-      </p:sp>
-      <p:sp>
-        <p:nvSpPr>
-          <p:cNvPr id="47" name="Shape 45"/>
-          <p:cNvSpPr/>
-          <p:nvPr/>
-        </p:nvSpPr>
-        <p:spPr>
-          <a:xfrm>
-            <a:off x="6668262" y="4169664"/>
-            <a:ext cx="685800" cy="384048"/>
-          </a:xfrm>
-          <a:prstGeom prst="rect">
-            <a:avLst>
-              <a:gd name="adj" fmla="val 9524"/>
-            </a:avLst>
-          </a:prstGeom>
-          <a:solidFill>
-            <a:srgbClr val="FFFFFF"/>
-          </a:solidFill>
-          <a:ln w="12700">
-            <a:solidFill>
-              <a:srgbClr val="DB2777"/>
-            </a:solidFill>
-            <a:prstDash val="solid"/>
-          </a:ln>
-        </p:spPr>
-      </p:sp>
-      <p:sp>
-        <p:nvSpPr>
-          <p:cNvPr id="48" name="Text 46"/>
-          <p:cNvSpPr/>
-          <p:nvPr/>
-        </p:nvSpPr>
-        <p:spPr>
-          <a:xfrm>
-            <a:off x="6668262" y="4169664"/>
-            <a:ext cx="685800" cy="384048"/>
-          </a:xfrm>
-          <a:prstGeom prst="rect">
-            <a:avLst/>
-          </a:prstGeom>
-          <a:noFill/>
-          <a:ln/>
-        </p:spPr>
-        <p:txBody>
-          <a:bodyPr wrap="square" lIns="0" tIns="0" rIns="0" bIns="0" rtlCol="0" anchor="ctr"/>
-          <a:lstStyle/>
-          <a:p>
-            <a:pPr algn="ctr" indent="0" marL="0">
-              <a:buNone/>
-            </a:pPr>
-            <a:r>
-              <a:rPr lang="en-US" sz="900" b="1" dirty="0">
-                <a:solidFill>
-                  <a:srgbClr val="9D174D"/>
-                </a:solidFill>
-                <a:latin typeface="Trebuchet MS" pitchFamily="34" charset="0"/>
-                <a:ea typeface="Trebuchet MS" pitchFamily="34" charset="-122"/>
-                <a:cs typeface="Trebuchet MS" pitchFamily="34" charset="-120"/>
-              </a:rPr>
-              <a:t>io</a:t>
-            </a:r>
-            <a:endParaRPr lang="en-US" sz="900" dirty="0"/>
-          </a:p>
-        </p:txBody>
-      </p:sp>
-      <p:sp>
-        <p:nvSpPr>
-          <p:cNvPr id="49" name="Shape 47"/>
-          <p:cNvSpPr/>
-          <p:nvPr/>
-        </p:nvSpPr>
-        <p:spPr>
-          <a:xfrm>
-            <a:off x="7576947" y="4169664"/>
-            <a:ext cx="685800" cy="384048"/>
-          </a:xfrm>
-          <a:prstGeom prst="rect">
-            <a:avLst>
-              <a:gd name="adj" fmla="val 9524"/>
-            </a:avLst>
-          </a:prstGeom>
-          <a:solidFill>
-            <a:srgbClr val="FFFFFF"/>
-          </a:solidFill>
-          <a:ln w="12700">
-            <a:solidFill>
-              <a:srgbClr val="DB2777"/>
-            </a:solidFill>
-            <a:prstDash val="solid"/>
-          </a:ln>
-        </p:spPr>
-      </p:sp>
-      <p:sp>
-        <p:nvSpPr>
-          <p:cNvPr id="50" name="Text 48"/>
-          <p:cNvSpPr/>
-          <p:nvPr/>
-        </p:nvSpPr>
-        <p:spPr>
-          <a:xfrm>
-            <a:off x="7576947" y="4169664"/>
-            <a:ext cx="685800" cy="384048"/>
-          </a:xfrm>
-          <a:prstGeom prst="rect">
-            <a:avLst/>
-          </a:prstGeom>
-          <a:noFill/>
-          <a:ln/>
-        </p:spPr>
-        <p:txBody>
-          <a:bodyPr wrap="square" lIns="0" tIns="0" rIns="0" bIns="0" rtlCol="0" anchor="ctr"/>
-          <a:lstStyle/>
-          <a:p>
-            <a:pPr algn="ctr" indent="0" marL="0">
-              <a:buNone/>
-            </a:pPr>
-            <a:r>
-              <a:rPr lang="en-US" sz="900" b="1" dirty="0">
-                <a:solidFill>
-                  <a:srgbClr val="9D174D"/>
-                </a:solidFill>
-                <a:latin typeface="Trebuchet MS" pitchFamily="34" charset="0"/>
-                <a:ea typeface="Trebuchet MS" pitchFamily="34" charset="-122"/>
-                <a:cs typeface="Trebuchet MS" pitchFamily="34" charset="-120"/>
-              </a:rPr>
-              <a:t>n</a:t>
             </a:r>
             <a:endParaRPr lang="en-US" sz="900" dirty="0"/>
           </a:p>
@@ -11573,7 +11192,7 @@
                 <a:ea typeface="Trebuchet MS" pitchFamily="34" charset="-122"/>
                 <a:cs typeface="Trebuchet MS" pitchFamily="34" charset="-120"/>
               </a:rPr>
-              <a:t>formal</a:t>
+              <a:t>conform</a:t>
             </a:r>
             <a:endParaRPr lang="en-US" sz="2800" dirty="0"/>
           </a:p>
@@ -12400,7 +12019,7 @@
                 <a:ea typeface="Trebuchet MS" pitchFamily="34" charset="-122"/>
                 <a:cs typeface="Trebuchet MS" pitchFamily="34" charset="-120"/>
               </a:rPr>
-              <a:t>formal</a:t>
+              <a:t>conform</a:t>
             </a:r>
             <a:endParaRPr lang="en-US" sz="2800" dirty="0"/>
           </a:p>
@@ -12489,11 +12108,11 @@
             </a:avLst>
           </a:prstGeom>
           <a:solidFill>
-            <a:srgbClr val="CCFBF1"/>
+            <a:srgbClr val="DDD6FE"/>
           </a:solidFill>
           <a:ln w="19050">
             <a:solidFill>
-              <a:srgbClr val="0D9488"/>
+              <a:srgbClr val="7C3AED"/>
             </a:solidFill>
             <a:prstDash val="solid"/>
           </a:ln>
@@ -12533,13 +12152,13 @@
             <a:r>
               <a:rPr lang="en-US" sz="1300" b="1" dirty="0">
                 <a:solidFill>
-                  <a:srgbClr val="0F766E"/>
+                  <a:srgbClr val="4C1D95"/>
                 </a:solidFill>
                 <a:latin typeface="Trebuchet MS" pitchFamily="34" charset="0"/>
                 <a:ea typeface="Trebuchet MS" pitchFamily="34" charset="-122"/>
                 <a:cs typeface="Trebuchet MS" pitchFamily="34" charset="-120"/>
               </a:rPr>
-              <a:t>form</a:t>
+              <a:t>con</a:t>
             </a:r>
             <a:endParaRPr lang="en-US" sz="1300" dirty="0"/>
           </a:p>
@@ -12578,7 +12197,7 @@
                 <a:ea typeface="Calibri" pitchFamily="34" charset="-122"/>
                 <a:cs typeface="Calibri" pitchFamily="34" charset="-120"/>
               </a:rPr>
-              <a:t>shape or structure</a:t>
+              <a:t>together, with</a:t>
             </a:r>
             <a:endParaRPr lang="en-US" sz="850" dirty="0"/>
           </a:p>
@@ -12601,11 +12220,11 @@
             </a:avLst>
           </a:prstGeom>
           <a:solidFill>
-            <a:srgbClr val="FCE7F3"/>
+            <a:srgbClr val="CCFBF1"/>
           </a:solidFill>
           <a:ln w="19050">
             <a:solidFill>
-              <a:srgbClr val="DB2777"/>
+              <a:srgbClr val="0D9488"/>
             </a:solidFill>
             <a:prstDash val="solid"/>
           </a:ln>
@@ -12645,13 +12264,13 @@
             <a:r>
               <a:rPr lang="en-US" sz="1300" b="1" dirty="0">
                 <a:solidFill>
-                  <a:srgbClr val="9D174D"/>
+                  <a:srgbClr val="0F766E"/>
                 </a:solidFill>
                 <a:latin typeface="Trebuchet MS" pitchFamily="34" charset="0"/>
                 <a:ea typeface="Trebuchet MS" pitchFamily="34" charset="-122"/>
                 <a:cs typeface="Trebuchet MS" pitchFamily="34" charset="-120"/>
               </a:rPr>
-              <a:t>al</a:t>
+              <a:t>form</a:t>
             </a:r>
             <a:endParaRPr lang="en-US" sz="1300" dirty="0"/>
           </a:p>
@@ -12690,7 +12309,7 @@
                 <a:ea typeface="Calibri" pitchFamily="34" charset="-122"/>
                 <a:cs typeface="Calibri" pitchFamily="34" charset="-120"/>
               </a:rPr>
-              <a:t>relating to</a:t>
+              <a:t>shape, arrange</a:t>
             </a:r>
             <a:endParaRPr lang="en-US" sz="850" dirty="0"/>
           </a:p>
@@ -13385,7 +13004,7 @@
                 <a:ea typeface="Trebuchet MS" pitchFamily="34" charset="-122"/>
                 <a:cs typeface="Trebuchet MS" pitchFamily="34" charset="-120"/>
               </a:rPr>
-              <a:t>formal</a:t>
+              <a:t>conform</a:t>
             </a:r>
             <a:endParaRPr lang="en-US" sz="2800" dirty="0"/>
           </a:p>
@@ -13474,11 +13093,11 @@
             </a:avLst>
           </a:prstGeom>
           <a:solidFill>
-            <a:srgbClr val="CCFBF1"/>
+            <a:srgbClr val="DDD6FE"/>
           </a:solidFill>
           <a:ln w="19050">
             <a:solidFill>
-              <a:srgbClr val="0D9488"/>
+              <a:srgbClr val="7C3AED"/>
             </a:solidFill>
             <a:prstDash val="solid"/>
           </a:ln>
@@ -13518,13 +13137,13 @@
             <a:r>
               <a:rPr lang="en-US" sz="1300" b="1" dirty="0">
                 <a:solidFill>
-                  <a:srgbClr val="0F766E"/>
+                  <a:srgbClr val="4C1D95"/>
                 </a:solidFill>
                 <a:latin typeface="Trebuchet MS" pitchFamily="34" charset="0"/>
                 <a:ea typeface="Trebuchet MS" pitchFamily="34" charset="-122"/>
                 <a:cs typeface="Trebuchet MS" pitchFamily="34" charset="-120"/>
               </a:rPr>
-              <a:t>form</a:t>
+              <a:t>con</a:t>
             </a:r>
             <a:endParaRPr lang="en-US" sz="1300" dirty="0"/>
           </a:p>
@@ -13563,7 +13182,7 @@
                 <a:ea typeface="Calibri" pitchFamily="34" charset="-122"/>
                 <a:cs typeface="Calibri" pitchFamily="34" charset="-120"/>
               </a:rPr>
-              <a:t>shape or structure</a:t>
+              <a:t>together, with</a:t>
             </a:r>
             <a:endParaRPr lang="en-US" sz="850" dirty="0"/>
           </a:p>
@@ -13586,11 +13205,11 @@
             </a:avLst>
           </a:prstGeom>
           <a:solidFill>
-            <a:srgbClr val="FCE7F3"/>
+            <a:srgbClr val="CCFBF1"/>
           </a:solidFill>
           <a:ln w="19050">
             <a:solidFill>
-              <a:srgbClr val="DB2777"/>
+              <a:srgbClr val="0D9488"/>
             </a:solidFill>
             <a:prstDash val="solid"/>
           </a:ln>
@@ -13630,13 +13249,13 @@
             <a:r>
               <a:rPr lang="en-US" sz="1300" b="1" dirty="0">
                 <a:solidFill>
-                  <a:srgbClr val="9D174D"/>
+                  <a:srgbClr val="0F766E"/>
                 </a:solidFill>
                 <a:latin typeface="Trebuchet MS" pitchFamily="34" charset="0"/>
                 <a:ea typeface="Trebuchet MS" pitchFamily="34" charset="-122"/>
                 <a:cs typeface="Trebuchet MS" pitchFamily="34" charset="-120"/>
               </a:rPr>
-              <a:t>al</a:t>
+              <a:t>form</a:t>
             </a:r>
             <a:endParaRPr lang="en-US" sz="1300" dirty="0"/>
           </a:p>
@@ -13675,7 +13294,7 @@
                 <a:ea typeface="Calibri" pitchFamily="34" charset="-122"/>
                 <a:cs typeface="Calibri" pitchFamily="34" charset="-120"/>
               </a:rPr>
-              <a:t>relating to</a:t>
+              <a:t>shape, arrange</a:t>
             </a:r>
             <a:endParaRPr lang="en-US" sz="850" dirty="0"/>
           </a:p>
@@ -13834,7 +13453,7 @@
                 <a:ea typeface="Trebuchet MS" pitchFamily="34" charset="-122"/>
                 <a:cs typeface="Trebuchet MS" pitchFamily="34" charset="-120"/>
               </a:rPr>
-              <a:t>for</a:t>
+              <a:t>con</a:t>
             </a:r>
             <a:endParaRPr lang="en-US" sz="1400" dirty="0"/>
           </a:p>
@@ -13939,7 +13558,7 @@
                 <a:ea typeface="Trebuchet MS" pitchFamily="34" charset="-122"/>
                 <a:cs typeface="Trebuchet MS" pitchFamily="34" charset="-120"/>
               </a:rPr>
-              <a:t>mal</a:t>
+              <a:t>form</a:t>
             </a:r>
             <a:endParaRPr lang="en-US" sz="1400" dirty="0"/>
           </a:p>
@@ -14767,7 +14386,7 @@
                 <a:ea typeface="Trebuchet MS" pitchFamily="34" charset="-122"/>
                 <a:cs typeface="Trebuchet MS" pitchFamily="34" charset="-120"/>
               </a:rPr>
-              <a:t>formal</a:t>
+              <a:t>conform</a:t>
             </a:r>
             <a:endParaRPr lang="en-US" sz="2800" dirty="0"/>
           </a:p>
@@ -14856,11 +14475,11 @@
             </a:avLst>
           </a:prstGeom>
           <a:solidFill>
-            <a:srgbClr val="CCFBF1"/>
+            <a:srgbClr val="DDD6FE"/>
           </a:solidFill>
           <a:ln w="19050">
             <a:solidFill>
-              <a:srgbClr val="0D9488"/>
+              <a:srgbClr val="7C3AED"/>
             </a:solidFill>
             <a:prstDash val="solid"/>
           </a:ln>
@@ -14900,13 +14519,13 @@
             <a:r>
               <a:rPr lang="en-US" sz="1300" b="1" dirty="0">
                 <a:solidFill>
-                  <a:srgbClr val="0F766E"/>
+                  <a:srgbClr val="4C1D95"/>
                 </a:solidFill>
                 <a:latin typeface="Trebuchet MS" pitchFamily="34" charset="0"/>
                 <a:ea typeface="Trebuchet MS" pitchFamily="34" charset="-122"/>
                 <a:cs typeface="Trebuchet MS" pitchFamily="34" charset="-120"/>
               </a:rPr>
-              <a:t>form</a:t>
+              <a:t>con</a:t>
             </a:r>
             <a:endParaRPr lang="en-US" sz="1300" dirty="0"/>
           </a:p>
@@ -14945,7 +14564,7 @@
                 <a:ea typeface="Calibri" pitchFamily="34" charset="-122"/>
                 <a:cs typeface="Calibri" pitchFamily="34" charset="-120"/>
               </a:rPr>
-              <a:t>shape or structure</a:t>
+              <a:t>together, with</a:t>
             </a:r>
             <a:endParaRPr lang="en-US" sz="850" dirty="0"/>
           </a:p>
@@ -14968,11 +14587,11 @@
             </a:avLst>
           </a:prstGeom>
           <a:solidFill>
-            <a:srgbClr val="FCE7F3"/>
+            <a:srgbClr val="CCFBF1"/>
           </a:solidFill>
           <a:ln w="19050">
             <a:solidFill>
-              <a:srgbClr val="DB2777"/>
+              <a:srgbClr val="0D9488"/>
             </a:solidFill>
             <a:prstDash val="solid"/>
           </a:ln>
@@ -15012,13 +14631,13 @@
             <a:r>
               <a:rPr lang="en-US" sz="1300" b="1" dirty="0">
                 <a:solidFill>
-                  <a:srgbClr val="9D174D"/>
+                  <a:srgbClr val="0F766E"/>
                 </a:solidFill>
                 <a:latin typeface="Trebuchet MS" pitchFamily="34" charset="0"/>
                 <a:ea typeface="Trebuchet MS" pitchFamily="34" charset="-122"/>
                 <a:cs typeface="Trebuchet MS" pitchFamily="34" charset="-120"/>
               </a:rPr>
-              <a:t>al</a:t>
+              <a:t>form</a:t>
             </a:r>
             <a:endParaRPr lang="en-US" sz="1300" dirty="0"/>
           </a:p>
@@ -15057,7 +14676,7 @@
                 <a:ea typeface="Calibri" pitchFamily="34" charset="-122"/>
                 <a:cs typeface="Calibri" pitchFamily="34" charset="-120"/>
               </a:rPr>
-              <a:t>relating to</a:t>
+              <a:t>shape, arrange</a:t>
             </a:r>
             <a:endParaRPr lang="en-US" sz="850" dirty="0"/>
           </a:p>
@@ -15216,7 +14835,7 @@
                 <a:ea typeface="Trebuchet MS" pitchFamily="34" charset="-122"/>
                 <a:cs typeface="Trebuchet MS" pitchFamily="34" charset="-120"/>
               </a:rPr>
-              <a:t>for</a:t>
+              <a:t>con</a:t>
             </a:r>
             <a:endParaRPr lang="en-US" sz="1400" dirty="0"/>
           </a:p>
@@ -15321,7 +14940,7 @@
                 <a:ea typeface="Trebuchet MS" pitchFamily="34" charset="-122"/>
                 <a:cs typeface="Trebuchet MS" pitchFamily="34" charset="-120"/>
               </a:rPr>
-              <a:t>mal</a:t>
+              <a:t>form</a:t>
             </a:r>
             <a:endParaRPr lang="en-US" sz="1400" dirty="0"/>
           </a:p>
@@ -15402,11 +15021,11 @@
         <p:spPr>
           <a:xfrm>
             <a:off x="1874520" y="4096512"/>
-            <a:ext cx="6903720" cy="658368"/>
+            <a:ext cx="6903720" cy="804672"/>
           </a:xfrm>
           <a:prstGeom prst="rect">
             <a:avLst>
-              <a:gd name="adj" fmla="val 8333"/>
+              <a:gd name="adj" fmla="val 6818"/>
             </a:avLst>
           </a:prstGeom>
           <a:solidFill>
@@ -15428,12 +15047,12 @@
         </p:nvSpPr>
         <p:spPr>
           <a:xfrm>
-            <a:off x="2670048" y="4169664"/>
-            <a:ext cx="685800" cy="475488"/>
+            <a:off x="2254649" y="4169664"/>
+            <a:ext cx="685800" cy="384048"/>
           </a:xfrm>
           <a:prstGeom prst="rect">
             <a:avLst>
-              <a:gd name="adj" fmla="val 7692"/>
+              <a:gd name="adj" fmla="val 9524"/>
             </a:avLst>
           </a:prstGeom>
           <a:solidFill>
@@ -15455,8 +15074,8 @@
         </p:nvSpPr>
         <p:spPr>
           <a:xfrm>
-            <a:off x="2670048" y="4169664"/>
-            <a:ext cx="685800" cy="475488"/>
+            <a:off x="2254649" y="4169664"/>
+            <a:ext cx="685800" cy="384048"/>
           </a:xfrm>
           <a:prstGeom prst="rect">
             <a:avLst/>
@@ -15480,7 +15099,7 @@
                 <a:ea typeface="Trebuchet MS" pitchFamily="34" charset="-122"/>
                 <a:cs typeface="Trebuchet MS" pitchFamily="34" charset="-120"/>
               </a:rPr>
-              <a:t>f</a:t>
+              <a:t>c</a:t>
             </a:r>
             <a:endParaRPr lang="en-US" sz="900" dirty="0"/>
           </a:p>
@@ -15488,18 +15107,57 @@
       </p:sp>
       <p:sp>
         <p:nvSpPr>
-          <p:cNvPr id="35" name="Shape 33"/>
-          <p:cNvSpPr/>
-          <p:nvPr/>
-        </p:nvSpPr>
-        <p:spPr>
-          <a:xfrm>
-            <a:off x="4123944" y="4169664"/>
-            <a:ext cx="685800" cy="475488"/>
+          <p:cNvPr id="35" name="Text 33"/>
+          <p:cNvSpPr/>
+          <p:nvPr/>
+        </p:nvSpPr>
+        <p:spPr>
+          <a:xfrm>
+            <a:off x="2254649" y="4572000"/>
+            <a:ext cx="685800" cy="219456"/>
+          </a:xfrm>
+          <a:prstGeom prst="rect">
+            <a:avLst/>
+          </a:prstGeom>
+          <a:noFill/>
+          <a:ln/>
+        </p:spPr>
+        <p:txBody>
+          <a:bodyPr wrap="square" lIns="0" tIns="0" rIns="0" bIns="0" rtlCol="0" anchor="t"/>
+          <a:lstStyle/>
+          <a:p>
+            <a:pPr algn="ctr" indent="0" marL="0">
+              <a:buNone/>
+            </a:pPr>
+            <a:r>
+              <a:rPr lang="en-US" sz="750" i="1" dirty="0">
+                <a:solidFill>
+                  <a:srgbClr val="94A3B8"/>
+                </a:solidFill>
+                <a:latin typeface="Calibri" pitchFamily="34" charset="0"/>
+                <a:ea typeface="Calibri" pitchFamily="34" charset="-122"/>
+                <a:cs typeface="Calibri" pitchFamily="34" charset="-120"/>
+              </a:rPr>
+              <a:t>/k/</a:t>
+            </a:r>
+            <a:endParaRPr lang="en-US" sz="750" dirty="0"/>
+          </a:p>
+        </p:txBody>
+      </p:sp>
+      <p:sp>
+        <p:nvSpPr>
+          <p:cNvPr id="36" name="Shape 34"/>
+          <p:cNvSpPr/>
+          <p:nvPr/>
+        </p:nvSpPr>
+        <p:spPr>
+          <a:xfrm>
+            <a:off x="3293146" y="4169664"/>
+            <a:ext cx="685800" cy="384048"/>
           </a:xfrm>
           <a:prstGeom prst="rect">
             <a:avLst>
-              <a:gd name="adj" fmla="val 7692"/>
+              <a:gd name="adj" fmla="val 9524"/>
             </a:avLst>
           </a:prstGeom>
           <a:solidFill>
@@ -15515,14 +15173,14 @@
       </p:sp>
       <p:sp>
         <p:nvSpPr>
-          <p:cNvPr id="36" name="Text 34"/>
-          <p:cNvSpPr/>
-          <p:nvPr/>
-        </p:nvSpPr>
-        <p:spPr>
-          <a:xfrm>
-            <a:off x="4123944" y="4169664"/>
-            <a:ext cx="685800" cy="475488"/>
+          <p:cNvPr id="37" name="Text 35"/>
+          <p:cNvSpPr/>
+          <p:nvPr/>
+        </p:nvSpPr>
+        <p:spPr>
+          <a:xfrm>
+            <a:off x="3293146" y="4169664"/>
+            <a:ext cx="685800" cy="384048"/>
           </a:xfrm>
           <a:prstGeom prst="rect">
             <a:avLst/>
@@ -15546,7 +15204,7 @@
                 <a:ea typeface="Trebuchet MS" pitchFamily="34" charset="-122"/>
                 <a:cs typeface="Trebuchet MS" pitchFamily="34" charset="-120"/>
               </a:rPr>
-              <a:t>or</a:t>
+              <a:t>o</a:t>
             </a:r>
             <a:endParaRPr lang="en-US" sz="900" dirty="0"/>
           </a:p>
@@ -15554,18 +15212,18 @@
       </p:sp>
       <p:sp>
         <p:nvSpPr>
-          <p:cNvPr id="37" name="Shape 35"/>
-          <p:cNvSpPr/>
-          <p:nvPr/>
-        </p:nvSpPr>
-        <p:spPr>
-          <a:xfrm>
-            <a:off x="5577840" y="4169664"/>
-            <a:ext cx="685800" cy="475488"/>
+          <p:cNvPr id="38" name="Shape 36"/>
+          <p:cNvSpPr/>
+          <p:nvPr/>
+        </p:nvSpPr>
+        <p:spPr>
+          <a:xfrm>
+            <a:off x="4331643" y="4169664"/>
+            <a:ext cx="685800" cy="384048"/>
           </a:xfrm>
           <a:prstGeom prst="rect">
             <a:avLst>
-              <a:gd name="adj" fmla="val 7692"/>
+              <a:gd name="adj" fmla="val 9524"/>
             </a:avLst>
           </a:prstGeom>
           <a:solidFill>
@@ -15581,14 +15239,14 @@
       </p:sp>
       <p:sp>
         <p:nvSpPr>
-          <p:cNvPr id="38" name="Text 36"/>
-          <p:cNvSpPr/>
-          <p:nvPr/>
-        </p:nvSpPr>
-        <p:spPr>
-          <a:xfrm>
-            <a:off x="5577840" y="4169664"/>
-            <a:ext cx="685800" cy="475488"/>
+          <p:cNvPr id="39" name="Text 37"/>
+          <p:cNvSpPr/>
+          <p:nvPr/>
+        </p:nvSpPr>
+        <p:spPr>
+          <a:xfrm>
+            <a:off x="4331643" y="4169664"/>
+            <a:ext cx="685800" cy="384048"/>
           </a:xfrm>
           <a:prstGeom prst="rect">
             <a:avLst/>
@@ -15612,7 +15270,7 @@
                 <a:ea typeface="Trebuchet MS" pitchFamily="34" charset="-122"/>
                 <a:cs typeface="Trebuchet MS" pitchFamily="34" charset="-120"/>
               </a:rPr>
-              <a:t>m</a:t>
+              <a:t>n</a:t>
             </a:r>
             <a:endParaRPr lang="en-US" sz="900" dirty="0"/>
           </a:p>
@@ -15620,18 +15278,18 @@
       </p:sp>
       <p:sp>
         <p:nvSpPr>
-          <p:cNvPr id="39" name="Shape 37"/>
-          <p:cNvSpPr/>
-          <p:nvPr/>
-        </p:nvSpPr>
-        <p:spPr>
-          <a:xfrm>
-            <a:off x="7031736" y="4169664"/>
-            <a:ext cx="685800" cy="475488"/>
+          <p:cNvPr id="40" name="Shape 38"/>
+          <p:cNvSpPr/>
+          <p:nvPr/>
+        </p:nvSpPr>
+        <p:spPr>
+          <a:xfrm>
+            <a:off x="5370141" y="4169664"/>
+            <a:ext cx="685800" cy="384048"/>
           </a:xfrm>
           <a:prstGeom prst="rect">
             <a:avLst>
-              <a:gd name="adj" fmla="val 7692"/>
+              <a:gd name="adj" fmla="val 9524"/>
             </a:avLst>
           </a:prstGeom>
           <a:solidFill>
@@ -15647,14 +15305,14 @@
       </p:sp>
       <p:sp>
         <p:nvSpPr>
-          <p:cNvPr id="40" name="Text 38"/>
-          <p:cNvSpPr/>
-          <p:nvPr/>
-        </p:nvSpPr>
-        <p:spPr>
-          <a:xfrm>
-            <a:off x="7031736" y="4169664"/>
-            <a:ext cx="685800" cy="475488"/>
+          <p:cNvPr id="41" name="Text 39"/>
+          <p:cNvSpPr/>
+          <p:nvPr/>
+        </p:nvSpPr>
+        <p:spPr>
+          <a:xfrm>
+            <a:off x="5370141" y="4169664"/>
+            <a:ext cx="685800" cy="384048"/>
           </a:xfrm>
           <a:prstGeom prst="rect">
             <a:avLst/>
@@ -15678,7 +15336,139 @@
                 <a:ea typeface="Trebuchet MS" pitchFamily="34" charset="-122"/>
                 <a:cs typeface="Trebuchet MS" pitchFamily="34" charset="-120"/>
               </a:rPr>
-              <a:t>al</a:t>
+              <a:t>f</a:t>
+            </a:r>
+            <a:endParaRPr lang="en-US" sz="900" dirty="0"/>
+          </a:p>
+        </p:txBody>
+      </p:sp>
+      <p:sp>
+        <p:nvSpPr>
+          <p:cNvPr id="42" name="Shape 40"/>
+          <p:cNvSpPr/>
+          <p:nvPr/>
+        </p:nvSpPr>
+        <p:spPr>
+          <a:xfrm>
+            <a:off x="6408638" y="4169664"/>
+            <a:ext cx="685800" cy="384048"/>
+          </a:xfrm>
+          <a:prstGeom prst="rect">
+            <a:avLst>
+              <a:gd name="adj" fmla="val 9524"/>
+            </a:avLst>
+          </a:prstGeom>
+          <a:solidFill>
+            <a:srgbClr val="FFFFFF"/>
+          </a:solidFill>
+          <a:ln w="12700">
+            <a:solidFill>
+              <a:srgbClr val="DB2777"/>
+            </a:solidFill>
+            <a:prstDash val="solid"/>
+          </a:ln>
+        </p:spPr>
+      </p:sp>
+      <p:sp>
+        <p:nvSpPr>
+          <p:cNvPr id="43" name="Text 41"/>
+          <p:cNvSpPr/>
+          <p:nvPr/>
+        </p:nvSpPr>
+        <p:spPr>
+          <a:xfrm>
+            <a:off x="6408638" y="4169664"/>
+            <a:ext cx="685800" cy="384048"/>
+          </a:xfrm>
+          <a:prstGeom prst="rect">
+            <a:avLst/>
+          </a:prstGeom>
+          <a:noFill/>
+          <a:ln/>
+        </p:spPr>
+        <p:txBody>
+          <a:bodyPr wrap="square" lIns="0" tIns="0" rIns="0" bIns="0" rtlCol="0" anchor="ctr"/>
+          <a:lstStyle/>
+          <a:p>
+            <a:pPr algn="ctr" indent="0" marL="0">
+              <a:buNone/>
+            </a:pPr>
+            <a:r>
+              <a:rPr lang="en-US" sz="900" b="1" dirty="0">
+                <a:solidFill>
+                  <a:srgbClr val="9D174D"/>
+                </a:solidFill>
+                <a:latin typeface="Trebuchet MS" pitchFamily="34" charset="0"/>
+                <a:ea typeface="Trebuchet MS" pitchFamily="34" charset="-122"/>
+                <a:cs typeface="Trebuchet MS" pitchFamily="34" charset="-120"/>
+              </a:rPr>
+              <a:t>or</a:t>
+            </a:r>
+            <a:endParaRPr lang="en-US" sz="900" dirty="0"/>
+          </a:p>
+        </p:txBody>
+      </p:sp>
+      <p:sp>
+        <p:nvSpPr>
+          <p:cNvPr id="44" name="Shape 42"/>
+          <p:cNvSpPr/>
+          <p:nvPr/>
+        </p:nvSpPr>
+        <p:spPr>
+          <a:xfrm>
+            <a:off x="7447135" y="4169664"/>
+            <a:ext cx="685800" cy="384048"/>
+          </a:xfrm>
+          <a:prstGeom prst="rect">
+            <a:avLst>
+              <a:gd name="adj" fmla="val 9524"/>
+            </a:avLst>
+          </a:prstGeom>
+          <a:solidFill>
+            <a:srgbClr val="FFFFFF"/>
+          </a:solidFill>
+          <a:ln w="12700">
+            <a:solidFill>
+              <a:srgbClr val="DB2777"/>
+            </a:solidFill>
+            <a:prstDash val="solid"/>
+          </a:ln>
+        </p:spPr>
+      </p:sp>
+      <p:sp>
+        <p:nvSpPr>
+          <p:cNvPr id="45" name="Text 43"/>
+          <p:cNvSpPr/>
+          <p:nvPr/>
+        </p:nvSpPr>
+        <p:spPr>
+          <a:xfrm>
+            <a:off x="7447135" y="4169664"/>
+            <a:ext cx="685800" cy="384048"/>
+          </a:xfrm>
+          <a:prstGeom prst="rect">
+            <a:avLst/>
+          </a:prstGeom>
+          <a:noFill/>
+          <a:ln/>
+        </p:spPr>
+        <p:txBody>
+          <a:bodyPr wrap="square" lIns="0" tIns="0" rIns="0" bIns="0" rtlCol="0" anchor="ctr"/>
+          <a:lstStyle/>
+          <a:p>
+            <a:pPr algn="ctr" indent="0" marL="0">
+              <a:buNone/>
+            </a:pPr>
+            <a:r>
+              <a:rPr lang="en-US" sz="900" b="1" dirty="0">
+                <a:solidFill>
+                  <a:srgbClr val="9D174D"/>
+                </a:solidFill>
+                <a:latin typeface="Trebuchet MS" pitchFamily="34" charset="0"/>
+                <a:ea typeface="Trebuchet MS" pitchFamily="34" charset="-122"/>
+                <a:cs typeface="Trebuchet MS" pitchFamily="34" charset="-120"/>
+              </a:rPr>
+              <a:t>m</a:t>
             </a:r>
             <a:endParaRPr lang="en-US" sz="900" dirty="0"/>
           </a:p>
@@ -16586,7 +16376,7 @@
                 <a:ea typeface="Trebuchet MS" pitchFamily="34" charset="-122"/>
                 <a:cs typeface="Trebuchet MS" pitchFamily="34" charset="-120"/>
               </a:rPr>
-              <a:t>2</a:t>
+              <a:t>0</a:t>
             </a:r>
             <a:pPr algn="ctr" indent="0" marL="0">
               <a:buNone/>
@@ -16600,7 +16390,7 @@
                 <a:ea typeface="Trebuchet MS" pitchFamily="34" charset="-122"/>
                 <a:cs typeface="Trebuchet MS" pitchFamily="34" charset="-120"/>
               </a:rPr>
-              <a:t>  punctuation marks</a:t>
+              <a:t>  punctuation mark</a:t>
             </a:r>
             <a:endParaRPr lang="en-US" sz="2800" dirty="0"/>
           </a:p>
@@ -17004,7 +16794,7 @@
                 <a:ea typeface="Calibri" pitchFamily="34" charset="-122"/>
                 <a:cs typeface="Calibri" pitchFamily="34" charset="-120"/>
               </a:rPr>
-              <a:t>She wanted to </a:t>
+              <a:t>The amazing </a:t>
             </a:r>
             <a:pPr algn="l" indent="0" marL="0">
               <a:buNone/>
@@ -17021,7 +16811,7 @@
                 <a:ea typeface="Calibri" pitchFamily="34" charset="-122"/>
                 <a:cs typeface="Calibri" pitchFamily="34" charset="-120"/>
               </a:rPr>
-              <a:t>reform</a:t>
+              <a:t>transformation</a:t>
             </a:r>
             <a:pPr algn="l" indent="0" marL="0">
               <a:buNone/>
@@ -17035,7 +16825,7 @@
                 <a:ea typeface="Calibri" pitchFamily="34" charset="-122"/>
                 <a:cs typeface="Calibri" pitchFamily="34" charset="-120"/>
               </a:rPr>
-              <a:t> the system, </a:t>
+              <a:t> of the old building was </a:t>
             </a:r>
             <a:pPr algn="l" indent="0" marL="0">
               <a:buNone/>
@@ -17052,7 +16842,7 @@
                 <a:ea typeface="Calibri" pitchFamily="34" charset="-122"/>
                 <a:cs typeface="Calibri" pitchFamily="34" charset="-120"/>
               </a:rPr>
-              <a:t>perform</a:t>
+              <a:t>formal</a:t>
             </a:r>
             <a:pPr algn="l" indent="0" marL="0">
               <a:buNone/>
@@ -17066,7 +16856,7 @@
                 <a:ea typeface="Calibri" pitchFamily="34" charset="-122"/>
                 <a:cs typeface="Calibri" pitchFamily="34" charset="-120"/>
               </a:rPr>
-              <a:t> her duties with care, and </a:t>
+              <a:t> proof that hard work and </a:t>
             </a:r>
             <a:pPr algn="l" indent="0" marL="0">
               <a:buNone/>
@@ -17083,7 +16873,7 @@
                 <a:ea typeface="Calibri" pitchFamily="34" charset="-122"/>
                 <a:cs typeface="Calibri" pitchFamily="34" charset="-120"/>
               </a:rPr>
-              <a:t>transform</a:t>
+              <a:t>reform</a:t>
             </a:r>
             <a:pPr algn="l" indent="0" marL="0">
               <a:buNone/>
@@ -17097,7 +16887,7 @@
                 <a:ea typeface="Calibri" pitchFamily="34" charset="-122"/>
                 <a:cs typeface="Calibri" pitchFamily="34" charset="-120"/>
               </a:rPr>
-              <a:t> the way the school was run.</a:t>
+              <a:t> can change a community.</a:t>
             </a:r>
             <a:endParaRPr lang="en-US" sz="1800" dirty="0"/>
           </a:p>
@@ -17252,7 +17042,7 @@
                 <a:ea typeface="Trebuchet MS" pitchFamily="34" charset="-122"/>
                 <a:cs typeface="Trebuchet MS" pitchFamily="34" charset="-120"/>
               </a:rPr>
-              <a:t>reform</a:t>
+              <a:t>transformation</a:t>
             </a:r>
             <a:endParaRPr lang="en-US" sz="1400" dirty="0"/>
           </a:p>
@@ -17380,7 +17170,7 @@
                 <a:ea typeface="Trebuchet MS" pitchFamily="34" charset="-122"/>
                 <a:cs typeface="Trebuchet MS" pitchFamily="34" charset="-120"/>
               </a:rPr>
-              <a:t>perform</a:t>
+              <a:t>formal</a:t>
             </a:r>
             <a:endParaRPr lang="en-US" sz="1400" dirty="0"/>
           </a:p>
@@ -17508,7 +17298,7 @@
                 <a:ea typeface="Trebuchet MS" pitchFamily="34" charset="-122"/>
                 <a:cs typeface="Trebuchet MS" pitchFamily="34" charset="-120"/>
               </a:rPr>
-              <a:t>transform</a:t>
+              <a:t>reform</a:t>
             </a:r>
             <a:endParaRPr lang="en-US" sz="1400" dirty="0"/>
           </a:p>
@@ -17978,7 +17768,7 @@
                 <a:ea typeface="Trebuchet MS" pitchFamily="34" charset="-122"/>
                 <a:cs typeface="Trebuchet MS" pitchFamily="34" charset="-120"/>
               </a:rPr>
-              <a:t>reform</a:t>
+              <a:t>transformation</a:t>
             </a:r>
             <a:endParaRPr lang="en-US" sz="2800" dirty="0"/>
           </a:p>
@@ -18805,7 +18595,7 @@
                 <a:ea typeface="Trebuchet MS" pitchFamily="34" charset="-122"/>
                 <a:cs typeface="Trebuchet MS" pitchFamily="34" charset="-120"/>
               </a:rPr>
-              <a:t>reform</a:t>
+              <a:t>transformation</a:t>
             </a:r>
             <a:endParaRPr lang="en-US" sz="2800" dirty="0"/>
           </a:p>
@@ -18885,7 +18675,7 @@
         </p:nvSpPr>
         <p:spPr>
           <a:xfrm>
-            <a:off x="2938272" y="2258568"/>
+            <a:off x="2221992" y="2258568"/>
             <a:ext cx="1828800" cy="292608"/>
           </a:xfrm>
           <a:prstGeom prst="rect">
@@ -18919,7 +18709,7 @@
         </p:nvSpPr>
         <p:spPr>
           <a:xfrm>
-            <a:off x="2938272" y="2258568"/>
+            <a:off x="2221992" y="2258568"/>
             <a:ext cx="1828800" cy="292608"/>
           </a:xfrm>
           <a:prstGeom prst="rect">
@@ -18944,7 +18734,7 @@
                 <a:ea typeface="Trebuchet MS" pitchFamily="34" charset="-122"/>
                 <a:cs typeface="Trebuchet MS" pitchFamily="34" charset="-120"/>
               </a:rPr>
-              <a:t>re</a:t>
+              <a:t>trans</a:t>
             </a:r>
             <a:endParaRPr lang="en-US" sz="1300" dirty="0"/>
           </a:p>
@@ -18958,7 +18748,7 @@
         </p:nvSpPr>
         <p:spPr>
           <a:xfrm>
-            <a:off x="2938272" y="2569464"/>
+            <a:off x="2221992" y="2569464"/>
             <a:ext cx="1828800" cy="201168"/>
           </a:xfrm>
           <a:prstGeom prst="rect">
@@ -18983,7 +18773,7 @@
                 <a:ea typeface="Calibri" pitchFamily="34" charset="-122"/>
                 <a:cs typeface="Calibri" pitchFamily="34" charset="-120"/>
               </a:rPr>
-              <a:t>again or back</a:t>
+              <a:t>across, change</a:t>
             </a:r>
             <a:endParaRPr lang="en-US" sz="850" dirty="0"/>
           </a:p>
@@ -18997,7 +18787,7 @@
         </p:nvSpPr>
         <p:spPr>
           <a:xfrm>
-            <a:off x="5803392" y="2258568"/>
+            <a:off x="4370832" y="2258568"/>
             <a:ext cx="1828800" cy="292608"/>
           </a:xfrm>
           <a:prstGeom prst="rect">
@@ -19031,7 +18821,7 @@
         </p:nvSpPr>
         <p:spPr>
           <a:xfrm>
-            <a:off x="5803392" y="2258568"/>
+            <a:off x="4370832" y="2258568"/>
             <a:ext cx="1828800" cy="292608"/>
           </a:xfrm>
           <a:prstGeom prst="rect">
@@ -19070,7 +18860,7 @@
         </p:nvSpPr>
         <p:spPr>
           <a:xfrm>
-            <a:off x="5803392" y="2569464"/>
+            <a:off x="4370832" y="2569464"/>
             <a:ext cx="1828800" cy="201168"/>
           </a:xfrm>
           <a:prstGeom prst="rect">
@@ -19095,7 +18885,7 @@
                 <a:ea typeface="Calibri" pitchFamily="34" charset="-122"/>
                 <a:cs typeface="Calibri" pitchFamily="34" charset="-120"/>
               </a:rPr>
-              <a:t>shape or structure</a:t>
+              <a:t>shape, arrange</a:t>
             </a:r>
             <a:endParaRPr lang="en-US" sz="850" dirty="0"/>
           </a:p>
@@ -19104,6 +18894,157 @@
       <p:sp>
         <p:nvSpPr>
           <p:cNvPr id="22" name="Shape 20"/>
+          <p:cNvSpPr/>
+          <p:nvPr/>
+        </p:nvSpPr>
+        <p:spPr>
+          <a:xfrm>
+            <a:off x="6519672" y="2258568"/>
+            <a:ext cx="1828800" cy="292608"/>
+          </a:xfrm>
+          <a:prstGeom prst="rect">
+            <a:avLst>
+              <a:gd name="adj" fmla="val 25000"/>
+            </a:avLst>
+          </a:prstGeom>
+          <a:solidFill>
+            <a:srgbClr val="FCE7F3"/>
+          </a:solidFill>
+          <a:ln w="19050">
+            <a:solidFill>
+              <a:srgbClr val="DB2777"/>
+            </a:solidFill>
+            <a:prstDash val="solid"/>
+          </a:ln>
+          <a:effectLst>
+            <a:outerShdw sx="100000" sy="100000" kx="0" ky="0" algn="bl" rotWithShape="0" blurRad="101600" dist="38100" dir="8100000">
+              <a:srgbClr val="000000">
+                <a:alpha val="12000"/>
+              </a:srgbClr>
+            </a:outerShdw>
+          </a:effectLst>
+        </p:spPr>
+      </p:sp>
+      <p:sp>
+        <p:nvSpPr>
+          <p:cNvPr id="23" name="Text 21"/>
+          <p:cNvSpPr/>
+          <p:nvPr/>
+        </p:nvSpPr>
+        <p:spPr>
+          <a:xfrm>
+            <a:off x="6519672" y="2258568"/>
+            <a:ext cx="1828800" cy="292608"/>
+          </a:xfrm>
+          <a:prstGeom prst="rect">
+            <a:avLst/>
+          </a:prstGeom>
+          <a:noFill/>
+          <a:ln/>
+        </p:spPr>
+        <p:txBody>
+          <a:bodyPr wrap="square" lIns="0" tIns="0" rIns="0" bIns="0" rtlCol="0" anchor="ctr"/>
+          <a:lstStyle/>
+          <a:p>
+            <a:pPr algn="ctr" indent="0" marL="0">
+              <a:buNone/>
+            </a:pPr>
+            <a:r>
+              <a:rPr lang="en-US" sz="1300" b="1" dirty="0">
+                <a:solidFill>
+                  <a:srgbClr val="9D174D"/>
+                </a:solidFill>
+                <a:latin typeface="Trebuchet MS" pitchFamily="34" charset="0"/>
+                <a:ea typeface="Trebuchet MS" pitchFamily="34" charset="-122"/>
+                <a:cs typeface="Trebuchet MS" pitchFamily="34" charset="-120"/>
+              </a:rPr>
+              <a:t>ation</a:t>
+            </a:r>
+            <a:endParaRPr lang="en-US" sz="1300" dirty="0"/>
+          </a:p>
+        </p:txBody>
+      </p:sp>
+      <p:sp>
+        <p:nvSpPr>
+          <p:cNvPr id="24" name="Text 22"/>
+          <p:cNvSpPr/>
+          <p:nvPr/>
+        </p:nvSpPr>
+        <p:spPr>
+          <a:xfrm>
+            <a:off x="6519672" y="2569464"/>
+            <a:ext cx="1828800" cy="201168"/>
+          </a:xfrm>
+          <a:prstGeom prst="rect">
+            <a:avLst/>
+          </a:prstGeom>
+          <a:noFill/>
+          <a:ln/>
+        </p:spPr>
+        <p:txBody>
+          <a:bodyPr wrap="square" lIns="0" tIns="0" rIns="0" bIns="0" rtlCol="0" anchor="t"/>
+          <a:lstStyle/>
+          <a:p>
+            <a:pPr algn="ctr" indent="0" marL="0">
+              <a:buNone/>
+            </a:pPr>
+            <a:r>
+              <a:rPr lang="en-US" sz="850" dirty="0">
+                <a:solidFill>
+                  <a:srgbClr val="475569"/>
+                </a:solidFill>
+                <a:latin typeface="Calibri" pitchFamily="34" charset="0"/>
+                <a:ea typeface="Calibri" pitchFamily="34" charset="-122"/>
+                <a:cs typeface="Calibri" pitchFamily="34" charset="-120"/>
+              </a:rPr>
+              <a:t>action or process</a:t>
+            </a:r>
+            <a:endParaRPr lang="en-US" sz="850" dirty="0"/>
+          </a:p>
+        </p:txBody>
+      </p:sp>
+      <p:sp>
+        <p:nvSpPr>
+          <p:cNvPr id="25" name="Text 23"/>
+          <p:cNvSpPr/>
+          <p:nvPr/>
+        </p:nvSpPr>
+        <p:spPr>
+          <a:xfrm>
+            <a:off x="6519672" y="2752344"/>
+            <a:ext cx="1828800" cy="182880"/>
+          </a:xfrm>
+          <a:prstGeom prst="rect">
+            <a:avLst/>
+          </a:prstGeom>
+          <a:noFill/>
+          <a:ln/>
+        </p:spPr>
+        <p:txBody>
+          <a:bodyPr wrap="square" lIns="0" tIns="0" rIns="0" bIns="0" rtlCol="0" anchor="t"/>
+          <a:lstStyle/>
+          <a:p>
+            <a:pPr algn="ctr" indent="0" marL="0">
+              <a:buNone/>
+            </a:pPr>
+            <a:r>
+              <a:rPr lang="en-US" sz="700" i="1" dirty="0">
+                <a:solidFill>
+                  <a:srgbClr val="94A3B8"/>
+                </a:solidFill>
+                <a:latin typeface="Calibri" pitchFamily="34" charset="0"/>
+                <a:ea typeface="Calibri" pitchFamily="34" charset="-122"/>
+                <a:cs typeface="Calibri" pitchFamily="34" charset="-120"/>
+              </a:rPr>
+              <a:t>'e' dropped before vowel suffix</a:t>
+            </a:r>
+            <a:endParaRPr lang="en-US" sz="700" dirty="0"/>
+          </a:p>
+        </p:txBody>
+      </p:sp>
+      <p:sp>
+        <p:nvSpPr>
+          <p:cNvPr id="26" name="Shape 24"/>
           <p:cNvSpPr/>
           <p:nvPr/>
         </p:nvSpPr>
@@ -19130,7 +19071,7 @@
       </p:sp>
       <p:sp>
         <p:nvSpPr>
-          <p:cNvPr id="23" name="Text 21"/>
+          <p:cNvPr id="27" name="Text 25"/>
           <p:cNvSpPr/>
           <p:nvPr/>
         </p:nvSpPr>
@@ -19169,7 +19110,7 @@
       </p:sp>
       <p:sp>
         <p:nvSpPr>
-          <p:cNvPr id="24" name="Shape 22"/>
+          <p:cNvPr id="28" name="Shape 26"/>
           <p:cNvSpPr/>
           <p:nvPr/>
         </p:nvSpPr>
@@ -19196,7 +19137,7 @@
       </p:sp>
       <p:sp>
         <p:nvSpPr>
-          <p:cNvPr id="25" name="Text 23"/>
+          <p:cNvPr id="29" name="Text 27"/>
           <p:cNvSpPr/>
           <p:nvPr/>
         </p:nvSpPr>
@@ -19235,7 +19176,7 @@
       </p:sp>
       <p:sp>
         <p:nvSpPr>
-          <p:cNvPr id="26" name="Shape 24"/>
+          <p:cNvPr id="30" name="Shape 28"/>
           <p:cNvSpPr/>
           <p:nvPr/>
         </p:nvSpPr>
@@ -19262,7 +19203,7 @@
       </p:sp>
       <p:sp>
         <p:nvSpPr>
-          <p:cNvPr id="27" name="Text 25"/>
+          <p:cNvPr id="31" name="Text 29"/>
           <p:cNvSpPr/>
           <p:nvPr/>
         </p:nvSpPr>
@@ -19301,7 +19242,7 @@
       </p:sp>
       <p:sp>
         <p:nvSpPr>
-          <p:cNvPr id="28" name="Shape 26"/>
+          <p:cNvPr id="32" name="Shape 30"/>
           <p:cNvSpPr/>
           <p:nvPr/>
         </p:nvSpPr>
@@ -19328,7 +19269,7 @@
       </p:sp>
       <p:sp>
         <p:nvSpPr>
-          <p:cNvPr id="29" name="Text 27"/>
+          <p:cNvPr id="33" name="Text 31"/>
           <p:cNvSpPr/>
           <p:nvPr/>
         </p:nvSpPr>
@@ -19790,7 +19731,7 @@
                 <a:ea typeface="Trebuchet MS" pitchFamily="34" charset="-122"/>
                 <a:cs typeface="Trebuchet MS" pitchFamily="34" charset="-120"/>
               </a:rPr>
-              <a:t>reform</a:t>
+              <a:t>transformation</a:t>
             </a:r>
             <a:endParaRPr lang="en-US" sz="2800" dirty="0"/>
           </a:p>
@@ -19870,7 +19811,7 @@
         </p:nvSpPr>
         <p:spPr>
           <a:xfrm>
-            <a:off x="2938272" y="2258568"/>
+            <a:off x="2221992" y="2258568"/>
             <a:ext cx="1828800" cy="292608"/>
           </a:xfrm>
           <a:prstGeom prst="rect">
@@ -19904,7 +19845,7 @@
         </p:nvSpPr>
         <p:spPr>
           <a:xfrm>
-            <a:off x="2938272" y="2258568"/>
+            <a:off x="2221992" y="2258568"/>
             <a:ext cx="1828800" cy="292608"/>
           </a:xfrm>
           <a:prstGeom prst="rect">
@@ -19929,7 +19870,7 @@
                 <a:ea typeface="Trebuchet MS" pitchFamily="34" charset="-122"/>
                 <a:cs typeface="Trebuchet MS" pitchFamily="34" charset="-120"/>
               </a:rPr>
-              <a:t>re</a:t>
+              <a:t>trans</a:t>
             </a:r>
             <a:endParaRPr lang="en-US" sz="1300" dirty="0"/>
           </a:p>
@@ -19943,7 +19884,7 @@
         </p:nvSpPr>
         <p:spPr>
           <a:xfrm>
-            <a:off x="2938272" y="2569464"/>
+            <a:off x="2221992" y="2569464"/>
             <a:ext cx="1828800" cy="201168"/>
           </a:xfrm>
           <a:prstGeom prst="rect">
@@ -19968,7 +19909,7 @@
                 <a:ea typeface="Calibri" pitchFamily="34" charset="-122"/>
                 <a:cs typeface="Calibri" pitchFamily="34" charset="-120"/>
               </a:rPr>
-              <a:t>again or back</a:t>
+              <a:t>across, change</a:t>
             </a:r>
             <a:endParaRPr lang="en-US" sz="850" dirty="0"/>
           </a:p>
@@ -19982,7 +19923,7 @@
         </p:nvSpPr>
         <p:spPr>
           <a:xfrm>
-            <a:off x="5803392" y="2258568"/>
+            <a:off x="4370832" y="2258568"/>
             <a:ext cx="1828800" cy="292608"/>
           </a:xfrm>
           <a:prstGeom prst="rect">
@@ -20016,7 +19957,7 @@
         </p:nvSpPr>
         <p:spPr>
           <a:xfrm>
-            <a:off x="5803392" y="2258568"/>
+            <a:off x="4370832" y="2258568"/>
             <a:ext cx="1828800" cy="292608"/>
           </a:xfrm>
           <a:prstGeom prst="rect">
@@ -20055,7 +19996,7 @@
         </p:nvSpPr>
         <p:spPr>
           <a:xfrm>
-            <a:off x="5803392" y="2569464"/>
+            <a:off x="4370832" y="2569464"/>
             <a:ext cx="1828800" cy="201168"/>
           </a:xfrm>
           <a:prstGeom prst="rect">
@@ -20080,7 +20021,7 @@
                 <a:ea typeface="Calibri" pitchFamily="34" charset="-122"/>
                 <a:cs typeface="Calibri" pitchFamily="34" charset="-120"/>
               </a:rPr>
-              <a:t>shape or structure</a:t>
+              <a:t>shape, arrange</a:t>
             </a:r>
             <a:endParaRPr lang="en-US" sz="850" dirty="0"/>
           </a:p>
@@ -20089,6 +20030,157 @@
       <p:sp>
         <p:nvSpPr>
           <p:cNvPr id="22" name="Shape 20"/>
+          <p:cNvSpPr/>
+          <p:nvPr/>
+        </p:nvSpPr>
+        <p:spPr>
+          <a:xfrm>
+            <a:off x="6519672" y="2258568"/>
+            <a:ext cx="1828800" cy="292608"/>
+          </a:xfrm>
+          <a:prstGeom prst="rect">
+            <a:avLst>
+              <a:gd name="adj" fmla="val 25000"/>
+            </a:avLst>
+          </a:prstGeom>
+          <a:solidFill>
+            <a:srgbClr val="FCE7F3"/>
+          </a:solidFill>
+          <a:ln w="19050">
+            <a:solidFill>
+              <a:srgbClr val="DB2777"/>
+            </a:solidFill>
+            <a:prstDash val="solid"/>
+          </a:ln>
+          <a:effectLst>
+            <a:outerShdw sx="100000" sy="100000" kx="0" ky="0" algn="bl" rotWithShape="0" blurRad="101600" dist="38100" dir="8100000">
+              <a:srgbClr val="000000">
+                <a:alpha val="12000"/>
+              </a:srgbClr>
+            </a:outerShdw>
+          </a:effectLst>
+        </p:spPr>
+      </p:sp>
+      <p:sp>
+        <p:nvSpPr>
+          <p:cNvPr id="23" name="Text 21"/>
+          <p:cNvSpPr/>
+          <p:nvPr/>
+        </p:nvSpPr>
+        <p:spPr>
+          <a:xfrm>
+            <a:off x="6519672" y="2258568"/>
+            <a:ext cx="1828800" cy="292608"/>
+          </a:xfrm>
+          <a:prstGeom prst="rect">
+            <a:avLst/>
+          </a:prstGeom>
+          <a:noFill/>
+          <a:ln/>
+        </p:spPr>
+        <p:txBody>
+          <a:bodyPr wrap="square" lIns="0" tIns="0" rIns="0" bIns="0" rtlCol="0" anchor="ctr"/>
+          <a:lstStyle/>
+          <a:p>
+            <a:pPr algn="ctr" indent="0" marL="0">
+              <a:buNone/>
+            </a:pPr>
+            <a:r>
+              <a:rPr lang="en-US" sz="1300" b="1" dirty="0">
+                <a:solidFill>
+                  <a:srgbClr val="9D174D"/>
+                </a:solidFill>
+                <a:latin typeface="Trebuchet MS" pitchFamily="34" charset="0"/>
+                <a:ea typeface="Trebuchet MS" pitchFamily="34" charset="-122"/>
+                <a:cs typeface="Trebuchet MS" pitchFamily="34" charset="-120"/>
+              </a:rPr>
+              <a:t>ation</a:t>
+            </a:r>
+            <a:endParaRPr lang="en-US" sz="1300" dirty="0"/>
+          </a:p>
+        </p:txBody>
+      </p:sp>
+      <p:sp>
+        <p:nvSpPr>
+          <p:cNvPr id="24" name="Text 22"/>
+          <p:cNvSpPr/>
+          <p:nvPr/>
+        </p:nvSpPr>
+        <p:spPr>
+          <a:xfrm>
+            <a:off x="6519672" y="2569464"/>
+            <a:ext cx="1828800" cy="201168"/>
+          </a:xfrm>
+          <a:prstGeom prst="rect">
+            <a:avLst/>
+          </a:prstGeom>
+          <a:noFill/>
+          <a:ln/>
+        </p:spPr>
+        <p:txBody>
+          <a:bodyPr wrap="square" lIns="0" tIns="0" rIns="0" bIns="0" rtlCol="0" anchor="t"/>
+          <a:lstStyle/>
+          <a:p>
+            <a:pPr algn="ctr" indent="0" marL="0">
+              <a:buNone/>
+            </a:pPr>
+            <a:r>
+              <a:rPr lang="en-US" sz="850" dirty="0">
+                <a:solidFill>
+                  <a:srgbClr val="475569"/>
+                </a:solidFill>
+                <a:latin typeface="Calibri" pitchFamily="34" charset="0"/>
+                <a:ea typeface="Calibri" pitchFamily="34" charset="-122"/>
+                <a:cs typeface="Calibri" pitchFamily="34" charset="-120"/>
+              </a:rPr>
+              <a:t>action or process</a:t>
+            </a:r>
+            <a:endParaRPr lang="en-US" sz="850" dirty="0"/>
+          </a:p>
+        </p:txBody>
+      </p:sp>
+      <p:sp>
+        <p:nvSpPr>
+          <p:cNvPr id="25" name="Text 23"/>
+          <p:cNvSpPr/>
+          <p:nvPr/>
+        </p:nvSpPr>
+        <p:spPr>
+          <a:xfrm>
+            <a:off x="6519672" y="2752344"/>
+            <a:ext cx="1828800" cy="182880"/>
+          </a:xfrm>
+          <a:prstGeom prst="rect">
+            <a:avLst/>
+          </a:prstGeom>
+          <a:noFill/>
+          <a:ln/>
+        </p:spPr>
+        <p:txBody>
+          <a:bodyPr wrap="square" lIns="0" tIns="0" rIns="0" bIns="0" rtlCol="0" anchor="t"/>
+          <a:lstStyle/>
+          <a:p>
+            <a:pPr algn="ctr" indent="0" marL="0">
+              <a:buNone/>
+            </a:pPr>
+            <a:r>
+              <a:rPr lang="en-US" sz="700" i="1" dirty="0">
+                <a:solidFill>
+                  <a:srgbClr val="94A3B8"/>
+                </a:solidFill>
+                <a:latin typeface="Calibri" pitchFamily="34" charset="0"/>
+                <a:ea typeface="Calibri" pitchFamily="34" charset="-122"/>
+                <a:cs typeface="Calibri" pitchFamily="34" charset="-120"/>
+              </a:rPr>
+              <a:t>'e' dropped before vowel suffix</a:t>
+            </a:r>
+            <a:endParaRPr lang="en-US" sz="700" dirty="0"/>
+          </a:p>
+        </p:txBody>
+      </p:sp>
+      <p:sp>
+        <p:nvSpPr>
+          <p:cNvPr id="26" name="Shape 24"/>
           <p:cNvSpPr/>
           <p:nvPr/>
         </p:nvSpPr>
@@ -20115,7 +20207,7 @@
       </p:sp>
       <p:sp>
         <p:nvSpPr>
-          <p:cNvPr id="23" name="Text 21"/>
+          <p:cNvPr id="27" name="Text 25"/>
           <p:cNvSpPr/>
           <p:nvPr/>
         </p:nvSpPr>
@@ -20154,7 +20246,7 @@
       </p:sp>
       <p:sp>
         <p:nvSpPr>
-          <p:cNvPr id="24" name="Shape 22"/>
+          <p:cNvPr id="28" name="Shape 26"/>
           <p:cNvSpPr/>
           <p:nvPr/>
         </p:nvSpPr>
@@ -20181,14 +20273,14 @@
       </p:sp>
       <p:sp>
         <p:nvSpPr>
-          <p:cNvPr id="25" name="Shape 23"/>
-          <p:cNvSpPr/>
-          <p:nvPr/>
-        </p:nvSpPr>
-        <p:spPr>
-          <a:xfrm>
-            <a:off x="2999232" y="3364992"/>
-            <a:ext cx="1645920" cy="475488"/>
+          <p:cNvPr id="29" name="Shape 27"/>
+          <p:cNvSpPr/>
+          <p:nvPr/>
+        </p:nvSpPr>
+        <p:spPr>
+          <a:xfrm>
+            <a:off x="1975104" y="3364992"/>
+            <a:ext cx="1554480" cy="475488"/>
           </a:xfrm>
           <a:prstGeom prst="rect">
             <a:avLst>
@@ -20208,14 +20300,14 @@
       </p:sp>
       <p:sp>
         <p:nvSpPr>
-          <p:cNvPr id="26" name="Text 24"/>
-          <p:cNvSpPr/>
-          <p:nvPr/>
-        </p:nvSpPr>
-        <p:spPr>
-          <a:xfrm>
-            <a:off x="2999232" y="3364992"/>
-            <a:ext cx="1645920" cy="475488"/>
+          <p:cNvPr id="30" name="Text 28"/>
+          <p:cNvSpPr/>
+          <p:nvPr/>
+        </p:nvSpPr>
+        <p:spPr>
+          <a:xfrm>
+            <a:off x="1975104" y="3364992"/>
+            <a:ext cx="1554480" cy="475488"/>
           </a:xfrm>
           <a:prstGeom prst="rect">
             <a:avLst/>
@@ -20239,7 +20331,7 @@
                 <a:ea typeface="Trebuchet MS" pitchFamily="34" charset="-122"/>
                 <a:cs typeface="Trebuchet MS" pitchFamily="34" charset="-120"/>
               </a:rPr>
-              <a:t>re</a:t>
+              <a:t>trans</a:t>
             </a:r>
             <a:endParaRPr lang="en-US" sz="1400" dirty="0"/>
           </a:p>
@@ -20247,14 +20339,14 @@
       </p:sp>
       <p:sp>
         <p:nvSpPr>
-          <p:cNvPr id="27" name="Text 25"/>
-          <p:cNvSpPr/>
-          <p:nvPr/>
-        </p:nvSpPr>
-        <p:spPr>
-          <a:xfrm>
-            <a:off x="4645152" y="3364992"/>
-            <a:ext cx="1097280" cy="475488"/>
+          <p:cNvPr id="31" name="Text 29"/>
+          <p:cNvSpPr/>
+          <p:nvPr/>
+        </p:nvSpPr>
+        <p:spPr>
+          <a:xfrm>
+            <a:off x="3529584" y="3364992"/>
+            <a:ext cx="73152" cy="475488"/>
           </a:xfrm>
           <a:prstGeom prst="rect">
             <a:avLst/>
@@ -20286,14 +20378,14 @@
       </p:sp>
       <p:sp>
         <p:nvSpPr>
-          <p:cNvPr id="28" name="Shape 26"/>
-          <p:cNvSpPr/>
-          <p:nvPr/>
-        </p:nvSpPr>
-        <p:spPr>
-          <a:xfrm>
-            <a:off x="5742432" y="3364992"/>
-            <a:ext cx="1645920" cy="475488"/>
+          <p:cNvPr id="32" name="Shape 30"/>
+          <p:cNvSpPr/>
+          <p:nvPr/>
+        </p:nvSpPr>
+        <p:spPr>
+          <a:xfrm>
+            <a:off x="3602736" y="3364992"/>
+            <a:ext cx="1554480" cy="475488"/>
           </a:xfrm>
           <a:prstGeom prst="rect">
             <a:avLst>
@@ -20313,14 +20405,14 @@
       </p:sp>
       <p:sp>
         <p:nvSpPr>
-          <p:cNvPr id="29" name="Text 27"/>
-          <p:cNvSpPr/>
-          <p:nvPr/>
-        </p:nvSpPr>
-        <p:spPr>
-          <a:xfrm>
-            <a:off x="5742432" y="3364992"/>
-            <a:ext cx="1645920" cy="475488"/>
+          <p:cNvPr id="33" name="Text 31"/>
+          <p:cNvSpPr/>
+          <p:nvPr/>
+        </p:nvSpPr>
+        <p:spPr>
+          <a:xfrm>
+            <a:off x="3602736" y="3364992"/>
+            <a:ext cx="1554480" cy="475488"/>
           </a:xfrm>
           <a:prstGeom prst="rect">
             <a:avLst/>
@@ -20344,7 +20436,7 @@
                 <a:ea typeface="Trebuchet MS" pitchFamily="34" charset="-122"/>
                 <a:cs typeface="Trebuchet MS" pitchFamily="34" charset="-120"/>
               </a:rPr>
-              <a:t>form</a:t>
+              <a:t>for</a:t>
             </a:r>
             <a:endParaRPr lang="en-US" sz="1400" dirty="0"/>
           </a:p>
@@ -20352,7 +20444,217 @@
       </p:sp>
       <p:sp>
         <p:nvSpPr>
-          <p:cNvPr id="30" name="Shape 28"/>
+          <p:cNvPr id="34" name="Text 32"/>
+          <p:cNvSpPr/>
+          <p:nvPr/>
+        </p:nvSpPr>
+        <p:spPr>
+          <a:xfrm>
+            <a:off x="5157216" y="3364992"/>
+            <a:ext cx="73152" cy="475488"/>
+          </a:xfrm>
+          <a:prstGeom prst="rect">
+            <a:avLst/>
+          </a:prstGeom>
+          <a:noFill/>
+          <a:ln/>
+        </p:spPr>
+        <p:txBody>
+          <a:bodyPr wrap="square" lIns="0" tIns="0" rIns="0" bIns="0" rtlCol="0" anchor="ctr"/>
+          <a:lstStyle/>
+          <a:p>
+            <a:pPr algn="ctr" indent="0" marL="0">
+              <a:buNone/>
+            </a:pPr>
+            <a:r>
+              <a:rPr lang="en-US" sz="1600" b="1" dirty="0">
+                <a:solidFill>
+                  <a:srgbClr val="0D9488"/>
+                </a:solidFill>
+                <a:latin typeface="Trebuchet MS" pitchFamily="34" charset="0"/>
+                <a:ea typeface="Trebuchet MS" pitchFamily="34" charset="-122"/>
+                <a:cs typeface="Trebuchet MS" pitchFamily="34" charset="-120"/>
+              </a:rPr>
+              <a:t>·</a:t>
+            </a:r>
+            <a:endParaRPr lang="en-US" sz="1600" dirty="0"/>
+          </a:p>
+        </p:txBody>
+      </p:sp>
+      <p:sp>
+        <p:nvSpPr>
+          <p:cNvPr id="35" name="Shape 33"/>
+          <p:cNvSpPr/>
+          <p:nvPr/>
+        </p:nvSpPr>
+        <p:spPr>
+          <a:xfrm>
+            <a:off x="5230368" y="3364992"/>
+            <a:ext cx="1554480" cy="475488"/>
+          </a:xfrm>
+          <a:prstGeom prst="rect">
+            <a:avLst>
+              <a:gd name="adj" fmla="val 9615"/>
+            </a:avLst>
+          </a:prstGeom>
+          <a:solidFill>
+            <a:srgbClr val="FFFFFF"/>
+          </a:solidFill>
+          <a:ln w="12700">
+            <a:solidFill>
+              <a:srgbClr val="0D9488"/>
+            </a:solidFill>
+            <a:prstDash val="solid"/>
+          </a:ln>
+        </p:spPr>
+      </p:sp>
+      <p:sp>
+        <p:nvSpPr>
+          <p:cNvPr id="36" name="Text 34"/>
+          <p:cNvSpPr/>
+          <p:nvPr/>
+        </p:nvSpPr>
+        <p:spPr>
+          <a:xfrm>
+            <a:off x="5230368" y="3364992"/>
+            <a:ext cx="1554480" cy="475488"/>
+          </a:xfrm>
+          <a:prstGeom prst="rect">
+            <a:avLst/>
+          </a:prstGeom>
+          <a:noFill/>
+          <a:ln/>
+        </p:spPr>
+        <p:txBody>
+          <a:bodyPr wrap="square" lIns="0" tIns="0" rIns="0" bIns="0" rtlCol="0" anchor="ctr"/>
+          <a:lstStyle/>
+          <a:p>
+            <a:pPr algn="ctr" indent="0" marL="0">
+              <a:buNone/>
+            </a:pPr>
+            <a:r>
+              <a:rPr lang="en-US" sz="1400" b="1" dirty="0">
+                <a:solidFill>
+                  <a:srgbClr val="0D9488"/>
+                </a:solidFill>
+                <a:latin typeface="Trebuchet MS" pitchFamily="34" charset="0"/>
+                <a:ea typeface="Trebuchet MS" pitchFamily="34" charset="-122"/>
+                <a:cs typeface="Trebuchet MS" pitchFamily="34" charset="-120"/>
+              </a:rPr>
+              <a:t>ma</a:t>
+            </a:r>
+            <a:endParaRPr lang="en-US" sz="1400" dirty="0"/>
+          </a:p>
+        </p:txBody>
+      </p:sp>
+      <p:sp>
+        <p:nvSpPr>
+          <p:cNvPr id="37" name="Text 35"/>
+          <p:cNvSpPr/>
+          <p:nvPr/>
+        </p:nvSpPr>
+        <p:spPr>
+          <a:xfrm>
+            <a:off x="6784848" y="3364992"/>
+            <a:ext cx="73152" cy="475488"/>
+          </a:xfrm>
+          <a:prstGeom prst="rect">
+            <a:avLst/>
+          </a:prstGeom>
+          <a:noFill/>
+          <a:ln/>
+        </p:spPr>
+        <p:txBody>
+          <a:bodyPr wrap="square" lIns="0" tIns="0" rIns="0" bIns="0" rtlCol="0" anchor="ctr"/>
+          <a:lstStyle/>
+          <a:p>
+            <a:pPr algn="ctr" indent="0" marL="0">
+              <a:buNone/>
+            </a:pPr>
+            <a:r>
+              <a:rPr lang="en-US" sz="1600" b="1" dirty="0">
+                <a:solidFill>
+                  <a:srgbClr val="0D9488"/>
+                </a:solidFill>
+                <a:latin typeface="Trebuchet MS" pitchFamily="34" charset="0"/>
+                <a:ea typeface="Trebuchet MS" pitchFamily="34" charset="-122"/>
+                <a:cs typeface="Trebuchet MS" pitchFamily="34" charset="-120"/>
+              </a:rPr>
+              <a:t>·</a:t>
+            </a:r>
+            <a:endParaRPr lang="en-US" sz="1600" dirty="0"/>
+          </a:p>
+        </p:txBody>
+      </p:sp>
+      <p:sp>
+        <p:nvSpPr>
+          <p:cNvPr id="38" name="Shape 36"/>
+          <p:cNvSpPr/>
+          <p:nvPr/>
+        </p:nvSpPr>
+        <p:spPr>
+          <a:xfrm>
+            <a:off x="6858000" y="3364992"/>
+            <a:ext cx="1554480" cy="475488"/>
+          </a:xfrm>
+          <a:prstGeom prst="rect">
+            <a:avLst>
+              <a:gd name="adj" fmla="val 9615"/>
+            </a:avLst>
+          </a:prstGeom>
+          <a:solidFill>
+            <a:srgbClr val="FFFFFF"/>
+          </a:solidFill>
+          <a:ln w="12700">
+            <a:solidFill>
+              <a:srgbClr val="0D9488"/>
+            </a:solidFill>
+            <a:prstDash val="solid"/>
+          </a:ln>
+        </p:spPr>
+      </p:sp>
+      <p:sp>
+        <p:nvSpPr>
+          <p:cNvPr id="39" name="Text 37"/>
+          <p:cNvSpPr/>
+          <p:nvPr/>
+        </p:nvSpPr>
+        <p:spPr>
+          <a:xfrm>
+            <a:off x="6858000" y="3364992"/>
+            <a:ext cx="1554480" cy="475488"/>
+          </a:xfrm>
+          <a:prstGeom prst="rect">
+            <a:avLst/>
+          </a:prstGeom>
+          <a:noFill/>
+          <a:ln/>
+        </p:spPr>
+        <p:txBody>
+          <a:bodyPr wrap="square" lIns="0" tIns="0" rIns="0" bIns="0" rtlCol="0" anchor="ctr"/>
+          <a:lstStyle/>
+          <a:p>
+            <a:pPr algn="ctr" indent="0" marL="0">
+              <a:buNone/>
+            </a:pPr>
+            <a:r>
+              <a:rPr lang="en-US" sz="1400" b="1" dirty="0">
+                <a:solidFill>
+                  <a:srgbClr val="0D9488"/>
+                </a:solidFill>
+                <a:latin typeface="Trebuchet MS" pitchFamily="34" charset="0"/>
+                <a:ea typeface="Trebuchet MS" pitchFamily="34" charset="-122"/>
+                <a:cs typeface="Trebuchet MS" pitchFamily="34" charset="-120"/>
+              </a:rPr>
+              <a:t>tion</a:t>
+            </a:r>
+            <a:endParaRPr lang="en-US" sz="1400" dirty="0"/>
+          </a:p>
+        </p:txBody>
+      </p:sp>
+      <p:sp>
+        <p:nvSpPr>
+          <p:cNvPr id="40" name="Shape 38"/>
           <p:cNvSpPr/>
           <p:nvPr/>
         </p:nvSpPr>
@@ -20379,7 +20681,7 @@
       </p:sp>
       <p:sp>
         <p:nvSpPr>
-          <p:cNvPr id="31" name="Text 29"/>
+          <p:cNvPr id="41" name="Text 39"/>
           <p:cNvSpPr/>
           <p:nvPr/>
         </p:nvSpPr>
@@ -20418,7 +20720,7 @@
       </p:sp>
       <p:sp>
         <p:nvSpPr>
-          <p:cNvPr id="32" name="Shape 30"/>
+          <p:cNvPr id="42" name="Shape 40"/>
           <p:cNvSpPr/>
           <p:nvPr/>
         </p:nvSpPr>
@@ -20445,7 +20747,7 @@
       </p:sp>
       <p:sp>
         <p:nvSpPr>
-          <p:cNvPr id="33" name="Text 31"/>
+          <p:cNvPr id="43" name="Text 41"/>
           <p:cNvSpPr/>
           <p:nvPr/>
         </p:nvSpPr>
@@ -20907,7 +21209,7 @@
                 <a:ea typeface="Trebuchet MS" pitchFamily="34" charset="-122"/>
                 <a:cs typeface="Trebuchet MS" pitchFamily="34" charset="-120"/>
               </a:rPr>
-              <a:t>reform</a:t>
+              <a:t>transformation</a:t>
             </a:r>
             <a:endParaRPr lang="en-US" sz="2800" dirty="0"/>
           </a:p>
@@ -20987,7 +21289,7 @@
         </p:nvSpPr>
         <p:spPr>
           <a:xfrm>
-            <a:off x="2938272" y="2258568"/>
+            <a:off x="2221992" y="2258568"/>
             <a:ext cx="1828800" cy="292608"/>
           </a:xfrm>
           <a:prstGeom prst="rect">
@@ -21021,7 +21323,7 @@
         </p:nvSpPr>
         <p:spPr>
           <a:xfrm>
-            <a:off x="2938272" y="2258568"/>
+            <a:off x="2221992" y="2258568"/>
             <a:ext cx="1828800" cy="292608"/>
           </a:xfrm>
           <a:prstGeom prst="rect">
@@ -21046,7 +21348,7 @@
                 <a:ea typeface="Trebuchet MS" pitchFamily="34" charset="-122"/>
                 <a:cs typeface="Trebuchet MS" pitchFamily="34" charset="-120"/>
               </a:rPr>
-              <a:t>re</a:t>
+              <a:t>trans</a:t>
             </a:r>
             <a:endParaRPr lang="en-US" sz="1300" dirty="0"/>
           </a:p>
@@ -21060,7 +21362,7 @@
         </p:nvSpPr>
         <p:spPr>
           <a:xfrm>
-            <a:off x="2938272" y="2569464"/>
+            <a:off x="2221992" y="2569464"/>
             <a:ext cx="1828800" cy="201168"/>
           </a:xfrm>
           <a:prstGeom prst="rect">
@@ -21085,7 +21387,7 @@
                 <a:ea typeface="Calibri" pitchFamily="34" charset="-122"/>
                 <a:cs typeface="Calibri" pitchFamily="34" charset="-120"/>
               </a:rPr>
-              <a:t>again or back</a:t>
+              <a:t>across, change</a:t>
             </a:r>
             <a:endParaRPr lang="en-US" sz="850" dirty="0"/>
           </a:p>
@@ -21099,7 +21401,7 @@
         </p:nvSpPr>
         <p:spPr>
           <a:xfrm>
-            <a:off x="5803392" y="2258568"/>
+            <a:off x="4370832" y="2258568"/>
             <a:ext cx="1828800" cy="292608"/>
           </a:xfrm>
           <a:prstGeom prst="rect">
@@ -21133,7 +21435,7 @@
         </p:nvSpPr>
         <p:spPr>
           <a:xfrm>
-            <a:off x="5803392" y="2258568"/>
+            <a:off x="4370832" y="2258568"/>
             <a:ext cx="1828800" cy="292608"/>
           </a:xfrm>
           <a:prstGeom prst="rect">
@@ -21172,7 +21474,7 @@
         </p:nvSpPr>
         <p:spPr>
           <a:xfrm>
-            <a:off x="5803392" y="2569464"/>
+            <a:off x="4370832" y="2569464"/>
             <a:ext cx="1828800" cy="201168"/>
           </a:xfrm>
           <a:prstGeom prst="rect">
@@ -21197,7 +21499,7 @@
                 <a:ea typeface="Calibri" pitchFamily="34" charset="-122"/>
                 <a:cs typeface="Calibri" pitchFamily="34" charset="-120"/>
               </a:rPr>
-              <a:t>shape or structure</a:t>
+              <a:t>shape, arrange</a:t>
             </a:r>
             <a:endParaRPr lang="en-US" sz="850" dirty="0"/>
           </a:p>
@@ -21206,6 +21508,157 @@
       <p:sp>
         <p:nvSpPr>
           <p:cNvPr id="22" name="Shape 20"/>
+          <p:cNvSpPr/>
+          <p:nvPr/>
+        </p:nvSpPr>
+        <p:spPr>
+          <a:xfrm>
+            <a:off x="6519672" y="2258568"/>
+            <a:ext cx="1828800" cy="292608"/>
+          </a:xfrm>
+          <a:prstGeom prst="rect">
+            <a:avLst>
+              <a:gd name="adj" fmla="val 25000"/>
+            </a:avLst>
+          </a:prstGeom>
+          <a:solidFill>
+            <a:srgbClr val="FCE7F3"/>
+          </a:solidFill>
+          <a:ln w="19050">
+            <a:solidFill>
+              <a:srgbClr val="DB2777"/>
+            </a:solidFill>
+            <a:prstDash val="solid"/>
+          </a:ln>
+          <a:effectLst>
+            <a:outerShdw sx="100000" sy="100000" kx="0" ky="0" algn="bl" rotWithShape="0" blurRad="101600" dist="38100" dir="8100000">
+              <a:srgbClr val="000000">
+                <a:alpha val="12000"/>
+              </a:srgbClr>
+            </a:outerShdw>
+          </a:effectLst>
+        </p:spPr>
+      </p:sp>
+      <p:sp>
+        <p:nvSpPr>
+          <p:cNvPr id="23" name="Text 21"/>
+          <p:cNvSpPr/>
+          <p:nvPr/>
+        </p:nvSpPr>
+        <p:spPr>
+          <a:xfrm>
+            <a:off x="6519672" y="2258568"/>
+            <a:ext cx="1828800" cy="292608"/>
+          </a:xfrm>
+          <a:prstGeom prst="rect">
+            <a:avLst/>
+          </a:prstGeom>
+          <a:noFill/>
+          <a:ln/>
+        </p:spPr>
+        <p:txBody>
+          <a:bodyPr wrap="square" lIns="0" tIns="0" rIns="0" bIns="0" rtlCol="0" anchor="ctr"/>
+          <a:lstStyle/>
+          <a:p>
+            <a:pPr algn="ctr" indent="0" marL="0">
+              <a:buNone/>
+            </a:pPr>
+            <a:r>
+              <a:rPr lang="en-US" sz="1300" b="1" dirty="0">
+                <a:solidFill>
+                  <a:srgbClr val="9D174D"/>
+                </a:solidFill>
+                <a:latin typeface="Trebuchet MS" pitchFamily="34" charset="0"/>
+                <a:ea typeface="Trebuchet MS" pitchFamily="34" charset="-122"/>
+                <a:cs typeface="Trebuchet MS" pitchFamily="34" charset="-120"/>
+              </a:rPr>
+              <a:t>ation</a:t>
+            </a:r>
+            <a:endParaRPr lang="en-US" sz="1300" dirty="0"/>
+          </a:p>
+        </p:txBody>
+      </p:sp>
+      <p:sp>
+        <p:nvSpPr>
+          <p:cNvPr id="24" name="Text 22"/>
+          <p:cNvSpPr/>
+          <p:nvPr/>
+        </p:nvSpPr>
+        <p:spPr>
+          <a:xfrm>
+            <a:off x="6519672" y="2569464"/>
+            <a:ext cx="1828800" cy="201168"/>
+          </a:xfrm>
+          <a:prstGeom prst="rect">
+            <a:avLst/>
+          </a:prstGeom>
+          <a:noFill/>
+          <a:ln/>
+        </p:spPr>
+        <p:txBody>
+          <a:bodyPr wrap="square" lIns="0" tIns="0" rIns="0" bIns="0" rtlCol="0" anchor="t"/>
+          <a:lstStyle/>
+          <a:p>
+            <a:pPr algn="ctr" indent="0" marL="0">
+              <a:buNone/>
+            </a:pPr>
+            <a:r>
+              <a:rPr lang="en-US" sz="850" dirty="0">
+                <a:solidFill>
+                  <a:srgbClr val="475569"/>
+                </a:solidFill>
+                <a:latin typeface="Calibri" pitchFamily="34" charset="0"/>
+                <a:ea typeface="Calibri" pitchFamily="34" charset="-122"/>
+                <a:cs typeface="Calibri" pitchFamily="34" charset="-120"/>
+              </a:rPr>
+              <a:t>action or process</a:t>
+            </a:r>
+            <a:endParaRPr lang="en-US" sz="850" dirty="0"/>
+          </a:p>
+        </p:txBody>
+      </p:sp>
+      <p:sp>
+        <p:nvSpPr>
+          <p:cNvPr id="25" name="Text 23"/>
+          <p:cNvSpPr/>
+          <p:nvPr/>
+        </p:nvSpPr>
+        <p:spPr>
+          <a:xfrm>
+            <a:off x="6519672" y="2752344"/>
+            <a:ext cx="1828800" cy="182880"/>
+          </a:xfrm>
+          <a:prstGeom prst="rect">
+            <a:avLst/>
+          </a:prstGeom>
+          <a:noFill/>
+          <a:ln/>
+        </p:spPr>
+        <p:txBody>
+          <a:bodyPr wrap="square" lIns="0" tIns="0" rIns="0" bIns="0" rtlCol="0" anchor="t"/>
+          <a:lstStyle/>
+          <a:p>
+            <a:pPr algn="ctr" indent="0" marL="0">
+              <a:buNone/>
+            </a:pPr>
+            <a:r>
+              <a:rPr lang="en-US" sz="700" i="1" dirty="0">
+                <a:solidFill>
+                  <a:srgbClr val="94A3B8"/>
+                </a:solidFill>
+                <a:latin typeface="Calibri" pitchFamily="34" charset="0"/>
+                <a:ea typeface="Calibri" pitchFamily="34" charset="-122"/>
+                <a:cs typeface="Calibri" pitchFamily="34" charset="-120"/>
+              </a:rPr>
+              <a:t>'e' dropped before vowel suffix</a:t>
+            </a:r>
+            <a:endParaRPr lang="en-US" sz="700" dirty="0"/>
+          </a:p>
+        </p:txBody>
+      </p:sp>
+      <p:sp>
+        <p:nvSpPr>
+          <p:cNvPr id="26" name="Shape 24"/>
           <p:cNvSpPr/>
           <p:nvPr/>
         </p:nvSpPr>
@@ -21232,7 +21685,7 @@
       </p:sp>
       <p:sp>
         <p:nvSpPr>
-          <p:cNvPr id="23" name="Text 21"/>
+          <p:cNvPr id="27" name="Text 25"/>
           <p:cNvSpPr/>
           <p:nvPr/>
         </p:nvSpPr>
@@ -21271,7 +21724,7 @@
       </p:sp>
       <p:sp>
         <p:nvSpPr>
-          <p:cNvPr id="24" name="Shape 22"/>
+          <p:cNvPr id="28" name="Shape 26"/>
           <p:cNvSpPr/>
           <p:nvPr/>
         </p:nvSpPr>
@@ -21298,14 +21751,14 @@
       </p:sp>
       <p:sp>
         <p:nvSpPr>
-          <p:cNvPr id="25" name="Shape 23"/>
-          <p:cNvSpPr/>
-          <p:nvPr/>
-        </p:nvSpPr>
-        <p:spPr>
-          <a:xfrm>
-            <a:off x="2999232" y="3364992"/>
-            <a:ext cx="1645920" cy="475488"/>
+          <p:cNvPr id="29" name="Shape 27"/>
+          <p:cNvSpPr/>
+          <p:nvPr/>
+        </p:nvSpPr>
+        <p:spPr>
+          <a:xfrm>
+            <a:off x="1975104" y="3364992"/>
+            <a:ext cx="1554480" cy="475488"/>
           </a:xfrm>
           <a:prstGeom prst="rect">
             <a:avLst>
@@ -21325,14 +21778,14 @@
       </p:sp>
       <p:sp>
         <p:nvSpPr>
-          <p:cNvPr id="26" name="Text 24"/>
-          <p:cNvSpPr/>
-          <p:nvPr/>
-        </p:nvSpPr>
-        <p:spPr>
-          <a:xfrm>
-            <a:off x="2999232" y="3364992"/>
-            <a:ext cx="1645920" cy="475488"/>
+          <p:cNvPr id="30" name="Text 28"/>
+          <p:cNvSpPr/>
+          <p:nvPr/>
+        </p:nvSpPr>
+        <p:spPr>
+          <a:xfrm>
+            <a:off x="1975104" y="3364992"/>
+            <a:ext cx="1554480" cy="475488"/>
           </a:xfrm>
           <a:prstGeom prst="rect">
             <a:avLst/>
@@ -21356,7 +21809,7 @@
                 <a:ea typeface="Trebuchet MS" pitchFamily="34" charset="-122"/>
                 <a:cs typeface="Trebuchet MS" pitchFamily="34" charset="-120"/>
               </a:rPr>
-              <a:t>re</a:t>
+              <a:t>trans</a:t>
             </a:r>
             <a:endParaRPr lang="en-US" sz="1400" dirty="0"/>
           </a:p>
@@ -21364,14 +21817,14 @@
       </p:sp>
       <p:sp>
         <p:nvSpPr>
-          <p:cNvPr id="27" name="Text 25"/>
-          <p:cNvSpPr/>
-          <p:nvPr/>
-        </p:nvSpPr>
-        <p:spPr>
-          <a:xfrm>
-            <a:off x="4645152" y="3364992"/>
-            <a:ext cx="1097280" cy="475488"/>
+          <p:cNvPr id="31" name="Text 29"/>
+          <p:cNvSpPr/>
+          <p:nvPr/>
+        </p:nvSpPr>
+        <p:spPr>
+          <a:xfrm>
+            <a:off x="3529584" y="3364992"/>
+            <a:ext cx="73152" cy="475488"/>
           </a:xfrm>
           <a:prstGeom prst="rect">
             <a:avLst/>
@@ -21403,14 +21856,14 @@
       </p:sp>
       <p:sp>
         <p:nvSpPr>
-          <p:cNvPr id="28" name="Shape 26"/>
-          <p:cNvSpPr/>
-          <p:nvPr/>
-        </p:nvSpPr>
-        <p:spPr>
-          <a:xfrm>
-            <a:off x="5742432" y="3364992"/>
-            <a:ext cx="1645920" cy="475488"/>
+          <p:cNvPr id="32" name="Shape 30"/>
+          <p:cNvSpPr/>
+          <p:nvPr/>
+        </p:nvSpPr>
+        <p:spPr>
+          <a:xfrm>
+            <a:off x="3602736" y="3364992"/>
+            <a:ext cx="1554480" cy="475488"/>
           </a:xfrm>
           <a:prstGeom prst="rect">
             <a:avLst>
@@ -21430,14 +21883,14 @@
       </p:sp>
       <p:sp>
         <p:nvSpPr>
-          <p:cNvPr id="29" name="Text 27"/>
-          <p:cNvSpPr/>
-          <p:nvPr/>
-        </p:nvSpPr>
-        <p:spPr>
-          <a:xfrm>
-            <a:off x="5742432" y="3364992"/>
-            <a:ext cx="1645920" cy="475488"/>
+          <p:cNvPr id="33" name="Text 31"/>
+          <p:cNvSpPr/>
+          <p:nvPr/>
+        </p:nvSpPr>
+        <p:spPr>
+          <a:xfrm>
+            <a:off x="3602736" y="3364992"/>
+            <a:ext cx="1554480" cy="475488"/>
           </a:xfrm>
           <a:prstGeom prst="rect">
             <a:avLst/>
@@ -21461,7 +21914,7 @@
                 <a:ea typeface="Trebuchet MS" pitchFamily="34" charset="-122"/>
                 <a:cs typeface="Trebuchet MS" pitchFamily="34" charset="-120"/>
               </a:rPr>
-              <a:t>form</a:t>
+              <a:t>for</a:t>
             </a:r>
             <a:endParaRPr lang="en-US" sz="1400" dirty="0"/>
           </a:p>
@@ -21469,7 +21922,217 @@
       </p:sp>
       <p:sp>
         <p:nvSpPr>
-          <p:cNvPr id="30" name="Shape 28"/>
+          <p:cNvPr id="34" name="Text 32"/>
+          <p:cNvSpPr/>
+          <p:nvPr/>
+        </p:nvSpPr>
+        <p:spPr>
+          <a:xfrm>
+            <a:off x="5157216" y="3364992"/>
+            <a:ext cx="73152" cy="475488"/>
+          </a:xfrm>
+          <a:prstGeom prst="rect">
+            <a:avLst/>
+          </a:prstGeom>
+          <a:noFill/>
+          <a:ln/>
+        </p:spPr>
+        <p:txBody>
+          <a:bodyPr wrap="square" lIns="0" tIns="0" rIns="0" bIns="0" rtlCol="0" anchor="ctr"/>
+          <a:lstStyle/>
+          <a:p>
+            <a:pPr algn="ctr" indent="0" marL="0">
+              <a:buNone/>
+            </a:pPr>
+            <a:r>
+              <a:rPr lang="en-US" sz="1600" b="1" dirty="0">
+                <a:solidFill>
+                  <a:srgbClr val="0D9488"/>
+                </a:solidFill>
+                <a:latin typeface="Trebuchet MS" pitchFamily="34" charset="0"/>
+                <a:ea typeface="Trebuchet MS" pitchFamily="34" charset="-122"/>
+                <a:cs typeface="Trebuchet MS" pitchFamily="34" charset="-120"/>
+              </a:rPr>
+              <a:t>·</a:t>
+            </a:r>
+            <a:endParaRPr lang="en-US" sz="1600" dirty="0"/>
+          </a:p>
+        </p:txBody>
+      </p:sp>
+      <p:sp>
+        <p:nvSpPr>
+          <p:cNvPr id="35" name="Shape 33"/>
+          <p:cNvSpPr/>
+          <p:nvPr/>
+        </p:nvSpPr>
+        <p:spPr>
+          <a:xfrm>
+            <a:off x="5230368" y="3364992"/>
+            <a:ext cx="1554480" cy="475488"/>
+          </a:xfrm>
+          <a:prstGeom prst="rect">
+            <a:avLst>
+              <a:gd name="adj" fmla="val 9615"/>
+            </a:avLst>
+          </a:prstGeom>
+          <a:solidFill>
+            <a:srgbClr val="FFFFFF"/>
+          </a:solidFill>
+          <a:ln w="12700">
+            <a:solidFill>
+              <a:srgbClr val="0D9488"/>
+            </a:solidFill>
+            <a:prstDash val="solid"/>
+          </a:ln>
+        </p:spPr>
+      </p:sp>
+      <p:sp>
+        <p:nvSpPr>
+          <p:cNvPr id="36" name="Text 34"/>
+          <p:cNvSpPr/>
+          <p:nvPr/>
+        </p:nvSpPr>
+        <p:spPr>
+          <a:xfrm>
+            <a:off x="5230368" y="3364992"/>
+            <a:ext cx="1554480" cy="475488"/>
+          </a:xfrm>
+          <a:prstGeom prst="rect">
+            <a:avLst/>
+          </a:prstGeom>
+          <a:noFill/>
+          <a:ln/>
+        </p:spPr>
+        <p:txBody>
+          <a:bodyPr wrap="square" lIns="0" tIns="0" rIns="0" bIns="0" rtlCol="0" anchor="ctr"/>
+          <a:lstStyle/>
+          <a:p>
+            <a:pPr algn="ctr" indent="0" marL="0">
+              <a:buNone/>
+            </a:pPr>
+            <a:r>
+              <a:rPr lang="en-US" sz="1400" b="1" dirty="0">
+                <a:solidFill>
+                  <a:srgbClr val="0D9488"/>
+                </a:solidFill>
+                <a:latin typeface="Trebuchet MS" pitchFamily="34" charset="0"/>
+                <a:ea typeface="Trebuchet MS" pitchFamily="34" charset="-122"/>
+                <a:cs typeface="Trebuchet MS" pitchFamily="34" charset="-120"/>
+              </a:rPr>
+              <a:t>ma</a:t>
+            </a:r>
+            <a:endParaRPr lang="en-US" sz="1400" dirty="0"/>
+          </a:p>
+        </p:txBody>
+      </p:sp>
+      <p:sp>
+        <p:nvSpPr>
+          <p:cNvPr id="37" name="Text 35"/>
+          <p:cNvSpPr/>
+          <p:nvPr/>
+        </p:nvSpPr>
+        <p:spPr>
+          <a:xfrm>
+            <a:off x="6784848" y="3364992"/>
+            <a:ext cx="73152" cy="475488"/>
+          </a:xfrm>
+          <a:prstGeom prst="rect">
+            <a:avLst/>
+          </a:prstGeom>
+          <a:noFill/>
+          <a:ln/>
+        </p:spPr>
+        <p:txBody>
+          <a:bodyPr wrap="square" lIns="0" tIns="0" rIns="0" bIns="0" rtlCol="0" anchor="ctr"/>
+          <a:lstStyle/>
+          <a:p>
+            <a:pPr algn="ctr" indent="0" marL="0">
+              <a:buNone/>
+            </a:pPr>
+            <a:r>
+              <a:rPr lang="en-US" sz="1600" b="1" dirty="0">
+                <a:solidFill>
+                  <a:srgbClr val="0D9488"/>
+                </a:solidFill>
+                <a:latin typeface="Trebuchet MS" pitchFamily="34" charset="0"/>
+                <a:ea typeface="Trebuchet MS" pitchFamily="34" charset="-122"/>
+                <a:cs typeface="Trebuchet MS" pitchFamily="34" charset="-120"/>
+              </a:rPr>
+              <a:t>·</a:t>
+            </a:r>
+            <a:endParaRPr lang="en-US" sz="1600" dirty="0"/>
+          </a:p>
+        </p:txBody>
+      </p:sp>
+      <p:sp>
+        <p:nvSpPr>
+          <p:cNvPr id="38" name="Shape 36"/>
+          <p:cNvSpPr/>
+          <p:nvPr/>
+        </p:nvSpPr>
+        <p:spPr>
+          <a:xfrm>
+            <a:off x="6858000" y="3364992"/>
+            <a:ext cx="1554480" cy="475488"/>
+          </a:xfrm>
+          <a:prstGeom prst="rect">
+            <a:avLst>
+              <a:gd name="adj" fmla="val 9615"/>
+            </a:avLst>
+          </a:prstGeom>
+          <a:solidFill>
+            <a:srgbClr val="FFFFFF"/>
+          </a:solidFill>
+          <a:ln w="12700">
+            <a:solidFill>
+              <a:srgbClr val="0D9488"/>
+            </a:solidFill>
+            <a:prstDash val="solid"/>
+          </a:ln>
+        </p:spPr>
+      </p:sp>
+      <p:sp>
+        <p:nvSpPr>
+          <p:cNvPr id="39" name="Text 37"/>
+          <p:cNvSpPr/>
+          <p:nvPr/>
+        </p:nvSpPr>
+        <p:spPr>
+          <a:xfrm>
+            <a:off x="6858000" y="3364992"/>
+            <a:ext cx="1554480" cy="475488"/>
+          </a:xfrm>
+          <a:prstGeom prst="rect">
+            <a:avLst/>
+          </a:prstGeom>
+          <a:noFill/>
+          <a:ln/>
+        </p:spPr>
+        <p:txBody>
+          <a:bodyPr wrap="square" lIns="0" tIns="0" rIns="0" bIns="0" rtlCol="0" anchor="ctr"/>
+          <a:lstStyle/>
+          <a:p>
+            <a:pPr algn="ctr" indent="0" marL="0">
+              <a:buNone/>
+            </a:pPr>
+            <a:r>
+              <a:rPr lang="en-US" sz="1400" b="1" dirty="0">
+                <a:solidFill>
+                  <a:srgbClr val="0D9488"/>
+                </a:solidFill>
+                <a:latin typeface="Trebuchet MS" pitchFamily="34" charset="0"/>
+                <a:ea typeface="Trebuchet MS" pitchFamily="34" charset="-122"/>
+                <a:cs typeface="Trebuchet MS" pitchFamily="34" charset="-120"/>
+              </a:rPr>
+              <a:t>tion</a:t>
+            </a:r>
+            <a:endParaRPr lang="en-US" sz="1400" dirty="0"/>
+          </a:p>
+        </p:txBody>
+      </p:sp>
+      <p:sp>
+        <p:nvSpPr>
+          <p:cNvPr id="40" name="Shape 38"/>
           <p:cNvSpPr/>
           <p:nvPr/>
         </p:nvSpPr>
@@ -21496,7 +22159,7 @@
       </p:sp>
       <p:sp>
         <p:nvSpPr>
-          <p:cNvPr id="31" name="Text 29"/>
+          <p:cNvPr id="41" name="Text 39"/>
           <p:cNvSpPr/>
           <p:nvPr/>
         </p:nvSpPr>
@@ -21535,18 +22198,18 @@
       </p:sp>
       <p:sp>
         <p:nvSpPr>
-          <p:cNvPr id="32" name="Shape 30"/>
+          <p:cNvPr id="42" name="Shape 40"/>
           <p:cNvSpPr/>
           <p:nvPr/>
         </p:nvSpPr>
         <p:spPr>
           <a:xfrm>
             <a:off x="1874520" y="4096512"/>
-            <a:ext cx="6903720" cy="658368"/>
+            <a:ext cx="6903720" cy="804672"/>
           </a:xfrm>
           <a:prstGeom prst="rect">
             <a:avLst>
-              <a:gd name="adj" fmla="val 8333"/>
+              <a:gd name="adj" fmla="val 6818"/>
             </a:avLst>
           </a:prstGeom>
           <a:solidFill>
@@ -21562,18 +22225,18 @@
       </p:sp>
       <p:sp>
         <p:nvSpPr>
-          <p:cNvPr id="33" name="Shape 31"/>
-          <p:cNvSpPr/>
-          <p:nvPr/>
-        </p:nvSpPr>
-        <p:spPr>
-          <a:xfrm>
-            <a:off x="2427732" y="4169664"/>
-            <a:ext cx="685800" cy="475488"/>
+          <p:cNvPr id="43" name="Shape 41"/>
+          <p:cNvSpPr/>
+          <p:nvPr/>
+        </p:nvSpPr>
+        <p:spPr>
+          <a:xfrm>
+            <a:off x="1952596" y="4169664"/>
+            <a:ext cx="493776" cy="384048"/>
           </a:xfrm>
           <a:prstGeom prst="rect">
             <a:avLst>
-              <a:gd name="adj" fmla="val 7692"/>
+              <a:gd name="adj" fmla="val 9524"/>
             </a:avLst>
           </a:prstGeom>
           <a:solidFill>
@@ -21589,14 +22252,14 @@
       </p:sp>
       <p:sp>
         <p:nvSpPr>
-          <p:cNvPr id="34" name="Text 32"/>
-          <p:cNvSpPr/>
-          <p:nvPr/>
-        </p:nvSpPr>
-        <p:spPr>
-          <a:xfrm>
-            <a:off x="2427732" y="4169664"/>
-            <a:ext cx="685800" cy="475488"/>
+          <p:cNvPr id="44" name="Text 42"/>
+          <p:cNvSpPr/>
+          <p:nvPr/>
+        </p:nvSpPr>
+        <p:spPr>
+          <a:xfrm>
+            <a:off x="1952596" y="4169664"/>
+            <a:ext cx="493776" cy="384048"/>
           </a:xfrm>
           <a:prstGeom prst="rect">
             <a:avLst/>
@@ -21620,7 +22283,7 @@
                 <a:ea typeface="Trebuchet MS" pitchFamily="34" charset="-122"/>
                 <a:cs typeface="Trebuchet MS" pitchFamily="34" charset="-120"/>
               </a:rPr>
-              <a:t>r</a:t>
+              <a:t>t</a:t>
             </a:r>
             <a:endParaRPr lang="en-US" sz="900" dirty="0"/>
           </a:p>
@@ -21628,18 +22291,18 @@
       </p:sp>
       <p:sp>
         <p:nvSpPr>
-          <p:cNvPr id="35" name="Shape 33"/>
-          <p:cNvSpPr/>
-          <p:nvPr/>
-        </p:nvSpPr>
-        <p:spPr>
-          <a:xfrm>
-            <a:off x="3639312" y="4169664"/>
-            <a:ext cx="685800" cy="475488"/>
+          <p:cNvPr id="45" name="Shape 43"/>
+          <p:cNvSpPr/>
+          <p:nvPr/>
+        </p:nvSpPr>
+        <p:spPr>
+          <a:xfrm>
+            <a:off x="2497015" y="4169664"/>
+            <a:ext cx="493776" cy="384048"/>
           </a:xfrm>
           <a:prstGeom prst="rect">
             <a:avLst>
-              <a:gd name="adj" fmla="val 7692"/>
+              <a:gd name="adj" fmla="val 9524"/>
             </a:avLst>
           </a:prstGeom>
           <a:solidFill>
@@ -21655,14 +22318,14 @@
       </p:sp>
       <p:sp>
         <p:nvSpPr>
-          <p:cNvPr id="36" name="Text 34"/>
-          <p:cNvSpPr/>
-          <p:nvPr/>
-        </p:nvSpPr>
-        <p:spPr>
-          <a:xfrm>
-            <a:off x="3639312" y="4169664"/>
-            <a:ext cx="685800" cy="475488"/>
+          <p:cNvPr id="46" name="Text 44"/>
+          <p:cNvSpPr/>
+          <p:nvPr/>
+        </p:nvSpPr>
+        <p:spPr>
+          <a:xfrm>
+            <a:off x="2497015" y="4169664"/>
+            <a:ext cx="493776" cy="384048"/>
           </a:xfrm>
           <a:prstGeom prst="rect">
             <a:avLst/>
@@ -21686,7 +22349,7 @@
                 <a:ea typeface="Trebuchet MS" pitchFamily="34" charset="-122"/>
                 <a:cs typeface="Trebuchet MS" pitchFamily="34" charset="-120"/>
               </a:rPr>
-              <a:t>e</a:t>
+              <a:t>r</a:t>
             </a:r>
             <a:endParaRPr lang="en-US" sz="900" dirty="0"/>
           </a:p>
@@ -21694,18 +22357,18 @@
       </p:sp>
       <p:sp>
         <p:nvSpPr>
-          <p:cNvPr id="37" name="Shape 35"/>
-          <p:cNvSpPr/>
-          <p:nvPr/>
-        </p:nvSpPr>
-        <p:spPr>
-          <a:xfrm>
-            <a:off x="4850892" y="4169664"/>
-            <a:ext cx="685800" cy="475488"/>
+          <p:cNvPr id="47" name="Shape 45"/>
+          <p:cNvSpPr/>
+          <p:nvPr/>
+        </p:nvSpPr>
+        <p:spPr>
+          <a:xfrm>
+            <a:off x="3041435" y="4169664"/>
+            <a:ext cx="493776" cy="384048"/>
           </a:xfrm>
           <a:prstGeom prst="rect">
             <a:avLst>
-              <a:gd name="adj" fmla="val 7692"/>
+              <a:gd name="adj" fmla="val 9524"/>
             </a:avLst>
           </a:prstGeom>
           <a:solidFill>
@@ -21721,14 +22384,14 @@
       </p:sp>
       <p:sp>
         <p:nvSpPr>
-          <p:cNvPr id="38" name="Text 36"/>
-          <p:cNvSpPr/>
-          <p:nvPr/>
-        </p:nvSpPr>
-        <p:spPr>
-          <a:xfrm>
-            <a:off x="4850892" y="4169664"/>
-            <a:ext cx="685800" cy="475488"/>
+          <p:cNvPr id="48" name="Text 46"/>
+          <p:cNvSpPr/>
+          <p:nvPr/>
+        </p:nvSpPr>
+        <p:spPr>
+          <a:xfrm>
+            <a:off x="3041435" y="4169664"/>
+            <a:ext cx="493776" cy="384048"/>
           </a:xfrm>
           <a:prstGeom prst="rect">
             <a:avLst/>
@@ -21752,7 +22415,7 @@
                 <a:ea typeface="Trebuchet MS" pitchFamily="34" charset="-122"/>
                 <a:cs typeface="Trebuchet MS" pitchFamily="34" charset="-120"/>
               </a:rPr>
-              <a:t>f</a:t>
+              <a:t>a</a:t>
             </a:r>
             <a:endParaRPr lang="en-US" sz="900" dirty="0"/>
           </a:p>
@@ -21760,18 +22423,18 @@
       </p:sp>
       <p:sp>
         <p:nvSpPr>
-          <p:cNvPr id="39" name="Shape 37"/>
-          <p:cNvSpPr/>
-          <p:nvPr/>
-        </p:nvSpPr>
-        <p:spPr>
-          <a:xfrm>
-            <a:off x="6062472" y="4169664"/>
-            <a:ext cx="685800" cy="475488"/>
+          <p:cNvPr id="49" name="Shape 47"/>
+          <p:cNvSpPr/>
+          <p:nvPr/>
+        </p:nvSpPr>
+        <p:spPr>
+          <a:xfrm>
+            <a:off x="3585855" y="4169664"/>
+            <a:ext cx="493776" cy="384048"/>
           </a:xfrm>
           <a:prstGeom prst="rect">
             <a:avLst>
-              <a:gd name="adj" fmla="val 7692"/>
+              <a:gd name="adj" fmla="val 9524"/>
             </a:avLst>
           </a:prstGeom>
           <a:solidFill>
@@ -21787,14 +22450,14 @@
       </p:sp>
       <p:sp>
         <p:nvSpPr>
-          <p:cNvPr id="40" name="Text 38"/>
-          <p:cNvSpPr/>
-          <p:nvPr/>
-        </p:nvSpPr>
-        <p:spPr>
-          <a:xfrm>
-            <a:off x="6062472" y="4169664"/>
-            <a:ext cx="685800" cy="475488"/>
+          <p:cNvPr id="50" name="Text 48"/>
+          <p:cNvSpPr/>
+          <p:nvPr/>
+        </p:nvSpPr>
+        <p:spPr>
+          <a:xfrm>
+            <a:off x="3585855" y="4169664"/>
+            <a:ext cx="493776" cy="384048"/>
           </a:xfrm>
           <a:prstGeom prst="rect">
             <a:avLst/>
@@ -21818,7 +22481,7 @@
                 <a:ea typeface="Trebuchet MS" pitchFamily="34" charset="-122"/>
                 <a:cs typeface="Trebuchet MS" pitchFamily="34" charset="-120"/>
               </a:rPr>
-              <a:t>or</a:t>
+              <a:t>n</a:t>
             </a:r>
             <a:endParaRPr lang="en-US" sz="900" dirty="0"/>
           </a:p>
@@ -21826,18 +22489,18 @@
       </p:sp>
       <p:sp>
         <p:nvSpPr>
-          <p:cNvPr id="41" name="Shape 39"/>
-          <p:cNvSpPr/>
-          <p:nvPr/>
-        </p:nvSpPr>
-        <p:spPr>
-          <a:xfrm>
-            <a:off x="7274052" y="4169664"/>
-            <a:ext cx="685800" cy="475488"/>
+          <p:cNvPr id="51" name="Shape 49"/>
+          <p:cNvSpPr/>
+          <p:nvPr/>
+        </p:nvSpPr>
+        <p:spPr>
+          <a:xfrm>
+            <a:off x="4130274" y="4169664"/>
+            <a:ext cx="493776" cy="384048"/>
           </a:xfrm>
           <a:prstGeom prst="rect">
             <a:avLst>
-              <a:gd name="adj" fmla="val 7692"/>
+              <a:gd name="adj" fmla="val 9524"/>
             </a:avLst>
           </a:prstGeom>
           <a:solidFill>
@@ -21853,14 +22516,14 @@
       </p:sp>
       <p:sp>
         <p:nvSpPr>
-          <p:cNvPr id="42" name="Text 40"/>
-          <p:cNvSpPr/>
-          <p:nvPr/>
-        </p:nvSpPr>
-        <p:spPr>
-          <a:xfrm>
-            <a:off x="7274052" y="4169664"/>
-            <a:ext cx="685800" cy="475488"/>
+          <p:cNvPr id="52" name="Text 50"/>
+          <p:cNvSpPr/>
+          <p:nvPr/>
+        </p:nvSpPr>
+        <p:spPr>
+          <a:xfrm>
+            <a:off x="4130274" y="4169664"/>
+            <a:ext cx="493776" cy="384048"/>
           </a:xfrm>
           <a:prstGeom prst="rect">
             <a:avLst/>
@@ -21884,7 +22547,508 @@
                 <a:ea typeface="Trebuchet MS" pitchFamily="34" charset="-122"/>
                 <a:cs typeface="Trebuchet MS" pitchFamily="34" charset="-120"/>
               </a:rPr>
+              <a:t>s</a:t>
+            </a:r>
+            <a:endParaRPr lang="en-US" sz="900" dirty="0"/>
+          </a:p>
+        </p:txBody>
+      </p:sp>
+      <p:sp>
+        <p:nvSpPr>
+          <p:cNvPr id="53" name="Shape 51"/>
+          <p:cNvSpPr/>
+          <p:nvPr/>
+        </p:nvSpPr>
+        <p:spPr>
+          <a:xfrm>
+            <a:off x="4674694" y="4169664"/>
+            <a:ext cx="493776" cy="384048"/>
+          </a:xfrm>
+          <a:prstGeom prst="rect">
+            <a:avLst>
+              <a:gd name="adj" fmla="val 9524"/>
+            </a:avLst>
+          </a:prstGeom>
+          <a:solidFill>
+            <a:srgbClr val="FFFFFF"/>
+          </a:solidFill>
+          <a:ln w="12700">
+            <a:solidFill>
+              <a:srgbClr val="DB2777"/>
+            </a:solidFill>
+            <a:prstDash val="solid"/>
+          </a:ln>
+        </p:spPr>
+      </p:sp>
+      <p:sp>
+        <p:nvSpPr>
+          <p:cNvPr id="54" name="Text 52"/>
+          <p:cNvSpPr/>
+          <p:nvPr/>
+        </p:nvSpPr>
+        <p:spPr>
+          <a:xfrm>
+            <a:off x="4674694" y="4169664"/>
+            <a:ext cx="493776" cy="384048"/>
+          </a:xfrm>
+          <a:prstGeom prst="rect">
+            <a:avLst/>
+          </a:prstGeom>
+          <a:noFill/>
+          <a:ln/>
+        </p:spPr>
+        <p:txBody>
+          <a:bodyPr wrap="square" lIns="0" tIns="0" rIns="0" bIns="0" rtlCol="0" anchor="ctr"/>
+          <a:lstStyle/>
+          <a:p>
+            <a:pPr algn="ctr" indent="0" marL="0">
+              <a:buNone/>
+            </a:pPr>
+            <a:r>
+              <a:rPr lang="en-US" sz="900" b="1" dirty="0">
+                <a:solidFill>
+                  <a:srgbClr val="9D174D"/>
+                </a:solidFill>
+                <a:latin typeface="Trebuchet MS" pitchFamily="34" charset="0"/>
+                <a:ea typeface="Trebuchet MS" pitchFamily="34" charset="-122"/>
+                <a:cs typeface="Trebuchet MS" pitchFamily="34" charset="-120"/>
+              </a:rPr>
+              <a:t>f</a:t>
+            </a:r>
+            <a:endParaRPr lang="en-US" sz="900" dirty="0"/>
+          </a:p>
+        </p:txBody>
+      </p:sp>
+      <p:sp>
+        <p:nvSpPr>
+          <p:cNvPr id="55" name="Shape 53"/>
+          <p:cNvSpPr/>
+          <p:nvPr/>
+        </p:nvSpPr>
+        <p:spPr>
+          <a:xfrm>
+            <a:off x="5219114" y="4169664"/>
+            <a:ext cx="493776" cy="384048"/>
+          </a:xfrm>
+          <a:prstGeom prst="rect">
+            <a:avLst>
+              <a:gd name="adj" fmla="val 9524"/>
+            </a:avLst>
+          </a:prstGeom>
+          <a:solidFill>
+            <a:srgbClr val="FFFFFF"/>
+          </a:solidFill>
+          <a:ln w="12700">
+            <a:solidFill>
+              <a:srgbClr val="DB2777"/>
+            </a:solidFill>
+            <a:prstDash val="solid"/>
+          </a:ln>
+        </p:spPr>
+      </p:sp>
+      <p:sp>
+        <p:nvSpPr>
+          <p:cNvPr id="56" name="Text 54"/>
+          <p:cNvSpPr/>
+          <p:nvPr/>
+        </p:nvSpPr>
+        <p:spPr>
+          <a:xfrm>
+            <a:off x="5219114" y="4169664"/>
+            <a:ext cx="493776" cy="384048"/>
+          </a:xfrm>
+          <a:prstGeom prst="rect">
+            <a:avLst/>
+          </a:prstGeom>
+          <a:noFill/>
+          <a:ln/>
+        </p:spPr>
+        <p:txBody>
+          <a:bodyPr wrap="square" lIns="0" tIns="0" rIns="0" bIns="0" rtlCol="0" anchor="ctr"/>
+          <a:lstStyle/>
+          <a:p>
+            <a:pPr algn="ctr" indent="0" marL="0">
+              <a:buNone/>
+            </a:pPr>
+            <a:r>
+              <a:rPr lang="en-US" sz="900" b="1" dirty="0">
+                <a:solidFill>
+                  <a:srgbClr val="9D174D"/>
+                </a:solidFill>
+                <a:latin typeface="Trebuchet MS" pitchFamily="34" charset="0"/>
+                <a:ea typeface="Trebuchet MS" pitchFamily="34" charset="-122"/>
+                <a:cs typeface="Trebuchet MS" pitchFamily="34" charset="-120"/>
+              </a:rPr>
+              <a:t>or</a:t>
+            </a:r>
+            <a:endParaRPr lang="en-US" sz="900" dirty="0"/>
+          </a:p>
+        </p:txBody>
+      </p:sp>
+      <p:sp>
+        <p:nvSpPr>
+          <p:cNvPr id="57" name="Shape 55"/>
+          <p:cNvSpPr/>
+          <p:nvPr/>
+        </p:nvSpPr>
+        <p:spPr>
+          <a:xfrm>
+            <a:off x="5763534" y="4169664"/>
+            <a:ext cx="493776" cy="384048"/>
+          </a:xfrm>
+          <a:prstGeom prst="rect">
+            <a:avLst>
+              <a:gd name="adj" fmla="val 9524"/>
+            </a:avLst>
+          </a:prstGeom>
+          <a:solidFill>
+            <a:srgbClr val="FFFFFF"/>
+          </a:solidFill>
+          <a:ln w="12700">
+            <a:solidFill>
+              <a:srgbClr val="DB2777"/>
+            </a:solidFill>
+            <a:prstDash val="solid"/>
+          </a:ln>
+        </p:spPr>
+      </p:sp>
+      <p:sp>
+        <p:nvSpPr>
+          <p:cNvPr id="58" name="Text 56"/>
+          <p:cNvSpPr/>
+          <p:nvPr/>
+        </p:nvSpPr>
+        <p:spPr>
+          <a:xfrm>
+            <a:off x="5763534" y="4169664"/>
+            <a:ext cx="493776" cy="384048"/>
+          </a:xfrm>
+          <a:prstGeom prst="rect">
+            <a:avLst/>
+          </a:prstGeom>
+          <a:noFill/>
+          <a:ln/>
+        </p:spPr>
+        <p:txBody>
+          <a:bodyPr wrap="square" lIns="0" tIns="0" rIns="0" bIns="0" rtlCol="0" anchor="ctr"/>
+          <a:lstStyle/>
+          <a:p>
+            <a:pPr algn="ctr" indent="0" marL="0">
+              <a:buNone/>
+            </a:pPr>
+            <a:r>
+              <a:rPr lang="en-US" sz="900" b="1" dirty="0">
+                <a:solidFill>
+                  <a:srgbClr val="9D174D"/>
+                </a:solidFill>
+                <a:latin typeface="Trebuchet MS" pitchFamily="34" charset="0"/>
+                <a:ea typeface="Trebuchet MS" pitchFamily="34" charset="-122"/>
+                <a:cs typeface="Trebuchet MS" pitchFamily="34" charset="-120"/>
+              </a:rPr>
               <a:t>m</a:t>
+            </a:r>
+            <a:endParaRPr lang="en-US" sz="900" dirty="0"/>
+          </a:p>
+        </p:txBody>
+      </p:sp>
+      <p:sp>
+        <p:nvSpPr>
+          <p:cNvPr id="59" name="Shape 57"/>
+          <p:cNvSpPr/>
+          <p:nvPr/>
+        </p:nvSpPr>
+        <p:spPr>
+          <a:xfrm>
+            <a:off x="6307953" y="4169664"/>
+            <a:ext cx="493776" cy="384048"/>
+          </a:xfrm>
+          <a:prstGeom prst="rect">
+            <a:avLst>
+              <a:gd name="adj" fmla="val 9524"/>
+            </a:avLst>
+          </a:prstGeom>
+          <a:solidFill>
+            <a:srgbClr val="FFFFFF"/>
+          </a:solidFill>
+          <a:ln w="12700">
+            <a:solidFill>
+              <a:srgbClr val="DB2777"/>
+            </a:solidFill>
+            <a:prstDash val="solid"/>
+          </a:ln>
+        </p:spPr>
+      </p:sp>
+      <p:sp>
+        <p:nvSpPr>
+          <p:cNvPr id="60" name="Text 58"/>
+          <p:cNvSpPr/>
+          <p:nvPr/>
+        </p:nvSpPr>
+        <p:spPr>
+          <a:xfrm>
+            <a:off x="6307953" y="4169664"/>
+            <a:ext cx="493776" cy="384048"/>
+          </a:xfrm>
+          <a:prstGeom prst="rect">
+            <a:avLst/>
+          </a:prstGeom>
+          <a:noFill/>
+          <a:ln/>
+        </p:spPr>
+        <p:txBody>
+          <a:bodyPr wrap="square" lIns="0" tIns="0" rIns="0" bIns="0" rtlCol="0" anchor="ctr"/>
+          <a:lstStyle/>
+          <a:p>
+            <a:pPr algn="ctr" indent="0" marL="0">
+              <a:buNone/>
+            </a:pPr>
+            <a:r>
+              <a:rPr lang="en-US" sz="900" b="1" dirty="0">
+                <a:solidFill>
+                  <a:srgbClr val="9D174D"/>
+                </a:solidFill>
+                <a:latin typeface="Trebuchet MS" pitchFamily="34" charset="0"/>
+                <a:ea typeface="Trebuchet MS" pitchFamily="34" charset="-122"/>
+                <a:cs typeface="Trebuchet MS" pitchFamily="34" charset="-120"/>
+              </a:rPr>
+              <a:t>a</a:t>
+            </a:r>
+            <a:endParaRPr lang="en-US" sz="900" dirty="0"/>
+          </a:p>
+        </p:txBody>
+      </p:sp>
+      <p:sp>
+        <p:nvSpPr>
+          <p:cNvPr id="61" name="Shape 59"/>
+          <p:cNvSpPr/>
+          <p:nvPr/>
+        </p:nvSpPr>
+        <p:spPr>
+          <a:xfrm>
+            <a:off x="6852373" y="4169664"/>
+            <a:ext cx="493776" cy="384048"/>
+          </a:xfrm>
+          <a:prstGeom prst="rect">
+            <a:avLst>
+              <a:gd name="adj" fmla="val 9524"/>
+            </a:avLst>
+          </a:prstGeom>
+          <a:solidFill>
+            <a:srgbClr val="FFFFFF"/>
+          </a:solidFill>
+          <a:ln w="12700">
+            <a:solidFill>
+              <a:srgbClr val="DB2777"/>
+            </a:solidFill>
+            <a:prstDash val="solid"/>
+          </a:ln>
+        </p:spPr>
+      </p:sp>
+      <p:sp>
+        <p:nvSpPr>
+          <p:cNvPr id="62" name="Text 60"/>
+          <p:cNvSpPr/>
+          <p:nvPr/>
+        </p:nvSpPr>
+        <p:spPr>
+          <a:xfrm>
+            <a:off x="6852373" y="4169664"/>
+            <a:ext cx="493776" cy="384048"/>
+          </a:xfrm>
+          <a:prstGeom prst="rect">
+            <a:avLst/>
+          </a:prstGeom>
+          <a:noFill/>
+          <a:ln/>
+        </p:spPr>
+        <p:txBody>
+          <a:bodyPr wrap="square" lIns="0" tIns="0" rIns="0" bIns="0" rtlCol="0" anchor="ctr"/>
+          <a:lstStyle/>
+          <a:p>
+            <a:pPr algn="ctr" indent="0" marL="0">
+              <a:buNone/>
+            </a:pPr>
+            <a:r>
+              <a:rPr lang="en-US" sz="900" b="1" dirty="0">
+                <a:solidFill>
+                  <a:srgbClr val="9D174D"/>
+                </a:solidFill>
+                <a:latin typeface="Trebuchet MS" pitchFamily="34" charset="0"/>
+                <a:ea typeface="Trebuchet MS" pitchFamily="34" charset="-122"/>
+                <a:cs typeface="Trebuchet MS" pitchFamily="34" charset="-120"/>
+              </a:rPr>
+              <a:t>ti</a:t>
+            </a:r>
+            <a:endParaRPr lang="en-US" sz="900" dirty="0"/>
+          </a:p>
+        </p:txBody>
+      </p:sp>
+      <p:sp>
+        <p:nvSpPr>
+          <p:cNvPr id="63" name="Text 61"/>
+          <p:cNvSpPr/>
+          <p:nvPr/>
+        </p:nvSpPr>
+        <p:spPr>
+          <a:xfrm>
+            <a:off x="6852373" y="4572000"/>
+            <a:ext cx="493776" cy="219456"/>
+          </a:xfrm>
+          <a:prstGeom prst="rect">
+            <a:avLst/>
+          </a:prstGeom>
+          <a:noFill/>
+          <a:ln/>
+        </p:spPr>
+        <p:txBody>
+          <a:bodyPr wrap="square" lIns="0" tIns="0" rIns="0" bIns="0" rtlCol="0" anchor="t"/>
+          <a:lstStyle/>
+          <a:p>
+            <a:pPr algn="ctr" indent="0" marL="0">
+              <a:buNone/>
+            </a:pPr>
+            <a:r>
+              <a:rPr lang="en-US" sz="750" i="1" dirty="0">
+                <a:solidFill>
+                  <a:srgbClr val="94A3B8"/>
+                </a:solidFill>
+                <a:latin typeface="Calibri" pitchFamily="34" charset="0"/>
+                <a:ea typeface="Calibri" pitchFamily="34" charset="-122"/>
+                <a:cs typeface="Calibri" pitchFamily="34" charset="-120"/>
+              </a:rPr>
+              <a:t>/sh/</a:t>
+            </a:r>
+            <a:endParaRPr lang="en-US" sz="750" dirty="0"/>
+          </a:p>
+        </p:txBody>
+      </p:sp>
+      <p:sp>
+        <p:nvSpPr>
+          <p:cNvPr id="64" name="Shape 62"/>
+          <p:cNvSpPr/>
+          <p:nvPr/>
+        </p:nvSpPr>
+        <p:spPr>
+          <a:xfrm>
+            <a:off x="7396793" y="4169664"/>
+            <a:ext cx="493776" cy="384048"/>
+          </a:xfrm>
+          <a:prstGeom prst="rect">
+            <a:avLst>
+              <a:gd name="adj" fmla="val 9524"/>
+            </a:avLst>
+          </a:prstGeom>
+          <a:solidFill>
+            <a:srgbClr val="FFFFFF"/>
+          </a:solidFill>
+          <a:ln w="12700">
+            <a:solidFill>
+              <a:srgbClr val="DB2777"/>
+            </a:solidFill>
+            <a:prstDash val="solid"/>
+          </a:ln>
+        </p:spPr>
+      </p:sp>
+      <p:sp>
+        <p:nvSpPr>
+          <p:cNvPr id="65" name="Text 63"/>
+          <p:cNvSpPr/>
+          <p:nvPr/>
+        </p:nvSpPr>
+        <p:spPr>
+          <a:xfrm>
+            <a:off x="7396793" y="4169664"/>
+            <a:ext cx="493776" cy="384048"/>
+          </a:xfrm>
+          <a:prstGeom prst="rect">
+            <a:avLst/>
+          </a:prstGeom>
+          <a:noFill/>
+          <a:ln/>
+        </p:spPr>
+        <p:txBody>
+          <a:bodyPr wrap="square" lIns="0" tIns="0" rIns="0" bIns="0" rtlCol="0" anchor="ctr"/>
+          <a:lstStyle/>
+          <a:p>
+            <a:pPr algn="ctr" indent="0" marL="0">
+              <a:buNone/>
+            </a:pPr>
+            <a:r>
+              <a:rPr lang="en-US" sz="900" b="1" dirty="0">
+                <a:solidFill>
+                  <a:srgbClr val="9D174D"/>
+                </a:solidFill>
+                <a:latin typeface="Trebuchet MS" pitchFamily="34" charset="0"/>
+                <a:ea typeface="Trebuchet MS" pitchFamily="34" charset="-122"/>
+                <a:cs typeface="Trebuchet MS" pitchFamily="34" charset="-120"/>
+              </a:rPr>
+              <a:t>o</a:t>
+            </a:r>
+            <a:endParaRPr lang="en-US" sz="900" dirty="0"/>
+          </a:p>
+        </p:txBody>
+      </p:sp>
+      <p:sp>
+        <p:nvSpPr>
+          <p:cNvPr id="66" name="Shape 64"/>
+          <p:cNvSpPr/>
+          <p:nvPr/>
+        </p:nvSpPr>
+        <p:spPr>
+          <a:xfrm>
+            <a:off x="7941212" y="4169664"/>
+            <a:ext cx="493776" cy="384048"/>
+          </a:xfrm>
+          <a:prstGeom prst="rect">
+            <a:avLst>
+              <a:gd name="adj" fmla="val 9524"/>
+            </a:avLst>
+          </a:prstGeom>
+          <a:solidFill>
+            <a:srgbClr val="FFFFFF"/>
+          </a:solidFill>
+          <a:ln w="12700">
+            <a:solidFill>
+              <a:srgbClr val="DB2777"/>
+            </a:solidFill>
+            <a:prstDash val="solid"/>
+          </a:ln>
+        </p:spPr>
+      </p:sp>
+      <p:sp>
+        <p:nvSpPr>
+          <p:cNvPr id="67" name="Text 65"/>
+          <p:cNvSpPr/>
+          <p:nvPr/>
+        </p:nvSpPr>
+        <p:spPr>
+          <a:xfrm>
+            <a:off x="7941212" y="4169664"/>
+            <a:ext cx="493776" cy="384048"/>
+          </a:xfrm>
+          <a:prstGeom prst="rect">
+            <a:avLst/>
+          </a:prstGeom>
+          <a:noFill/>
+          <a:ln/>
+        </p:spPr>
+        <p:txBody>
+          <a:bodyPr wrap="square" lIns="0" tIns="0" rIns="0" bIns="0" rtlCol="0" anchor="ctr"/>
+          <a:lstStyle/>
+          <a:p>
+            <a:pPr algn="ctr" indent="0" marL="0">
+              <a:buNone/>
+            </a:pPr>
+            <a:r>
+              <a:rPr lang="en-US" sz="900" b="1" dirty="0">
+                <a:solidFill>
+                  <a:srgbClr val="9D174D"/>
+                </a:solidFill>
+                <a:latin typeface="Trebuchet MS" pitchFamily="34" charset="0"/>
+                <a:ea typeface="Trebuchet MS" pitchFamily="34" charset="-122"/>
+                <a:cs typeface="Trebuchet MS" pitchFamily="34" charset="-120"/>
+              </a:rPr>
+              <a:t>n</a:t>
             </a:r>
             <a:endParaRPr lang="en-US" sz="900" dirty="0"/>
           </a:p>
@@ -22315,7 +23479,7 @@
                 <a:ea typeface="Trebuchet MS" pitchFamily="34" charset="-122"/>
                 <a:cs typeface="Trebuchet MS" pitchFamily="34" charset="-120"/>
               </a:rPr>
-              <a:t>perform</a:t>
+              <a:t>formal</a:t>
             </a:r>
             <a:endParaRPr lang="en-US" sz="2800" dirty="0"/>
           </a:p>
@@ -23142,7 +24306,7 @@
                 <a:ea typeface="Trebuchet MS" pitchFamily="34" charset="-122"/>
                 <a:cs typeface="Trebuchet MS" pitchFamily="34" charset="-120"/>
               </a:rPr>
-              <a:t>perform</a:t>
+              <a:t>formal</a:t>
             </a:r>
             <a:endParaRPr lang="en-US" sz="2800" dirty="0"/>
           </a:p>
@@ -23231,11 +24395,11 @@
             </a:avLst>
           </a:prstGeom>
           <a:solidFill>
-            <a:srgbClr val="DDD6FE"/>
+            <a:srgbClr val="CCFBF1"/>
           </a:solidFill>
           <a:ln w="19050">
             <a:solidFill>
-              <a:srgbClr val="7C3AED"/>
+              <a:srgbClr val="0D9488"/>
             </a:solidFill>
             <a:prstDash val="solid"/>
           </a:ln>
@@ -23275,13 +24439,13 @@
             <a:r>
               <a:rPr lang="en-US" sz="1300" b="1" dirty="0">
                 <a:solidFill>
-                  <a:srgbClr val="4C1D95"/>
+                  <a:srgbClr val="0F766E"/>
                 </a:solidFill>
                 <a:latin typeface="Trebuchet MS" pitchFamily="34" charset="0"/>
                 <a:ea typeface="Trebuchet MS" pitchFamily="34" charset="-122"/>
                 <a:cs typeface="Trebuchet MS" pitchFamily="34" charset="-120"/>
               </a:rPr>
-              <a:t>per</a:t>
+              <a:t>form</a:t>
             </a:r>
             <a:endParaRPr lang="en-US" sz="1300" dirty="0"/>
           </a:p>
@@ -23320,7 +24484,7 @@
                 <a:ea typeface="Calibri" pitchFamily="34" charset="-122"/>
                 <a:cs typeface="Calibri" pitchFamily="34" charset="-120"/>
               </a:rPr>
-              <a:t>through or completely</a:t>
+              <a:t>shape, arrange</a:t>
             </a:r>
             <a:endParaRPr lang="en-US" sz="850" dirty="0"/>
           </a:p>
@@ -23343,11 +24507,11 @@
             </a:avLst>
           </a:prstGeom>
           <a:solidFill>
-            <a:srgbClr val="CCFBF1"/>
+            <a:srgbClr val="FCE7F3"/>
           </a:solidFill>
           <a:ln w="19050">
             <a:solidFill>
-              <a:srgbClr val="0D9488"/>
+              <a:srgbClr val="DB2777"/>
             </a:solidFill>
             <a:prstDash val="solid"/>
           </a:ln>
@@ -23387,13 +24551,13 @@
             <a:r>
               <a:rPr lang="en-US" sz="1300" b="1" dirty="0">
                 <a:solidFill>
-                  <a:srgbClr val="0F766E"/>
+                  <a:srgbClr val="9D174D"/>
                 </a:solidFill>
                 <a:latin typeface="Trebuchet MS" pitchFamily="34" charset="0"/>
                 <a:ea typeface="Trebuchet MS" pitchFamily="34" charset="-122"/>
                 <a:cs typeface="Trebuchet MS" pitchFamily="34" charset="-120"/>
               </a:rPr>
-              <a:t>form</a:t>
+              <a:t>al</a:t>
             </a:r>
             <a:endParaRPr lang="en-US" sz="1300" dirty="0"/>
           </a:p>
@@ -23432,7 +24596,7 @@
                 <a:ea typeface="Calibri" pitchFamily="34" charset="-122"/>
                 <a:cs typeface="Calibri" pitchFamily="34" charset="-120"/>
               </a:rPr>
-              <a:t>shape or structure</a:t>
+              <a:t>relating to, having the quality of</a:t>
             </a:r>
             <a:endParaRPr lang="en-US" sz="850" dirty="0"/>
           </a:p>
@@ -24846,7 +26010,7 @@
                 <a:ea typeface="Trebuchet MS" pitchFamily="34" charset="-122"/>
                 <a:cs typeface="Trebuchet MS" pitchFamily="34" charset="-120"/>
               </a:rPr>
-              <a:t>perform</a:t>
+              <a:t>formal</a:t>
             </a:r>
             <a:endParaRPr lang="en-US" sz="2800" dirty="0"/>
           </a:p>
@@ -24935,11 +26099,11 @@
             </a:avLst>
           </a:prstGeom>
           <a:solidFill>
-            <a:srgbClr val="DDD6FE"/>
+            <a:srgbClr val="CCFBF1"/>
           </a:solidFill>
           <a:ln w="19050">
             <a:solidFill>
-              <a:srgbClr val="7C3AED"/>
+              <a:srgbClr val="0D9488"/>
             </a:solidFill>
             <a:prstDash val="solid"/>
           </a:ln>
@@ -24979,13 +26143,13 @@
             <a:r>
               <a:rPr lang="en-US" sz="1300" b="1" dirty="0">
                 <a:solidFill>
-                  <a:srgbClr val="4C1D95"/>
+                  <a:srgbClr val="0F766E"/>
                 </a:solidFill>
                 <a:latin typeface="Trebuchet MS" pitchFamily="34" charset="0"/>
                 <a:ea typeface="Trebuchet MS" pitchFamily="34" charset="-122"/>
                 <a:cs typeface="Trebuchet MS" pitchFamily="34" charset="-120"/>
               </a:rPr>
-              <a:t>per</a:t>
+              <a:t>form</a:t>
             </a:r>
             <a:endParaRPr lang="en-US" sz="1300" dirty="0"/>
           </a:p>
@@ -25024,7 +26188,7 @@
                 <a:ea typeface="Calibri" pitchFamily="34" charset="-122"/>
                 <a:cs typeface="Calibri" pitchFamily="34" charset="-120"/>
               </a:rPr>
-              <a:t>through or completely</a:t>
+              <a:t>shape, arrange</a:t>
             </a:r>
             <a:endParaRPr lang="en-US" sz="850" dirty="0"/>
           </a:p>
@@ -25047,11 +26211,11 @@
             </a:avLst>
           </a:prstGeom>
           <a:solidFill>
-            <a:srgbClr val="CCFBF1"/>
+            <a:srgbClr val="FCE7F3"/>
           </a:solidFill>
           <a:ln w="19050">
             <a:solidFill>
-              <a:srgbClr val="0D9488"/>
+              <a:srgbClr val="DB2777"/>
             </a:solidFill>
             <a:prstDash val="solid"/>
           </a:ln>
@@ -25091,13 +26255,13 @@
             <a:r>
               <a:rPr lang="en-US" sz="1300" b="1" dirty="0">
                 <a:solidFill>
-                  <a:srgbClr val="0F766E"/>
+                  <a:srgbClr val="9D174D"/>
                 </a:solidFill>
                 <a:latin typeface="Trebuchet MS" pitchFamily="34" charset="0"/>
                 <a:ea typeface="Trebuchet MS" pitchFamily="34" charset="-122"/>
                 <a:cs typeface="Trebuchet MS" pitchFamily="34" charset="-120"/>
               </a:rPr>
-              <a:t>form</a:t>
+              <a:t>al</a:t>
             </a:r>
             <a:endParaRPr lang="en-US" sz="1300" dirty="0"/>
           </a:p>
@@ -25136,7 +26300,7 @@
                 <a:ea typeface="Calibri" pitchFamily="34" charset="-122"/>
                 <a:cs typeface="Calibri" pitchFamily="34" charset="-120"/>
               </a:rPr>
-              <a:t>shape or structure</a:t>
+              <a:t>relating to, having the quality of</a:t>
             </a:r>
             <a:endParaRPr lang="en-US" sz="850" dirty="0"/>
           </a:p>
@@ -25295,7 +26459,7 @@
                 <a:ea typeface="Trebuchet MS" pitchFamily="34" charset="-122"/>
                 <a:cs typeface="Trebuchet MS" pitchFamily="34" charset="-120"/>
               </a:rPr>
-              <a:t>per</a:t>
+              <a:t>for</a:t>
             </a:r>
             <a:endParaRPr lang="en-US" sz="1400" dirty="0"/>
           </a:p>
@@ -25400,7 +26564,7 @@
                 <a:ea typeface="Trebuchet MS" pitchFamily="34" charset="-122"/>
                 <a:cs typeface="Trebuchet MS" pitchFamily="34" charset="-120"/>
               </a:rPr>
-              <a:t>form</a:t>
+              <a:t>mal</a:t>
             </a:r>
             <a:endParaRPr lang="en-US" sz="1400" dirty="0"/>
           </a:p>
@@ -25963,7 +27127,7 @@
                 <a:ea typeface="Trebuchet MS" pitchFamily="34" charset="-122"/>
                 <a:cs typeface="Trebuchet MS" pitchFamily="34" charset="-120"/>
               </a:rPr>
-              <a:t>perform</a:t>
+              <a:t>formal</a:t>
             </a:r>
             <a:endParaRPr lang="en-US" sz="2800" dirty="0"/>
           </a:p>
@@ -26052,11 +27216,11 @@
             </a:avLst>
           </a:prstGeom>
           <a:solidFill>
-            <a:srgbClr val="DDD6FE"/>
+            <a:srgbClr val="CCFBF1"/>
           </a:solidFill>
           <a:ln w="19050">
             <a:solidFill>
-              <a:srgbClr val="7C3AED"/>
+              <a:srgbClr val="0D9488"/>
             </a:solidFill>
             <a:prstDash val="solid"/>
           </a:ln>
@@ -26096,13 +27260,13 @@
             <a:r>
               <a:rPr lang="en-US" sz="1300" b="1" dirty="0">
                 <a:solidFill>
-                  <a:srgbClr val="4C1D95"/>
+                  <a:srgbClr val="0F766E"/>
                 </a:solidFill>
                 <a:latin typeface="Trebuchet MS" pitchFamily="34" charset="0"/>
                 <a:ea typeface="Trebuchet MS" pitchFamily="34" charset="-122"/>
                 <a:cs typeface="Trebuchet MS" pitchFamily="34" charset="-120"/>
               </a:rPr>
-              <a:t>per</a:t>
+              <a:t>form</a:t>
             </a:r>
             <a:endParaRPr lang="en-US" sz="1300" dirty="0"/>
           </a:p>
@@ -26141,7 +27305,7 @@
                 <a:ea typeface="Calibri" pitchFamily="34" charset="-122"/>
                 <a:cs typeface="Calibri" pitchFamily="34" charset="-120"/>
               </a:rPr>
-              <a:t>through or completely</a:t>
+              <a:t>shape, arrange</a:t>
             </a:r>
             <a:endParaRPr lang="en-US" sz="850" dirty="0"/>
           </a:p>
@@ -26164,11 +27328,11 @@
             </a:avLst>
           </a:prstGeom>
           <a:solidFill>
-            <a:srgbClr val="CCFBF1"/>
+            <a:srgbClr val="FCE7F3"/>
           </a:solidFill>
           <a:ln w="19050">
             <a:solidFill>
-              <a:srgbClr val="0D9488"/>
+              <a:srgbClr val="DB2777"/>
             </a:solidFill>
             <a:prstDash val="solid"/>
           </a:ln>
@@ -26208,13 +27372,13 @@
             <a:r>
               <a:rPr lang="en-US" sz="1300" b="1" dirty="0">
                 <a:solidFill>
-                  <a:srgbClr val="0F766E"/>
+                  <a:srgbClr val="9D174D"/>
                 </a:solidFill>
                 <a:latin typeface="Trebuchet MS" pitchFamily="34" charset="0"/>
                 <a:ea typeface="Trebuchet MS" pitchFamily="34" charset="-122"/>
                 <a:cs typeface="Trebuchet MS" pitchFamily="34" charset="-120"/>
               </a:rPr>
-              <a:t>form</a:t>
+              <a:t>al</a:t>
             </a:r>
             <a:endParaRPr lang="en-US" sz="1300" dirty="0"/>
           </a:p>
@@ -26253,7 +27417,7 @@
                 <a:ea typeface="Calibri" pitchFamily="34" charset="-122"/>
                 <a:cs typeface="Calibri" pitchFamily="34" charset="-120"/>
               </a:rPr>
-              <a:t>shape or structure</a:t>
+              <a:t>relating to, having the quality of</a:t>
             </a:r>
             <a:endParaRPr lang="en-US" sz="850" dirty="0"/>
           </a:p>
@@ -26412,7 +27576,7 @@
                 <a:ea typeface="Trebuchet MS" pitchFamily="34" charset="-122"/>
                 <a:cs typeface="Trebuchet MS" pitchFamily="34" charset="-120"/>
               </a:rPr>
-              <a:t>per</a:t>
+              <a:t>for</a:t>
             </a:r>
             <a:endParaRPr lang="en-US" sz="1400" dirty="0"/>
           </a:p>
@@ -26517,7 +27681,7 @@
                 <a:ea typeface="Trebuchet MS" pitchFamily="34" charset="-122"/>
                 <a:cs typeface="Trebuchet MS" pitchFamily="34" charset="-120"/>
               </a:rPr>
-              <a:t>form</a:t>
+              <a:t>mal</a:t>
             </a:r>
             <a:endParaRPr lang="en-US" sz="1400" dirty="0"/>
           </a:p>
@@ -26676,7 +27840,7 @@
                 <a:ea typeface="Trebuchet MS" pitchFamily="34" charset="-122"/>
                 <a:cs typeface="Trebuchet MS" pitchFamily="34" charset="-120"/>
               </a:rPr>
-              <a:t>p</a:t>
+              <a:t>f</a:t>
             </a:r>
             <a:endParaRPr lang="en-US" sz="900" dirty="0"/>
           </a:p>
@@ -26742,7 +27906,7 @@
                 <a:ea typeface="Trebuchet MS" pitchFamily="34" charset="-122"/>
                 <a:cs typeface="Trebuchet MS" pitchFamily="34" charset="-120"/>
               </a:rPr>
-              <a:t>er</a:t>
+              <a:t>or</a:t>
             </a:r>
             <a:endParaRPr lang="en-US" sz="900" dirty="0"/>
           </a:p>
@@ -26808,7 +27972,7 @@
                 <a:ea typeface="Trebuchet MS" pitchFamily="34" charset="-122"/>
                 <a:cs typeface="Trebuchet MS" pitchFamily="34" charset="-120"/>
               </a:rPr>
-              <a:t>f</a:t>
+              <a:t>m</a:t>
             </a:r>
             <a:endParaRPr lang="en-US" sz="900" dirty="0"/>
           </a:p>
@@ -26874,7 +28038,7 @@
                 <a:ea typeface="Trebuchet MS" pitchFamily="34" charset="-122"/>
                 <a:cs typeface="Trebuchet MS" pitchFamily="34" charset="-120"/>
               </a:rPr>
-              <a:t>or</a:t>
+              <a:t>a</a:t>
             </a:r>
             <a:endParaRPr lang="en-US" sz="900" dirty="0"/>
           </a:p>
@@ -26940,7 +28104,7 @@
                 <a:ea typeface="Trebuchet MS" pitchFamily="34" charset="-122"/>
                 <a:cs typeface="Trebuchet MS" pitchFamily="34" charset="-120"/>
               </a:rPr>
-              <a:t>m</a:t>
+              <a:t>l</a:t>
             </a:r>
             <a:endParaRPr lang="en-US" sz="900" dirty="0"/>
           </a:p>
@@ -27371,7 +28535,7 @@
                 <a:ea typeface="Trebuchet MS" pitchFamily="34" charset="-122"/>
                 <a:cs typeface="Trebuchet MS" pitchFamily="34" charset="-120"/>
               </a:rPr>
-              <a:t>transform</a:t>
+              <a:t>reform</a:t>
             </a:r>
             <a:endParaRPr lang="en-US" sz="2800" dirty="0"/>
           </a:p>
@@ -28198,7 +29362,7 @@
                 <a:ea typeface="Trebuchet MS" pitchFamily="34" charset="-122"/>
                 <a:cs typeface="Trebuchet MS" pitchFamily="34" charset="-120"/>
               </a:rPr>
-              <a:t>transform</a:t>
+              <a:t>reform</a:t>
             </a:r>
             <a:endParaRPr lang="en-US" sz="2800" dirty="0"/>
           </a:p>
@@ -28337,7 +29501,7 @@
                 <a:ea typeface="Trebuchet MS" pitchFamily="34" charset="-122"/>
                 <a:cs typeface="Trebuchet MS" pitchFamily="34" charset="-120"/>
               </a:rPr>
-              <a:t>trans</a:t>
+              <a:t>re</a:t>
             </a:r>
             <a:endParaRPr lang="en-US" sz="1300" dirty="0"/>
           </a:p>
@@ -28376,7 +29540,7 @@
                 <a:ea typeface="Calibri" pitchFamily="34" charset="-122"/>
                 <a:cs typeface="Calibri" pitchFamily="34" charset="-120"/>
               </a:rPr>
-              <a:t>across or change</a:t>
+              <a:t>again, back</a:t>
             </a:r>
             <a:endParaRPr lang="en-US" sz="850" dirty="0"/>
           </a:p>
@@ -28488,7 +29652,7 @@
                 <a:ea typeface="Calibri" pitchFamily="34" charset="-122"/>
                 <a:cs typeface="Calibri" pitchFamily="34" charset="-120"/>
               </a:rPr>
-              <a:t>shape or structure</a:t>
+              <a:t>shape, arrange</a:t>
             </a:r>
             <a:endParaRPr lang="en-US" sz="850" dirty="0"/>
           </a:p>
@@ -29183,7 +30347,7 @@
                 <a:ea typeface="Trebuchet MS" pitchFamily="34" charset="-122"/>
                 <a:cs typeface="Trebuchet MS" pitchFamily="34" charset="-120"/>
               </a:rPr>
-              <a:t>transform</a:t>
+              <a:t>reform</a:t>
             </a:r>
             <a:endParaRPr lang="en-US" sz="2800" dirty="0"/>
           </a:p>
@@ -29322,7 +30486,7 @@
                 <a:ea typeface="Trebuchet MS" pitchFamily="34" charset="-122"/>
                 <a:cs typeface="Trebuchet MS" pitchFamily="34" charset="-120"/>
               </a:rPr>
-              <a:t>trans</a:t>
+              <a:t>re</a:t>
             </a:r>
             <a:endParaRPr lang="en-US" sz="1300" dirty="0"/>
           </a:p>
@@ -29361,7 +30525,7 @@
                 <a:ea typeface="Calibri" pitchFamily="34" charset="-122"/>
                 <a:cs typeface="Calibri" pitchFamily="34" charset="-120"/>
               </a:rPr>
-              <a:t>across or change</a:t>
+              <a:t>again, back</a:t>
             </a:r>
             <a:endParaRPr lang="en-US" sz="850" dirty="0"/>
           </a:p>
@@ -29473,7 +30637,7 @@
                 <a:ea typeface="Calibri" pitchFamily="34" charset="-122"/>
                 <a:cs typeface="Calibri" pitchFamily="34" charset="-120"/>
               </a:rPr>
-              <a:t>shape or structure</a:t>
+              <a:t>shape, arrange</a:t>
             </a:r>
             <a:endParaRPr lang="en-US" sz="850" dirty="0"/>
           </a:p>
@@ -29632,7 +30796,7 @@
                 <a:ea typeface="Trebuchet MS" pitchFamily="34" charset="-122"/>
                 <a:cs typeface="Trebuchet MS" pitchFamily="34" charset="-120"/>
               </a:rPr>
-              <a:t>trans</a:t>
+              <a:t>re</a:t>
             </a:r>
             <a:endParaRPr lang="en-US" sz="1400" dirty="0"/>
           </a:p>
@@ -30300,7 +31464,7 @@
                 <a:ea typeface="Trebuchet MS" pitchFamily="34" charset="-122"/>
                 <a:cs typeface="Trebuchet MS" pitchFamily="34" charset="-120"/>
               </a:rPr>
-              <a:t>transform</a:t>
+              <a:t>reform</a:t>
             </a:r>
             <a:endParaRPr lang="en-US" sz="2800" dirty="0"/>
           </a:p>
@@ -30439,7 +31603,7 @@
                 <a:ea typeface="Trebuchet MS" pitchFamily="34" charset="-122"/>
                 <a:cs typeface="Trebuchet MS" pitchFamily="34" charset="-120"/>
               </a:rPr>
-              <a:t>trans</a:t>
+              <a:t>re</a:t>
             </a:r>
             <a:endParaRPr lang="en-US" sz="1300" dirty="0"/>
           </a:p>
@@ -30478,7 +31642,7 @@
                 <a:ea typeface="Calibri" pitchFamily="34" charset="-122"/>
                 <a:cs typeface="Calibri" pitchFamily="34" charset="-120"/>
               </a:rPr>
-              <a:t>across or change</a:t>
+              <a:t>again, back</a:t>
             </a:r>
             <a:endParaRPr lang="en-US" sz="850" dirty="0"/>
           </a:p>
@@ -30590,7 +31754,7 @@
                 <a:ea typeface="Calibri" pitchFamily="34" charset="-122"/>
                 <a:cs typeface="Calibri" pitchFamily="34" charset="-120"/>
               </a:rPr>
-              <a:t>shape or structure</a:t>
+              <a:t>shape, arrange</a:t>
             </a:r>
             <a:endParaRPr lang="en-US" sz="850" dirty="0"/>
           </a:p>
@@ -30749,7 +31913,7 @@
                 <a:ea typeface="Trebuchet MS" pitchFamily="34" charset="-122"/>
                 <a:cs typeface="Trebuchet MS" pitchFamily="34" charset="-120"/>
               </a:rPr>
-              <a:t>trans</a:t>
+              <a:t>re</a:t>
             </a:r>
             <a:endParaRPr lang="en-US" sz="1400" dirty="0"/>
           </a:p>
@@ -30961,7 +32125,7 @@
         </p:nvSpPr>
         <p:spPr>
           <a:xfrm>
-            <a:off x="2023872" y="4169664"/>
+            <a:off x="2427732" y="4169664"/>
             <a:ext cx="685800" cy="475488"/>
           </a:xfrm>
           <a:prstGeom prst="rect">
@@ -30988,7 +32152,7 @@
         </p:nvSpPr>
         <p:spPr>
           <a:xfrm>
-            <a:off x="2023872" y="4169664"/>
+            <a:off x="2427732" y="4169664"/>
             <a:ext cx="685800" cy="475488"/>
           </a:xfrm>
           <a:prstGeom prst="rect">
@@ -31013,7 +32177,7 @@
                 <a:ea typeface="Trebuchet MS" pitchFamily="34" charset="-122"/>
                 <a:cs typeface="Trebuchet MS" pitchFamily="34" charset="-120"/>
               </a:rPr>
-              <a:t>t</a:t>
+              <a:t>r</a:t>
             </a:r>
             <a:endParaRPr lang="en-US" sz="900" dirty="0"/>
           </a:p>
@@ -31027,7 +32191,7 @@
         </p:nvSpPr>
         <p:spPr>
           <a:xfrm>
-            <a:off x="2831592" y="4169664"/>
+            <a:off x="3639312" y="4169664"/>
             <a:ext cx="685800" cy="475488"/>
           </a:xfrm>
           <a:prstGeom prst="rect">
@@ -31054,7 +32218,7 @@
         </p:nvSpPr>
         <p:spPr>
           <a:xfrm>
-            <a:off x="2831592" y="4169664"/>
+            <a:off x="3639312" y="4169664"/>
             <a:ext cx="685800" cy="475488"/>
           </a:xfrm>
           <a:prstGeom prst="rect">
@@ -31079,7 +32243,7 @@
                 <a:ea typeface="Trebuchet MS" pitchFamily="34" charset="-122"/>
                 <a:cs typeface="Trebuchet MS" pitchFamily="34" charset="-120"/>
               </a:rPr>
-              <a:t>r</a:t>
+              <a:t>e</a:t>
             </a:r>
             <a:endParaRPr lang="en-US" sz="900" dirty="0"/>
           </a:p>
@@ -31093,7 +32257,7 @@
         </p:nvSpPr>
         <p:spPr>
           <a:xfrm>
-            <a:off x="3639312" y="4169664"/>
+            <a:off x="4850892" y="4169664"/>
             <a:ext cx="685800" cy="475488"/>
           </a:xfrm>
           <a:prstGeom prst="rect">
@@ -31120,7 +32284,7 @@
         </p:nvSpPr>
         <p:spPr>
           <a:xfrm>
-            <a:off x="3639312" y="4169664"/>
+            <a:off x="4850892" y="4169664"/>
             <a:ext cx="685800" cy="475488"/>
           </a:xfrm>
           <a:prstGeom prst="rect">
@@ -31145,7 +32309,7 @@
                 <a:ea typeface="Trebuchet MS" pitchFamily="34" charset="-122"/>
                 <a:cs typeface="Trebuchet MS" pitchFamily="34" charset="-120"/>
               </a:rPr>
-              <a:t>a</a:t>
+              <a:t>f</a:t>
             </a:r>
             <a:endParaRPr lang="en-US" sz="900" dirty="0"/>
           </a:p>
@@ -31159,7 +32323,7 @@
         </p:nvSpPr>
         <p:spPr>
           <a:xfrm>
-            <a:off x="4447032" y="4169664"/>
+            <a:off x="6062472" y="4169664"/>
             <a:ext cx="685800" cy="475488"/>
           </a:xfrm>
           <a:prstGeom prst="rect">
@@ -31186,7 +32350,7 @@
         </p:nvSpPr>
         <p:spPr>
           <a:xfrm>
-            <a:off x="4447032" y="4169664"/>
+            <a:off x="6062472" y="4169664"/>
             <a:ext cx="685800" cy="475488"/>
           </a:xfrm>
           <a:prstGeom prst="rect">
@@ -31211,7 +32375,7 @@
                 <a:ea typeface="Trebuchet MS" pitchFamily="34" charset="-122"/>
                 <a:cs typeface="Trebuchet MS" pitchFamily="34" charset="-120"/>
               </a:rPr>
-              <a:t>n</a:t>
+              <a:t>or</a:t>
             </a:r>
             <a:endParaRPr lang="en-US" sz="900" dirty="0"/>
           </a:p>
@@ -31225,7 +32389,7 @@
         </p:nvSpPr>
         <p:spPr>
           <a:xfrm>
-            <a:off x="5254752" y="4169664"/>
+            <a:off x="7274052" y="4169664"/>
             <a:ext cx="685800" cy="475488"/>
           </a:xfrm>
           <a:prstGeom prst="rect">
@@ -31252,205 +32416,7 @@
         </p:nvSpPr>
         <p:spPr>
           <a:xfrm>
-            <a:off x="5254752" y="4169664"/>
-            <a:ext cx="685800" cy="475488"/>
-          </a:xfrm>
-          <a:prstGeom prst="rect">
-            <a:avLst/>
-          </a:prstGeom>
-          <a:noFill/>
-          <a:ln/>
-        </p:spPr>
-        <p:txBody>
-          <a:bodyPr wrap="square" lIns="0" tIns="0" rIns="0" bIns="0" rtlCol="0" anchor="ctr"/>
-          <a:lstStyle/>
-          <a:p>
-            <a:pPr algn="ctr" indent="0" marL="0">
-              <a:buNone/>
-            </a:pPr>
-            <a:r>
-              <a:rPr lang="en-US" sz="900" b="1" dirty="0">
-                <a:solidFill>
-                  <a:srgbClr val="9D174D"/>
-                </a:solidFill>
-                <a:latin typeface="Trebuchet MS" pitchFamily="34" charset="0"/>
-                <a:ea typeface="Trebuchet MS" pitchFamily="34" charset="-122"/>
-                <a:cs typeface="Trebuchet MS" pitchFamily="34" charset="-120"/>
-              </a:rPr>
-              <a:t>s</a:t>
-            </a:r>
-            <a:endParaRPr lang="en-US" sz="900" dirty="0"/>
-          </a:p>
-        </p:txBody>
-      </p:sp>
-      <p:sp>
-        <p:nvSpPr>
-          <p:cNvPr id="43" name="Shape 41"/>
-          <p:cNvSpPr/>
-          <p:nvPr/>
-        </p:nvSpPr>
-        <p:spPr>
-          <a:xfrm>
-            <a:off x="6062472" y="4169664"/>
-            <a:ext cx="685800" cy="475488"/>
-          </a:xfrm>
-          <a:prstGeom prst="rect">
-            <a:avLst>
-              <a:gd name="adj" fmla="val 7692"/>
-            </a:avLst>
-          </a:prstGeom>
-          <a:solidFill>
-            <a:srgbClr val="FFFFFF"/>
-          </a:solidFill>
-          <a:ln w="12700">
-            <a:solidFill>
-              <a:srgbClr val="DB2777"/>
-            </a:solidFill>
-            <a:prstDash val="solid"/>
-          </a:ln>
-        </p:spPr>
-      </p:sp>
-      <p:sp>
-        <p:nvSpPr>
-          <p:cNvPr id="44" name="Text 42"/>
-          <p:cNvSpPr/>
-          <p:nvPr/>
-        </p:nvSpPr>
-        <p:spPr>
-          <a:xfrm>
-            <a:off x="6062472" y="4169664"/>
-            <a:ext cx="685800" cy="475488"/>
-          </a:xfrm>
-          <a:prstGeom prst="rect">
-            <a:avLst/>
-          </a:prstGeom>
-          <a:noFill/>
-          <a:ln/>
-        </p:spPr>
-        <p:txBody>
-          <a:bodyPr wrap="square" lIns="0" tIns="0" rIns="0" bIns="0" rtlCol="0" anchor="ctr"/>
-          <a:lstStyle/>
-          <a:p>
-            <a:pPr algn="ctr" indent="0" marL="0">
-              <a:buNone/>
-            </a:pPr>
-            <a:r>
-              <a:rPr lang="en-US" sz="900" b="1" dirty="0">
-                <a:solidFill>
-                  <a:srgbClr val="9D174D"/>
-                </a:solidFill>
-                <a:latin typeface="Trebuchet MS" pitchFamily="34" charset="0"/>
-                <a:ea typeface="Trebuchet MS" pitchFamily="34" charset="-122"/>
-                <a:cs typeface="Trebuchet MS" pitchFamily="34" charset="-120"/>
-              </a:rPr>
-              <a:t>f</a:t>
-            </a:r>
-            <a:endParaRPr lang="en-US" sz="900" dirty="0"/>
-          </a:p>
-        </p:txBody>
-      </p:sp>
-      <p:sp>
-        <p:nvSpPr>
-          <p:cNvPr id="45" name="Shape 43"/>
-          <p:cNvSpPr/>
-          <p:nvPr/>
-        </p:nvSpPr>
-        <p:spPr>
-          <a:xfrm>
-            <a:off x="6870192" y="4169664"/>
-            <a:ext cx="685800" cy="475488"/>
-          </a:xfrm>
-          <a:prstGeom prst="rect">
-            <a:avLst>
-              <a:gd name="adj" fmla="val 7692"/>
-            </a:avLst>
-          </a:prstGeom>
-          <a:solidFill>
-            <a:srgbClr val="FFFFFF"/>
-          </a:solidFill>
-          <a:ln w="12700">
-            <a:solidFill>
-              <a:srgbClr val="DB2777"/>
-            </a:solidFill>
-            <a:prstDash val="solid"/>
-          </a:ln>
-        </p:spPr>
-      </p:sp>
-      <p:sp>
-        <p:nvSpPr>
-          <p:cNvPr id="46" name="Text 44"/>
-          <p:cNvSpPr/>
-          <p:nvPr/>
-        </p:nvSpPr>
-        <p:spPr>
-          <a:xfrm>
-            <a:off x="6870192" y="4169664"/>
-            <a:ext cx="685800" cy="475488"/>
-          </a:xfrm>
-          <a:prstGeom prst="rect">
-            <a:avLst/>
-          </a:prstGeom>
-          <a:noFill/>
-          <a:ln/>
-        </p:spPr>
-        <p:txBody>
-          <a:bodyPr wrap="square" lIns="0" tIns="0" rIns="0" bIns="0" rtlCol="0" anchor="ctr"/>
-          <a:lstStyle/>
-          <a:p>
-            <a:pPr algn="ctr" indent="0" marL="0">
-              <a:buNone/>
-            </a:pPr>
-            <a:r>
-              <a:rPr lang="en-US" sz="900" b="1" dirty="0">
-                <a:solidFill>
-                  <a:srgbClr val="9D174D"/>
-                </a:solidFill>
-                <a:latin typeface="Trebuchet MS" pitchFamily="34" charset="0"/>
-                <a:ea typeface="Trebuchet MS" pitchFamily="34" charset="-122"/>
-                <a:cs typeface="Trebuchet MS" pitchFamily="34" charset="-120"/>
-              </a:rPr>
-              <a:t>or</a:t>
-            </a:r>
-            <a:endParaRPr lang="en-US" sz="900" dirty="0"/>
-          </a:p>
-        </p:txBody>
-      </p:sp>
-      <p:sp>
-        <p:nvSpPr>
-          <p:cNvPr id="47" name="Shape 45"/>
-          <p:cNvSpPr/>
-          <p:nvPr/>
-        </p:nvSpPr>
-        <p:spPr>
-          <a:xfrm>
-            <a:off x="7677912" y="4169664"/>
-            <a:ext cx="685800" cy="475488"/>
-          </a:xfrm>
-          <a:prstGeom prst="rect">
-            <a:avLst>
-              <a:gd name="adj" fmla="val 7692"/>
-            </a:avLst>
-          </a:prstGeom>
-          <a:solidFill>
-            <a:srgbClr val="FFFFFF"/>
-          </a:solidFill>
-          <a:ln w="12700">
-            <a:solidFill>
-              <a:srgbClr val="DB2777"/>
-            </a:solidFill>
-            <a:prstDash val="solid"/>
-          </a:ln>
-        </p:spPr>
-      </p:sp>
-      <p:sp>
-        <p:nvSpPr>
-          <p:cNvPr id="48" name="Text 46"/>
-          <p:cNvSpPr/>
-          <p:nvPr/>
-        </p:nvSpPr>
-        <p:spPr>
-          <a:xfrm>
-            <a:off x="7677912" y="4169664"/>
+            <a:off x="7274052" y="4169664"/>
             <a:ext cx="685800" cy="475488"/>
           </a:xfrm>
           <a:prstGeom prst="rect">
@@ -33237,7 +34203,7 @@
                 <a:ea typeface="Trebuchet MS" pitchFamily="34" charset="-122"/>
                 <a:cs typeface="Trebuchet MS" pitchFamily="34" charset="-120"/>
               </a:rPr>
-              <a:t>uni-</a:t>
+              <a:t>re-</a:t>
             </a:r>
             <a:endParaRPr lang="en-US" sz="1300" dirty="0"/>
           </a:p>
@@ -33365,7 +34331,7 @@
                 <a:ea typeface="Trebuchet MS" pitchFamily="34" charset="-122"/>
                 <a:cs typeface="Trebuchet MS" pitchFamily="34" charset="-120"/>
               </a:rPr>
-              <a:t>-al</a:t>
+              <a:t>-ation</a:t>
             </a:r>
             <a:endParaRPr lang="en-US" sz="1300" dirty="0"/>
           </a:p>
@@ -33429,7 +34395,7 @@
                 <a:ea typeface="Trebuchet MS" pitchFamily="34" charset="-122"/>
                 <a:cs typeface="Trebuchet MS" pitchFamily="34" charset="-120"/>
               </a:rPr>
-              <a:t>re-</a:t>
+              <a:t>in-</a:t>
             </a:r>
             <a:endParaRPr lang="en-US" sz="1300" dirty="0"/>
           </a:p>
@@ -33518,7 +34484,7 @@
                 <a:ea typeface="Trebuchet MS" pitchFamily="34" charset="-122"/>
                 <a:cs typeface="Trebuchet MS" pitchFamily="34" charset="-120"/>
               </a:rPr>
-              <a:t>-ation</a:t>
+              <a:t>-al</a:t>
             </a:r>
             <a:endParaRPr lang="en-US" sz="1300" dirty="0"/>
           </a:p>
@@ -33582,7 +34548,7 @@
                 <a:ea typeface="Trebuchet MS" pitchFamily="34" charset="-122"/>
                 <a:cs typeface="Trebuchet MS" pitchFamily="34" charset="-120"/>
               </a:rPr>
-              <a:t>in-</a:t>
+              <a:t>uni-</a:t>
             </a:r>
             <a:endParaRPr lang="en-US" sz="1300" dirty="0"/>
           </a:p>
@@ -33671,7 +34637,7 @@
                 <a:ea typeface="Trebuchet MS" pitchFamily="34" charset="-122"/>
                 <a:cs typeface="Trebuchet MS" pitchFamily="34" charset="-120"/>
               </a:rPr>
-              <a:t>-er</a:t>
+              <a:t>-ed</a:t>
             </a:r>
             <a:endParaRPr lang="en-US" sz="1300" dirty="0"/>
           </a:p>
@@ -33735,7 +34701,7 @@
                 <a:ea typeface="Trebuchet MS" pitchFamily="34" charset="-122"/>
                 <a:cs typeface="Trebuchet MS" pitchFamily="34" charset="-120"/>
               </a:rPr>
-              <a:t>per-</a:t>
+              <a:t>trans-</a:t>
             </a:r>
             <a:endParaRPr lang="en-US" sz="1300" dirty="0"/>
           </a:p>
@@ -33824,7 +34790,7 @@
                 <a:ea typeface="Trebuchet MS" pitchFamily="34" charset="-122"/>
                 <a:cs typeface="Trebuchet MS" pitchFamily="34" charset="-120"/>
               </a:rPr>
-              <a:t>-less</a:t>
+              <a:t>-ing</a:t>
             </a:r>
             <a:endParaRPr lang="en-US" sz="1300" dirty="0"/>
           </a:p>
@@ -33888,7 +34854,7 @@
                 <a:ea typeface="Trebuchet MS" pitchFamily="34" charset="-122"/>
                 <a:cs typeface="Trebuchet MS" pitchFamily="34" charset="-120"/>
               </a:rPr>
-              <a:t>trans-</a:t>
+              <a:t>per-</a:t>
             </a:r>
             <a:endParaRPr lang="en-US" sz="1300" dirty="0"/>
           </a:p>
@@ -33977,7 +34943,7 @@
                 <a:ea typeface="Trebuchet MS" pitchFamily="34" charset="-122"/>
                 <a:cs typeface="Trebuchet MS" pitchFamily="34" charset="-120"/>
               </a:rPr>
-              <a:t>-ity</a:t>
+              <a:t>-er</a:t>
             </a:r>
             <a:endParaRPr lang="en-US" sz="1300" dirty="0"/>
           </a:p>
@@ -34082,7 +35048,7 @@
                 <a:ea typeface="Trebuchet MS" pitchFamily="34" charset="-122"/>
                 <a:cs typeface="Trebuchet MS" pitchFamily="34" charset="-120"/>
               </a:rPr>
-              <a:t>uniform</a:t>
+              <a:t>formation</a:t>
             </a:r>
             <a:endParaRPr lang="en-US" sz="1200" dirty="0"/>
           </a:p>
@@ -34214,7 +35180,7 @@
                 <a:ea typeface="Trebuchet MS" pitchFamily="34" charset="-122"/>
                 <a:cs typeface="Trebuchet MS" pitchFamily="34" charset="-120"/>
               </a:rPr>
-              <a:t>inform</a:t>
+              <a:t>uniform</a:t>
             </a:r>
             <a:endParaRPr lang="en-US" sz="1200" dirty="0"/>
           </a:p>
@@ -34280,7 +35246,7 @@
                 <a:ea typeface="Trebuchet MS" pitchFamily="34" charset="-122"/>
                 <a:cs typeface="Trebuchet MS" pitchFamily="34" charset="-120"/>
               </a:rPr>
-              <a:t>perform</a:t>
+              <a:t>transform</a:t>
             </a:r>
             <a:endParaRPr lang="en-US" sz="1200" dirty="0"/>
           </a:p>
@@ -34346,7 +35312,7 @@
                 <a:ea typeface="Trebuchet MS" pitchFamily="34" charset="-122"/>
                 <a:cs typeface="Trebuchet MS" pitchFamily="34" charset="-120"/>
               </a:rPr>
-              <a:t>transform</a:t>
+              <a:t>inform</a:t>
             </a:r>
             <a:endParaRPr lang="en-US" sz="1200" dirty="0"/>
           </a:p>
@@ -34412,7 +35378,7 @@
                 <a:ea typeface="Trebuchet MS" pitchFamily="34" charset="-122"/>
                 <a:cs typeface="Trebuchet MS" pitchFamily="34" charset="-120"/>
               </a:rPr>
-              <a:t>formation</a:t>
+              <a:t>perform</a:t>
             </a:r>
             <a:endParaRPr lang="en-US" sz="1200" dirty="0"/>
           </a:p>
@@ -34544,7 +35510,7 @@
                 <a:ea typeface="Trebuchet MS" pitchFamily="34" charset="-122"/>
                 <a:cs typeface="Trebuchet MS" pitchFamily="34" charset="-120"/>
               </a:rPr>
-              <a:t>formula</a:t>
+              <a:t>conform</a:t>
             </a:r>
             <a:endParaRPr lang="en-US" sz="1200" dirty="0"/>
           </a:p>
@@ -35732,7 +36698,7 @@
                 <a:ea typeface="Calibri" pitchFamily="34" charset="-122"/>
                 <a:cs typeface="Calibri" pitchFamily="34" charset="-120"/>
               </a:rPr>
-              <a:t>1.  The root 'form' comes from Latin and means shape or structure.</a:t>
+              <a:t>1.  Adding the prefix 're' to 'form' makes the word 'reform', meaning to change for the better.</a:t>
             </a:r>
             <a:endParaRPr lang="en-US" sz="1300" dirty="0"/>
           </a:p>
@@ -35871,7 +36837,7 @@
                 <a:ea typeface="Calibri" pitchFamily="34" charset="-122"/>
                 <a:cs typeface="Calibri" pitchFamily="34" charset="-120"/>
               </a:rPr>
-              <a:t>2.  The word 'perform' means to change something completely into something different.</a:t>
+              <a:t>2.  The word 'transform' contains the root 'form'.</a:t>
             </a:r>
             <a:endParaRPr lang="en-US" sz="1300" dirty="0"/>
           </a:p>
@@ -35894,11 +36860,11 @@
             </a:avLst>
           </a:prstGeom>
           <a:solidFill>
-            <a:srgbClr val="FEE2E2"/>
-          </a:solidFill>
-          <a:ln w="12700">
-            <a:solidFill>
-              <a:srgbClr val="DC2626"/>
+            <a:srgbClr val="DCFCE7"/>
+          </a:solidFill>
+          <a:ln w="12700">
+            <a:solidFill>
+              <a:srgbClr val="16A34A"/>
             </a:solidFill>
             <a:prstDash val="solid"/>
           </a:ln>
@@ -35931,13 +36897,13 @@
             <a:r>
               <a:rPr lang="en-US" sz="1100" b="1" dirty="0">
                 <a:solidFill>
-                  <a:srgbClr val="DC2626"/>
+                  <a:srgbClr val="16A34A"/>
                 </a:solidFill>
                 <a:latin typeface="Trebuchet MS" pitchFamily="34" charset="0"/>
                 <a:ea typeface="Trebuchet MS" pitchFamily="34" charset="-122"/>
                 <a:cs typeface="Trebuchet MS" pitchFamily="34" charset="-120"/>
               </a:rPr>
-              <a:t>FALSE</a:t>
+              <a:t>TRUE</a:t>
             </a:r>
             <a:endParaRPr lang="en-US" sz="1100" dirty="0"/>
           </a:p>
@@ -36010,7 +36976,7 @@
                 <a:ea typeface="Calibri" pitchFamily="34" charset="-122"/>
                 <a:cs typeface="Calibri" pitchFamily="34" charset="-120"/>
               </a:rPr>
-              <a:t>3.  The word 'uniform' contains the prefix 'uni', which means one.</a:t>
+              <a:t>3.  The word 'uniform' means many different shapes and styles.</a:t>
             </a:r>
             <a:endParaRPr lang="en-US" sz="1300" dirty="0"/>
           </a:p>
@@ -36033,11 +36999,11 @@
             </a:avLst>
           </a:prstGeom>
           <a:solidFill>
-            <a:srgbClr val="DCFCE7"/>
-          </a:solidFill>
-          <a:ln w="12700">
-            <a:solidFill>
-              <a:srgbClr val="16A34A"/>
+            <a:srgbClr val="FEE2E2"/>
+          </a:solidFill>
+          <a:ln w="12700">
+            <a:solidFill>
+              <a:srgbClr val="DC2626"/>
             </a:solidFill>
             <a:prstDash val="solid"/>
           </a:ln>
@@ -36070,13 +37036,13 @@
             <a:r>
               <a:rPr lang="en-US" sz="1100" b="1" dirty="0">
                 <a:solidFill>
-                  <a:srgbClr val="16A34A"/>
+                  <a:srgbClr val="DC2626"/>
                 </a:solidFill>
                 <a:latin typeface="Trebuchet MS" pitchFamily="34" charset="0"/>
                 <a:ea typeface="Trebuchet MS" pitchFamily="34" charset="-122"/>
                 <a:cs typeface="Trebuchet MS" pitchFamily="34" charset="-120"/>
               </a:rPr>
-              <a:t>TRUE</a:t>
+              <a:t>FALSE</a:t>
             </a:r>
             <a:endParaRPr lang="en-US" sz="1100" dirty="0"/>
           </a:p>
@@ -36149,7 +37115,7 @@
                 <a:ea typeface="Calibri" pitchFamily="34" charset="-122"/>
                 <a:cs typeface="Calibri" pitchFamily="34" charset="-120"/>
               </a:rPr>
-              <a:t>4.  The word 'formation' contains the root 'form' plus the suffix '-ation'.</a:t>
+              <a:t>4.  The root 'form' comes from Latin and means shape or structure.</a:t>
             </a:r>
             <a:endParaRPr lang="en-US" sz="1300" dirty="0"/>
           </a:p>
@@ -36288,7 +37254,7 @@
                 <a:ea typeface="Calibri" pitchFamily="34" charset="-122"/>
                 <a:cs typeface="Calibri" pitchFamily="34" charset="-120"/>
               </a:rPr>
-              <a:t>5.  The root 'form' comes from the Greek word 'morphe'.</a:t>
+              <a:t>5.  The root 'form' is found in the word 'forest'.</a:t>
             </a:r>
             <a:endParaRPr lang="en-US" sz="1300" dirty="0"/>
           </a:p>
@@ -36927,7 +37893,7 @@
                 <a:ea typeface="Trebuchet MS" pitchFamily="34" charset="-122"/>
                 <a:cs typeface="Trebuchet MS" pitchFamily="34" charset="-120"/>
               </a:rPr>
-              <a:t>uniform</a:t>
+              <a:t>formation</a:t>
             </a:r>
             <a:endParaRPr lang="en-US" sz="1300" dirty="0"/>
           </a:p>
@@ -37059,7 +38025,7 @@
                 <a:ea typeface="Trebuchet MS" pitchFamily="34" charset="-122"/>
                 <a:cs typeface="Trebuchet MS" pitchFamily="34" charset="-120"/>
               </a:rPr>
-              <a:t>inform</a:t>
+              <a:t>uniform</a:t>
             </a:r>
             <a:endParaRPr lang="en-US" sz="1300" dirty="0"/>
           </a:p>
@@ -37125,7 +38091,7 @@
                 <a:ea typeface="Trebuchet MS" pitchFamily="34" charset="-122"/>
                 <a:cs typeface="Trebuchet MS" pitchFamily="34" charset="-120"/>
               </a:rPr>
-              <a:t>perform</a:t>
+              <a:t>transform</a:t>
             </a:r>
             <a:endParaRPr lang="en-US" sz="1300" dirty="0"/>
           </a:p>
@@ -37191,7 +38157,7 @@
                 <a:ea typeface="Trebuchet MS" pitchFamily="34" charset="-122"/>
                 <a:cs typeface="Trebuchet MS" pitchFamily="34" charset="-120"/>
               </a:rPr>
-              <a:t>transform</a:t>
+              <a:t>inform</a:t>
             </a:r>
             <a:endParaRPr lang="en-US" sz="1300" dirty="0"/>
           </a:p>
@@ -37257,7 +38223,7 @@
                 <a:ea typeface="Trebuchet MS" pitchFamily="34" charset="-122"/>
                 <a:cs typeface="Trebuchet MS" pitchFamily="34" charset="-120"/>
               </a:rPr>
-              <a:t>formation</a:t>
+              <a:t>perform</a:t>
             </a:r>
             <a:endParaRPr lang="en-US" sz="1300" dirty="0"/>
           </a:p>
@@ -37916,7 +38882,7 @@
                 <a:ea typeface="Trebuchet MS" pitchFamily="34" charset="-122"/>
                 <a:cs typeface="Trebuchet MS" pitchFamily="34" charset="-120"/>
               </a:rPr>
-              <a:t>uni-</a:t>
+              <a:t>re-</a:t>
             </a:r>
             <a:endParaRPr lang="en-US" sz="1300" dirty="0"/>
           </a:p>
@@ -38044,7 +39010,7 @@
                 <a:ea typeface="Trebuchet MS" pitchFamily="34" charset="-122"/>
                 <a:cs typeface="Trebuchet MS" pitchFamily="34" charset="-120"/>
               </a:rPr>
-              <a:t>-al</a:t>
+              <a:t>-ation</a:t>
             </a:r>
             <a:endParaRPr lang="en-US" sz="1300" dirty="0"/>
           </a:p>
@@ -38108,7 +39074,7 @@
                 <a:ea typeface="Trebuchet MS" pitchFamily="34" charset="-122"/>
                 <a:cs typeface="Trebuchet MS" pitchFamily="34" charset="-120"/>
               </a:rPr>
-              <a:t>re-</a:t>
+              <a:t>in-</a:t>
             </a:r>
             <a:endParaRPr lang="en-US" sz="1300" dirty="0"/>
           </a:p>
@@ -38197,7 +39163,7 @@
                 <a:ea typeface="Trebuchet MS" pitchFamily="34" charset="-122"/>
                 <a:cs typeface="Trebuchet MS" pitchFamily="34" charset="-120"/>
               </a:rPr>
-              <a:t>-ation</a:t>
+              <a:t>-al</a:t>
             </a:r>
             <a:endParaRPr lang="en-US" sz="1300" dirty="0"/>
           </a:p>
@@ -38261,7 +39227,7 @@
                 <a:ea typeface="Trebuchet MS" pitchFamily="34" charset="-122"/>
                 <a:cs typeface="Trebuchet MS" pitchFamily="34" charset="-120"/>
               </a:rPr>
-              <a:t>in-</a:t>
+              <a:t>uni-</a:t>
             </a:r>
             <a:endParaRPr lang="en-US" sz="1300" dirty="0"/>
           </a:p>
@@ -38350,7 +39316,7 @@
                 <a:ea typeface="Trebuchet MS" pitchFamily="34" charset="-122"/>
                 <a:cs typeface="Trebuchet MS" pitchFamily="34" charset="-120"/>
               </a:rPr>
-              <a:t>-er</a:t>
+              <a:t>-ed</a:t>
             </a:r>
             <a:endParaRPr lang="en-US" sz="1300" dirty="0"/>
           </a:p>
@@ -38414,7 +39380,7 @@
                 <a:ea typeface="Trebuchet MS" pitchFamily="34" charset="-122"/>
                 <a:cs typeface="Trebuchet MS" pitchFamily="34" charset="-120"/>
               </a:rPr>
-              <a:t>per-</a:t>
+              <a:t>trans-</a:t>
             </a:r>
             <a:endParaRPr lang="en-US" sz="1300" dirty="0"/>
           </a:p>
@@ -38503,7 +39469,7 @@
                 <a:ea typeface="Trebuchet MS" pitchFamily="34" charset="-122"/>
                 <a:cs typeface="Trebuchet MS" pitchFamily="34" charset="-120"/>
               </a:rPr>
-              <a:t>-less</a:t>
+              <a:t>-ing</a:t>
             </a:r>
             <a:endParaRPr lang="en-US" sz="1300" dirty="0"/>
           </a:p>
@@ -38567,7 +39533,7 @@
                 <a:ea typeface="Trebuchet MS" pitchFamily="34" charset="-122"/>
                 <a:cs typeface="Trebuchet MS" pitchFamily="34" charset="-120"/>
               </a:rPr>
-              <a:t>trans-</a:t>
+              <a:t>per-</a:t>
             </a:r>
             <a:endParaRPr lang="en-US" sz="1300" dirty="0"/>
           </a:p>
@@ -38656,7 +39622,7 @@
                 <a:ea typeface="Trebuchet MS" pitchFamily="34" charset="-122"/>
                 <a:cs typeface="Trebuchet MS" pitchFamily="34" charset="-120"/>
               </a:rPr>
-              <a:t>-ity</a:t>
+              <a:t>-er</a:t>
             </a:r>
             <a:endParaRPr lang="en-US" sz="1300" dirty="0"/>
           </a:p>
@@ -38710,7 +39676,7 @@
         <p:spPr>
           <a:xfrm>
             <a:off x="1508760" y="4178808"/>
-            <a:ext cx="950976" cy="420624"/>
+            <a:ext cx="822960" cy="420624"/>
           </a:xfrm>
           <a:prstGeom prst="rect">
             <a:avLst>
@@ -38744,7 +39710,7 @@
         <p:spPr>
           <a:xfrm>
             <a:off x="1508760" y="4178808"/>
-            <a:ext cx="950976" cy="420624"/>
+            <a:ext cx="822960" cy="420624"/>
           </a:xfrm>
           <a:prstGeom prst="rect">
             <a:avLst/>
@@ -38768,7 +39734,7 @@
                 <a:ea typeface="Trebuchet MS" pitchFamily="34" charset="-122"/>
                 <a:cs typeface="Trebuchet MS" pitchFamily="34" charset="-120"/>
               </a:rPr>
-              <a:t>uni-</a:t>
+              <a:t>re-</a:t>
             </a:r>
             <a:endParaRPr lang="en-US" sz="1300" dirty="0"/>
           </a:p>
@@ -38782,7 +39748,7 @@
         </p:nvSpPr>
         <p:spPr>
           <a:xfrm>
-            <a:off x="2487168" y="4178808"/>
+            <a:off x="2359152" y="4178808"/>
             <a:ext cx="320040" cy="420624"/>
           </a:xfrm>
           <a:prstGeom prst="rect">
@@ -38821,7 +39787,7 @@
         </p:nvSpPr>
         <p:spPr>
           <a:xfrm>
-            <a:off x="2834640" y="4178808"/>
+            <a:off x="2706624" y="4178808"/>
             <a:ext cx="1243584" cy="420624"/>
           </a:xfrm>
           <a:prstGeom prst="rect">
@@ -38855,7 +39821,7 @@
         </p:nvSpPr>
         <p:spPr>
           <a:xfrm>
-            <a:off x="2834640" y="4178808"/>
+            <a:off x="2706624" y="4178808"/>
             <a:ext cx="1243584" cy="420624"/>
           </a:xfrm>
           <a:prstGeom prst="rect">
@@ -38894,7 +39860,7 @@
         </p:nvSpPr>
         <p:spPr>
           <a:xfrm>
-            <a:off x="4105656" y="4178808"/>
+            <a:off x="3977640" y="4178808"/>
             <a:ext cx="320040" cy="420624"/>
           </a:xfrm>
           <a:prstGeom prst="rect">
@@ -38933,8 +39899,8 @@
         </p:nvSpPr>
         <p:spPr>
           <a:xfrm>
-            <a:off x="4453128" y="4178808"/>
-            <a:ext cx="822960" cy="420624"/>
+            <a:off x="4325112" y="4178808"/>
+            <a:ext cx="1243584" cy="420624"/>
           </a:xfrm>
           <a:prstGeom prst="rect">
             <a:avLst>
@@ -38967,8 +39933,8 @@
         </p:nvSpPr>
         <p:spPr>
           <a:xfrm>
-            <a:off x="4453128" y="4178808"/>
-            <a:ext cx="822960" cy="420624"/>
+            <a:off x="4325112" y="4178808"/>
+            <a:ext cx="1243584" cy="420624"/>
           </a:xfrm>
           <a:prstGeom prst="rect">
             <a:avLst/>
@@ -38992,7 +39958,7 @@
                 <a:ea typeface="Trebuchet MS" pitchFamily="34" charset="-122"/>
                 <a:cs typeface="Trebuchet MS" pitchFamily="34" charset="-120"/>
               </a:rPr>
-              <a:t>-al</a:t>
+              <a:t>-ation</a:t>
             </a:r>
             <a:endParaRPr lang="en-US" sz="1300" dirty="0"/>
           </a:p>
@@ -39006,7 +39972,7 @@
         </p:nvSpPr>
         <p:spPr>
           <a:xfrm>
-            <a:off x="5349240" y="4178808"/>
+            <a:off x="5641848" y="4178808"/>
             <a:ext cx="365760" cy="420624"/>
           </a:xfrm>
           <a:prstGeom prst="rect">
@@ -39045,7 +40011,7 @@
         </p:nvSpPr>
         <p:spPr>
           <a:xfrm>
-            <a:off x="5760720" y="4178808"/>
+            <a:off x="6053328" y="4178808"/>
             <a:ext cx="2194560" cy="420624"/>
           </a:xfrm>
           <a:prstGeom prst="rect">
@@ -39072,7 +40038,7 @@
         </p:nvSpPr>
         <p:spPr>
           <a:xfrm>
-            <a:off x="5760720" y="4178808"/>
+            <a:off x="6053328" y="4178808"/>
             <a:ext cx="2194560" cy="420624"/>
           </a:xfrm>
           <a:prstGeom prst="rect">
@@ -39097,7 +40063,7 @@
                 <a:ea typeface="Trebuchet MS" pitchFamily="34" charset="-122"/>
                 <a:cs typeface="Trebuchet MS" pitchFamily="34" charset="-120"/>
               </a:rPr>
-              <a:t>uniform</a:t>
+              <a:t>formation</a:t>
             </a:r>
             <a:endParaRPr lang="en-US" sz="1400" dirty="0"/>
           </a:p>
@@ -39501,7 +40467,7 @@
                 <a:ea typeface="Trebuchet MS" pitchFamily="34" charset="-122"/>
                 <a:cs typeface="Trebuchet MS" pitchFamily="34" charset="-120"/>
               </a:rPr>
-              <a:t>uniform</a:t>
+              <a:t>formation</a:t>
             </a:r>
             <a:endParaRPr lang="en-US" sz="1200" dirty="0"/>
           </a:p>
@@ -39567,7 +40533,7 @@
                 <a:ea typeface="Calibri" pitchFamily="34" charset="-122"/>
                 <a:cs typeface="Calibri" pitchFamily="34" charset="-120"/>
               </a:rPr>
-              <a:t>A set of matching clothes worn by members of a group, like students or soldiers.</a:t>
+              <a:t>The way something is arranged or shaped, like clouds forming a pattern in the sky.</a:t>
             </a:r>
             <a:endParaRPr lang="en-US" sz="1200" dirty="0"/>
           </a:p>
@@ -39706,7 +40672,7 @@
                 <a:ea typeface="Calibri" pitchFamily="34" charset="-122"/>
                 <a:cs typeface="Calibri" pitchFamily="34" charset="-120"/>
               </a:rPr>
-              <a:t>To do something in front of an audience, like sing, dance, or act.</a:t>
+              <a:t>To completely change something into something different, like a caterpillar changing into a butterfly.</a:t>
             </a:r>
             <a:endParaRPr lang="en-US" sz="1200" dirty="0"/>
           </a:p>
@@ -39779,7 +40745,7 @@
                 <a:ea typeface="Trebuchet MS" pitchFamily="34" charset="-122"/>
                 <a:cs typeface="Trebuchet MS" pitchFamily="34" charset="-120"/>
               </a:rPr>
-              <a:t>inform</a:t>
+              <a:t>uniform</a:t>
             </a:r>
             <a:endParaRPr lang="en-US" sz="1200" dirty="0"/>
           </a:p>
@@ -39845,7 +40811,7 @@
                 <a:ea typeface="Calibri" pitchFamily="34" charset="-122"/>
                 <a:cs typeface="Calibri" pitchFamily="34" charset="-120"/>
               </a:rPr>
-              <a:t>To tell someone about something so they know about it.</a:t>
+              <a:t>A set of matching clothes worn by a group of people, like a school uniform.</a:t>
             </a:r>
             <a:endParaRPr lang="en-US" sz="1200" dirty="0"/>
           </a:p>
@@ -39918,7 +40884,7 @@
                 <a:ea typeface="Trebuchet MS" pitchFamily="34" charset="-122"/>
                 <a:cs typeface="Trebuchet MS" pitchFamily="34" charset="-120"/>
               </a:rPr>
-              <a:t>perform</a:t>
+              <a:t>transform</a:t>
             </a:r>
             <a:endParaRPr lang="en-US" sz="1200" dirty="0"/>
           </a:p>
@@ -39984,7 +40950,7 @@
                 <a:ea typeface="Calibri" pitchFamily="34" charset="-122"/>
                 <a:cs typeface="Calibri" pitchFamily="34" charset="-120"/>
               </a:rPr>
-              <a:t>To completely change the shape or appearance of something.</a:t>
+              <a:t>To tell someone important facts or news about something.</a:t>
             </a:r>
             <a:endParaRPr lang="en-US" sz="1200" dirty="0"/>
           </a:p>
@@ -40057,7 +41023,7 @@
                 <a:ea typeface="Trebuchet MS" pitchFamily="34" charset="-122"/>
                 <a:cs typeface="Trebuchet MS" pitchFamily="34" charset="-120"/>
               </a:rPr>
-              <a:t>transform</a:t>
+              <a:t>inform</a:t>
             </a:r>
             <a:endParaRPr lang="en-US" sz="1200" dirty="0"/>
           </a:p>
@@ -40123,7 +41089,7 @@
                 <a:ea typeface="Calibri" pitchFamily="34" charset="-122"/>
                 <a:cs typeface="Calibri" pitchFamily="34" charset="-120"/>
               </a:rPr>
-              <a:t>Following proper rules or customs, like wearing smart clothes to a special event.</a:t>
+              <a:t>Something done in a proper, official way, like wearing smart clothes to a special event.</a:t>
             </a:r>
             <a:endParaRPr lang="en-US" sz="1200" dirty="0"/>
           </a:p>
@@ -40196,7 +41162,7 @@
                 <a:ea typeface="Trebuchet MS" pitchFamily="34" charset="-122"/>
                 <a:cs typeface="Trebuchet MS" pitchFamily="34" charset="-120"/>
               </a:rPr>
-              <a:t>formation</a:t>
+              <a:t>perform</a:t>
             </a:r>
             <a:endParaRPr lang="en-US" sz="1200" dirty="0"/>
           </a:p>
@@ -40262,7 +41228,7 @@
                 <a:ea typeface="Calibri" pitchFamily="34" charset="-122"/>
                 <a:cs typeface="Calibri" pitchFamily="34" charset="-120"/>
               </a:rPr>
-              <a:t>The way something is arranged or shaped, like clouds or rocks.</a:t>
+              <a:t>To do something in front of an audience, like acting in a play or playing music.</a:t>
             </a:r>
             <a:endParaRPr lang="en-US" sz="1200" dirty="0"/>
           </a:p>
@@ -40401,7 +41367,7 @@
                 <a:ea typeface="Calibri" pitchFamily="34" charset="-122"/>
                 <a:cs typeface="Calibri" pitchFamily="34" charset="-120"/>
               </a:rPr>
-              <a:t>To change something to make it better than it was before.</a:t>
+              <a:t>To change something to make it better, like improving rules that are not working well.</a:t>
             </a:r>
             <a:endParaRPr lang="en-US" sz="1200" dirty="0"/>
           </a:p>
@@ -40896,7 +41862,7 @@
                 <a:ea typeface="Calibri" pitchFamily="34" charset="-122"/>
                 <a:cs typeface="Calibri" pitchFamily="34" charset="-120"/>
               </a:rPr>
-              <a:t>The students had to wear their school uniform every day, including a white shirt and navy shorts.</a:t>
+              <a:t>The students had to perform their science experiments in front of the whole class.</a:t>
             </a:r>
             <a:endParaRPr lang="en-US" sz="1500" dirty="0"/>
           </a:p>
@@ -41060,7 +42026,7 @@
                 <a:ea typeface="Calibri" pitchFamily="34" charset="-122"/>
                 <a:cs typeface="Calibri" pitchFamily="34" charset="-120"/>
               </a:rPr>
-              <a:t>The scientists watched the rock formation carefully to learn about how the mountains were shaped.</a:t>
+              <a:t>The teacher will inform parents about the upcoming excursion at the end of the week.</a:t>
             </a:r>
             <a:endParaRPr lang="en-US" sz="1500" dirty="0"/>
           </a:p>
@@ -41224,7 +42190,7 @@
                 <a:ea typeface="Calibri" pitchFamily="34" charset="-122"/>
                 <a:cs typeface="Calibri" pitchFamily="34" charset="-120"/>
               </a:rPr>
-              <a:t>Our class will perform a short play about the water cycle for the rest of the school.</a:t>
+              <a:t>The rock formation in the national park looked like a giant sleeping bear.</a:t>
             </a:r>
             <a:endParaRPr lang="en-US" sz="1500" dirty="0"/>
           </a:p>
